--- a/06_relazioni_e_parametri/Slides_v2/05b_metodo-suzuki-trotter.pptx
+++ b/06_relazioni_e_parametri/Slides_v2/05b_metodo-suzuki-trotter.pptx
@@ -781,7 +781,7 @@
       </p:sp>
       <p:sp>
         <p:nvSpPr>
-          <p:cNvPr id="5" name="Text 3"/>
+          <p:cNvPr id="5" name="Titolo dimero"/>
           <p:cNvSpPr txBox="1"/>
           <p:nvPr/>
         </p:nvSpPr>
@@ -897,69 +897,6 @@
       </p:sp>
       <p:pic>
         <p:nvPicPr>
-          <p:cNvPr id="12" name="Image 3" descr="/home/claude/deck/assets/preview_s6_breakout.png" hidden="1"/>
-          <p:cNvPicPr>
-            <a:picLocks noChangeAspect="1"/>
-          </p:cNvPicPr>
-          <p:nvPr/>
-        </p:nvPicPr>
-        <p:blipFill>
-          <a:blip r:embed="rId3"/>
-          <a:stretch>
-            <a:fillRect/>
-          </a:stretch>
-        </p:blipFill>
-        <p:spPr>
-          <a:xfrm>
-            <a:off x="640080" y="4023360"/>
-            <a:ext cx="4572000" cy="2331720"/>
-          </a:xfrm>
-          <a:prstGeom prst="rect">
-            <a:avLst/>
-          </a:prstGeom>
-        </p:spPr>
-      </p:pic>
-      <p:sp>
-        <p:nvSpPr>
-          <p:cNvPr id="13" name="Text 7" hidden="1"/>
-          <p:cNvSpPr txBox="1"/>
-          <p:nvPr/>
-        </p:nvSpPr>
-        <p:spPr>
-          <a:xfrm>
-            <a:off x="5486400" y="4023360"/>
-            <a:ext cx="6062472" cy="2331720"/>
-          </a:xfrm>
-          <a:prstGeom prst="rect">
-            <a:avLst/>
-          </a:prstGeom>
-          <a:noFill/>
-          <a:ln/>
-        </p:spPr>
-        <p:txBody>
-          <a:bodyPr wrap="square" lIns="0" tIns="0" rIns="0" bIns="0" rtlCol="0" anchor="ctr"/>
-          <a:lstStyle/>
-          <a:p>
-            <a:pPr marL="0" indent="0">
-              <a:buNone/>
-            </a:pPr>
-            <a:r>
-              <a:rPr lang="en-US" sz="1700" dirty="0">
-                <a:solidFill>
-                  <a:srgbClr val="16233A"/>
-                </a:solidFill>
-                <a:latin typeface="Calibri" pitchFamily="34" charset="0"/>
-                <a:ea typeface="Calibri" pitchFamily="34" charset="-122"/>
-                <a:cs typeface="Calibri" pitchFamily="34" charset="-120"/>
-              </a:rPr>
-              <a:t>2 rotazioni Ry indipendenti rompono la conservazione di M — a partire da |10⟩ si copre l'intero spazio a 2 qubit (F = 1)</a:t>
-            </a:r>
-            <a:endParaRPr lang="en-US" sz="1700" dirty="0"/>
-          </a:p>
-        </p:txBody>
-      </p:sp>
-      <p:pic>
-        <p:nvPicPr>
           <p:cNvPr id="17" name="Picture 16">
             <a:extLst>
               <a:ext uri="{FF2B5EF4-FFF2-40B4-BE49-F238E27FC236}">
@@ -973,7 +910,7 @@
           <p:nvPr/>
         </p:nvPicPr>
         <p:blipFill>
-          <a:blip r:embed="rId4"/>
+          <a:blip r:embed="rId3"/>
           <a:srcRect/>
           <a:stretch/>
         </p:blipFill>
@@ -1159,8 +1096,8 @@
           </a:p>
         </p:txBody>
       </p:sp>
-      <mc:AlternateContent xmlns:mc="http://schemas.openxmlformats.org/markup-compatibility/2006" xmlns:a14="http://schemas.microsoft.com/office/drawing/2010/main">
-        <mc:Choice Requires="a14">
+      <mc:AlternateContent xmlns:mc="http://schemas.openxmlformats.org/markup-compatibility/2006">
+        <mc:Choice xmlns:a14="http://schemas.microsoft.com/office/drawing/2010/main" Requires="a14">
           <p:sp>
             <p:nvSpPr>
               <p:cNvPr id="25" name="Text 7">
@@ -1383,7 +1320,7 @@
             </p:txBody>
           </p:sp>
         </mc:Choice>
-        <mc:Fallback xmlns="">
+        <mc:Fallback>
           <p:sp>
             <p:nvSpPr>
               <p:cNvPr id="25" name="Text 7">
@@ -1407,7 +1344,7 @@
                 <a:avLst/>
               </a:prstGeom>
               <a:blipFill>
-                <a:blip r:embed="rId5"/>
+                <a:blip r:embed="rId4"/>
                 <a:stretch>
                   <a:fillRect l="-2485"/>
                 </a:stretch>
@@ -1429,96 +1366,6 @@
           </p:sp>
         </mc:Fallback>
       </mc:AlternateContent>
-      <p:pic>
-        <p:nvPicPr>
-          <p:cNvPr id="29" name="Picture 28" hidden="1">
-            <a:extLst>
-              <a:ext uri="{FF2B5EF4-FFF2-40B4-BE49-F238E27FC236}">
-                <a16:creationId xmlns:a16="http://schemas.microsoft.com/office/drawing/2014/main" id="{1966943B-1F22-FD6B-9A21-011908E1CFEB}"/>
-              </a:ext>
-            </a:extLst>
-          </p:cNvPr>
-          <p:cNvPicPr>
-            <a:picLocks noChangeAspect="1"/>
-          </p:cNvPicPr>
-          <p:nvPr/>
-        </p:nvPicPr>
-        <p:blipFill>
-          <a:blip r:embed="rId6"/>
-          <a:stretch>
-            <a:fillRect/>
-          </a:stretch>
-        </p:blipFill>
-        <p:spPr>
-          <a:xfrm>
-            <a:off x="6127183" y="2345519"/>
-            <a:ext cx="5484994" cy="1465285"/>
-          </a:xfrm>
-          <a:prstGeom prst="rect">
-            <a:avLst/>
-          </a:prstGeom>
-        </p:spPr>
-      </p:pic>
-      <p:pic>
-        <p:nvPicPr>
-          <p:cNvPr id="31" name="Picture 30" hidden="1">
-            <a:extLst>
-              <a:ext uri="{FF2B5EF4-FFF2-40B4-BE49-F238E27FC236}">
-                <a16:creationId xmlns:a16="http://schemas.microsoft.com/office/drawing/2014/main" id="{4EC42088-BA5A-CE4E-9EAC-56C235061F18}"/>
-              </a:ext>
-            </a:extLst>
-          </p:cNvPr>
-          <p:cNvPicPr>
-            <a:picLocks noChangeAspect="1"/>
-          </p:cNvPicPr>
-          <p:nvPr/>
-        </p:nvPicPr>
-        <p:blipFill>
-          <a:blip r:embed="rId7"/>
-          <a:stretch>
-            <a:fillRect/>
-          </a:stretch>
-        </p:blipFill>
-        <p:spPr>
-          <a:xfrm>
-            <a:off x="6248402" y="5463646"/>
-            <a:ext cx="4741339" cy="1394354"/>
-          </a:xfrm>
-          <a:prstGeom prst="rect">
-            <a:avLst/>
-          </a:prstGeom>
-        </p:spPr>
-      </p:pic>
-      <p:pic>
-        <p:nvPicPr>
-          <p:cNvPr id="33" name="Picture 32" hidden="1">
-            <a:extLst>
-              <a:ext uri="{FF2B5EF4-FFF2-40B4-BE49-F238E27FC236}">
-                <a16:creationId xmlns:a16="http://schemas.microsoft.com/office/drawing/2014/main" id="{E7800E15-7499-93BA-0CA8-143D85CD1435}"/>
-              </a:ext>
-            </a:extLst>
-          </p:cNvPr>
-          <p:cNvPicPr>
-            <a:picLocks noChangeAspect="1"/>
-          </p:cNvPicPr>
-          <p:nvPr/>
-        </p:nvPicPr>
-        <p:blipFill>
-          <a:blip r:embed="rId8"/>
-          <a:stretch>
-            <a:fillRect/>
-          </a:stretch>
-        </p:blipFill>
-        <p:spPr>
-          <a:xfrm>
-            <a:off x="6248402" y="4071492"/>
-            <a:ext cx="5077447" cy="1296053"/>
-          </a:xfrm>
-          <a:prstGeom prst="rect">
-            <a:avLst/>
-          </a:prstGeom>
-        </p:spPr>
-      </p:pic>
       <mc:AlternateContent xmlns:mc="http://schemas.openxmlformats.org/markup-compatibility/2006">
         <mc:Choice xmlns:a14="http://schemas.microsoft.com/office/drawing/2010/main" Requires="a14">
           <p:graphicFrame>
@@ -1536,14 +1383,14 @@
               <p:nvPr>
                 <p:extLst>
                   <p:ext uri="{D42A27DB-BD31-4B8C-83A1-F6EECF244321}">
-                    <p14:modId xmlns:p14="http://schemas.microsoft.com/office/powerpoint/2010/main" val="3049964786"/>
+                    <p14:modId xmlns:p14="http://schemas.microsoft.com/office/powerpoint/2010/main" val="3273326381"/>
                   </p:ext>
                 </p:extLst>
               </p:nvPr>
             </p:nvGraphicFramePr>
             <p:xfrm>
-              <a:off x="5823906" y="4624233"/>
-              <a:ext cx="5724966" cy="1678826"/>
+              <a:off x="6067856" y="4773169"/>
+              <a:ext cx="5452872" cy="1446366"/>
             </p:xfrm>
             <a:graphic>
               <a:graphicData uri="http://schemas.openxmlformats.org/drawingml/2006/table">
@@ -1552,14 +1399,14 @@
                     <a:tableStyleId>{5C22544A-7EE6-4342-B048-85BDC9FD1C3A}</a:tableStyleId>
                   </a:tblPr>
                   <a:tblGrid>
-                    <a:gridCol w="2862483">
+                    <a:gridCol w="2726436">
                       <a:extLst>
                         <a:ext uri="{9D8B030D-6E8A-4147-A177-3AD203B41FA5}">
                           <a16:colId xmlns:a16="http://schemas.microsoft.com/office/drawing/2014/main" val="2110275228"/>
                         </a:ext>
                       </a:extLst>
                     </a:gridCol>
-                    <a:gridCol w="2862483">
+                    <a:gridCol w="2726436">
                       <a:extLst>
                         <a:ext uri="{9D8B030D-6E8A-4147-A177-3AD203B41FA5}">
                           <a16:colId xmlns:a16="http://schemas.microsoft.com/office/drawing/2014/main" val="660264833"/>
@@ -1567,7 +1414,7 @@
                       </a:extLst>
                     </a:gridCol>
                   </a:tblGrid>
-                  <a:tr h="412369">
+                  <a:tr h="355270">
                     <a:tc>
                       <a:txBody>
                         <a:bodyPr/>
@@ -1590,12 +1437,6 @@
                               </m:r>
                             </m:oMath>
                           </a14:m>
-                          <a:r>
-                            <a:rPr lang="en-US" sz="1400" dirty="0">
-                              <a:effectLst/>
-                            </a:rPr>
-                            <a:t>H</a:t>
-                          </a:r>
                           <a:endParaRPr lang="en-US" sz="1400" dirty="0"/>
                         </a:p>
                       </a:txBody>
@@ -1741,28 +1582,42 @@
                       </a:ext>
                     </a:extLst>
                   </a:tr>
-                  <a:tr h="468165">
+                  <a:tr h="403340">
                     <a:tc>
                       <a:txBody>
                         <a:bodyPr/>
                         <a:lstStyle/>
                         <a:p>
-                          <a:pPr/>
+                          <a:pPr marL="0" marR="0" lvl="0" indent="0" algn="l" defTabSz="914400" rtl="0" eaLnBrk="1" fontAlgn="auto" latinLnBrk="0" hangingPunct="1">
+                            <a:lnSpc>
+                              <a:spcPct val="100000"/>
+                            </a:lnSpc>
+                            <a:spcBef>
+                              <a:spcPts val="0"/>
+                            </a:spcBef>
+                            <a:spcAft>
+                              <a:spcPts val="0"/>
+                            </a:spcAft>
+                            <a:buClrTx/>
+                            <a:buSzTx/>
+                            <a:buFontTx/>
+                            <a:buNone/>
+                            <a:tabLst/>
+                            <a:defRPr/>
+                          </a:pPr>
                           <a14:m>
                             <m:oMathPara xmlns:m="http://schemas.openxmlformats.org/officeDocument/2006/math">
                               <m:oMath>
                                 <m:r>
                                   <a:rPr lang="en-US" sz="1400" i="1" dirty="0" smtClean="0">
-                                    <a:effectLst/>
                                     <a:latin typeface="Cambria Math" panose="02040503050406030204" pitchFamily="18" charset="0"/>
                                   </a:rPr>
-                                  <m:t>𝐽</m:t>
+                                  <m:t>𝑏</m:t>
                                 </m:r>
                                 <m:d>
                                   <m:dPr>
                                     <m:ctrlPr>
                                       <a:rPr lang="en-US" sz="1400" i="1" dirty="0" smtClean="0">
-                                        <a:effectLst/>
                                         <a:latin typeface="Cambria Math" panose="02040503050406030204" pitchFamily="18" charset="0"/>
                                       </a:rPr>
                                     </m:ctrlPr>
@@ -1770,84 +1625,24 @@
                                   <m:e>
                                     <m:r>
                                       <a:rPr lang="en-US" sz="1400" i="1" dirty="0" smtClean="0">
-                                        <a:effectLst/>
-                                        <a:latin typeface="Cambria Math" panose="02040503050406030204" pitchFamily="18" charset="0"/>
-                                      </a:rPr>
-                                      <m:t>𝑋</m:t>
-                                    </m:r>
-                                    <m:r>
-                                      <a:rPr lang="en-US" sz="1400" i="0" dirty="0" smtClean="0">
-                                        <a:effectLst/>
-                                        <a:latin typeface="Cambria Math" panose="02040503050406030204" pitchFamily="18" charset="0"/>
-                                      </a:rPr>
-                                      <m:t>1​</m:t>
-                                    </m:r>
-                                    <m:r>
-                                      <a:rPr lang="en-US" sz="1400" i="1" dirty="0" smtClean="0">
-                                        <a:effectLst/>
-                                        <a:latin typeface="Cambria Math" panose="02040503050406030204" pitchFamily="18" charset="0"/>
-                                      </a:rPr>
-                                      <m:t>𝑋</m:t>
-                                    </m:r>
-                                    <m:r>
-                                      <a:rPr lang="en-US" sz="1400" i="0" dirty="0" smtClean="0">
-                                        <a:effectLst/>
-                                        <a:latin typeface="Cambria Math" panose="02040503050406030204" pitchFamily="18" charset="0"/>
-                                      </a:rPr>
-                                      <m:t>2​+</m:t>
-                                    </m:r>
-                                    <m:r>
-                                      <a:rPr lang="en-US" sz="1400" i="1" dirty="0" smtClean="0">
-                                        <a:effectLst/>
-                                        <a:latin typeface="Cambria Math" panose="02040503050406030204" pitchFamily="18" charset="0"/>
-                                      </a:rPr>
-                                      <m:t>𝑌</m:t>
-                                    </m:r>
-                                    <m:r>
-                                      <a:rPr lang="en-US" sz="1400" i="0" dirty="0" smtClean="0">
-                                        <a:effectLst/>
-                                        <a:latin typeface="Cambria Math" panose="02040503050406030204" pitchFamily="18" charset="0"/>
-                                      </a:rPr>
-                                      <m:t>1​</m:t>
-                                    </m:r>
-                                    <m:r>
-                                      <a:rPr lang="en-US" sz="1400" i="1" dirty="0" smtClean="0">
-                                        <a:effectLst/>
-                                        <a:latin typeface="Cambria Math" panose="02040503050406030204" pitchFamily="18" charset="0"/>
-                                      </a:rPr>
-                                      <m:t>𝑌</m:t>
-                                    </m:r>
-                                    <m:r>
-                                      <a:rPr lang="en-US" sz="1400" i="0" dirty="0" smtClean="0">
-                                        <a:effectLst/>
-                                        <a:latin typeface="Cambria Math" panose="02040503050406030204" pitchFamily="18" charset="0"/>
-                                      </a:rPr>
-                                      <m:t>2​+</m:t>
-                                    </m:r>
-                                    <m:r>
-                                      <a:rPr lang="en-US" sz="1400" i="1" dirty="0" smtClean="0">
-                                        <a:effectLst/>
                                         <a:latin typeface="Cambria Math" panose="02040503050406030204" pitchFamily="18" charset="0"/>
                                       </a:rPr>
                                       <m:t>𝑍</m:t>
                                     </m:r>
                                     <m:r>
                                       <a:rPr lang="en-US" sz="1400" i="0" dirty="0" smtClean="0">
-                                        <a:effectLst/>
-                                        <a:latin typeface="Cambria Math" panose="02040503050406030204" pitchFamily="18" charset="0"/>
-                                      </a:rPr>
-                                      <m:t>1​</m:t>
+                                        <a:latin typeface="Cambria Math" panose="02040503050406030204" pitchFamily="18" charset="0"/>
+                                      </a:rPr>
+                                      <m:t>1​+</m:t>
                                     </m:r>
                                     <m:r>
                                       <a:rPr lang="en-US" sz="1400" i="1" dirty="0" smtClean="0">
-                                        <a:effectLst/>
                                         <a:latin typeface="Cambria Math" panose="02040503050406030204" pitchFamily="18" charset="0"/>
                                       </a:rPr>
                                       <m:t>𝑍</m:t>
                                     </m:r>
                                     <m:r>
                                       <a:rPr lang="en-US" sz="1400" i="0" dirty="0" smtClean="0">
-                                        <a:effectLst/>
                                         <a:latin typeface="Cambria Math" panose="02040503050406030204" pitchFamily="18" charset="0"/>
                                       </a:rPr>
                                       <m:t>2​</m:t>
@@ -1867,10 +1662,6 @@
                         <a:bodyPr/>
                         <a:lstStyle/>
                         <a:p>
-                          <a:r>
-                            <a:rPr lang="en-US" sz="1400" dirty="0"/>
-                            <a:t> </a:t>
-                          </a:r>
                           <a14:m>
                             <m:oMath xmlns:m="http://schemas.openxmlformats.org/officeDocument/2006/math">
                               <m:sSubSup>
@@ -2108,26 +1899,44 @@
                       </a:ext>
                     </a:extLst>
                   </a:tr>
-                  <a:tr h="399146">
+                  <a:tr h="343878">
                     <a:tc>
                       <a:txBody>
                         <a:bodyPr/>
                         <a:lstStyle/>
                         <a:p>
-                          <a:pPr/>
+                          <a:pPr marL="0" marR="0" lvl="0" indent="0" algn="l" defTabSz="914400" rtl="0" eaLnBrk="1" fontAlgn="auto" latinLnBrk="0" hangingPunct="1">
+                            <a:lnSpc>
+                              <a:spcPct val="100000"/>
+                            </a:lnSpc>
+                            <a:spcBef>
+                              <a:spcPts val="0"/>
+                            </a:spcBef>
+                            <a:spcAft>
+                              <a:spcPts val="0"/>
+                            </a:spcAft>
+                            <a:buClrTx/>
+                            <a:buSzTx/>
+                            <a:buFontTx/>
+                            <a:buNone/>
+                            <a:tabLst/>
+                            <a:defRPr/>
+                          </a:pPr>
                           <a14:m>
                             <m:oMathPara xmlns:m="http://schemas.openxmlformats.org/officeDocument/2006/math">
                               <m:oMath>
                                 <m:r>
                                   <a:rPr lang="en-US" sz="1400" i="1" dirty="0" smtClean="0">
+                                    <a:effectLst/>
                                     <a:latin typeface="Cambria Math" panose="02040503050406030204" pitchFamily="18" charset="0"/>
                                   </a:rPr>
-                                  <m:t>𝑏</m:t>
+                                  <m:t>𝐽</m:t>
                                 </m:r>
                                 <m:d>
                                   <m:dPr>
                                     <m:ctrlPr>
                                       <a:rPr lang="en-US" sz="1400" i="1" dirty="0" smtClean="0">
+                                        <a:effectLst/>
                                         <a:latin typeface="Cambria Math" panose="02040503050406030204" pitchFamily="18" charset="0"/>
                                       </a:rPr>
                                     </m:ctrlPr>
@@ -2135,24 +1944,84 @@
                                   <m:e>
                                     <m:r>
                                       <a:rPr lang="en-US" sz="1400" i="1" dirty="0" smtClean="0">
+                                        <a:effectLst/>
+                                        <a:latin typeface="Cambria Math" panose="02040503050406030204" pitchFamily="18" charset="0"/>
+                                      </a:rPr>
+                                      <m:t>𝑋</m:t>
+                                    </m:r>
+                                    <m:r>
+                                      <a:rPr lang="en-US" sz="1400" i="0" dirty="0" smtClean="0">
+                                        <a:effectLst/>
+                                        <a:latin typeface="Cambria Math" panose="02040503050406030204" pitchFamily="18" charset="0"/>
+                                      </a:rPr>
+                                      <m:t>1​</m:t>
+                                    </m:r>
+                                    <m:r>
+                                      <a:rPr lang="en-US" sz="1400" i="1" dirty="0" smtClean="0">
+                                        <a:effectLst/>
+                                        <a:latin typeface="Cambria Math" panose="02040503050406030204" pitchFamily="18" charset="0"/>
+                                      </a:rPr>
+                                      <m:t>𝑋</m:t>
+                                    </m:r>
+                                    <m:r>
+                                      <a:rPr lang="en-US" sz="1400" i="0" dirty="0" smtClean="0">
+                                        <a:effectLst/>
+                                        <a:latin typeface="Cambria Math" panose="02040503050406030204" pitchFamily="18" charset="0"/>
+                                      </a:rPr>
+                                      <m:t>2​+</m:t>
+                                    </m:r>
+                                    <m:r>
+                                      <a:rPr lang="en-US" sz="1400" i="1" dirty="0" smtClean="0">
+                                        <a:effectLst/>
+                                        <a:latin typeface="Cambria Math" panose="02040503050406030204" pitchFamily="18" charset="0"/>
+                                      </a:rPr>
+                                      <m:t>𝑌</m:t>
+                                    </m:r>
+                                    <m:r>
+                                      <a:rPr lang="en-US" sz="1400" i="0" dirty="0" smtClean="0">
+                                        <a:effectLst/>
+                                        <a:latin typeface="Cambria Math" panose="02040503050406030204" pitchFamily="18" charset="0"/>
+                                      </a:rPr>
+                                      <m:t>1​</m:t>
+                                    </m:r>
+                                    <m:r>
+                                      <a:rPr lang="en-US" sz="1400" i="1" dirty="0" smtClean="0">
+                                        <a:effectLst/>
+                                        <a:latin typeface="Cambria Math" panose="02040503050406030204" pitchFamily="18" charset="0"/>
+                                      </a:rPr>
+                                      <m:t>𝑌</m:t>
+                                    </m:r>
+                                    <m:r>
+                                      <a:rPr lang="en-US" sz="1400" i="0" dirty="0" smtClean="0">
+                                        <a:effectLst/>
+                                        <a:latin typeface="Cambria Math" panose="02040503050406030204" pitchFamily="18" charset="0"/>
+                                      </a:rPr>
+                                      <m:t>2​+</m:t>
+                                    </m:r>
+                                    <m:r>
+                                      <a:rPr lang="en-US" sz="1400" i="1" dirty="0" smtClean="0">
+                                        <a:effectLst/>
                                         <a:latin typeface="Cambria Math" panose="02040503050406030204" pitchFamily="18" charset="0"/>
                                       </a:rPr>
                                       <m:t>𝑍</m:t>
                                     </m:r>
                                     <m:r>
                                       <a:rPr lang="en-US" sz="1400" i="0" dirty="0" smtClean="0">
-                                        <a:latin typeface="Cambria Math" panose="02040503050406030204" pitchFamily="18" charset="0"/>
-                                      </a:rPr>
-                                      <m:t>1​+</m:t>
+                                        <a:effectLst/>
+                                        <a:latin typeface="Cambria Math" panose="02040503050406030204" pitchFamily="18" charset="0"/>
+                                      </a:rPr>
+                                      <m:t>1​</m:t>
                                     </m:r>
                                     <m:r>
                                       <a:rPr lang="en-US" sz="1400" i="1" dirty="0" smtClean="0">
+                                        <a:effectLst/>
                                         <a:latin typeface="Cambria Math" panose="02040503050406030204" pitchFamily="18" charset="0"/>
                                       </a:rPr>
                                       <m:t>𝑍</m:t>
                                     </m:r>
                                     <m:r>
                                       <a:rPr lang="en-US" sz="1400" i="0" dirty="0" smtClean="0">
+                                        <a:effectLst/>
                                         <a:latin typeface="Cambria Math" panose="02040503050406030204" pitchFamily="18" charset="0"/>
                                       </a:rPr>
                                       <m:t>2​</m:t>
@@ -2470,7 +2339,7 @@
                       </a:ext>
                     </a:extLst>
                   </a:tr>
-                  <a:tr h="399146">
+                  <a:tr h="343878">
                     <a:tc>
                       <a:txBody>
                         <a:bodyPr/>
@@ -2801,14 +2670,14 @@
               <p:nvPr>
                 <p:extLst>
                   <p:ext uri="{D42A27DB-BD31-4B8C-83A1-F6EECF244321}">
-                    <p14:modId xmlns:p14="http://schemas.microsoft.com/office/powerpoint/2010/main" val="3049964786"/>
+                    <p14:modId xmlns:p14="http://schemas.microsoft.com/office/powerpoint/2010/main" val="3273326381"/>
                   </p:ext>
                 </p:extLst>
               </p:nvPr>
             </p:nvGraphicFramePr>
             <p:xfrm>
-              <a:off x="5823906" y="4624233"/>
-              <a:ext cx="5724966" cy="1678826"/>
+              <a:off x="6067856" y="4773169"/>
+              <a:ext cx="5452872" cy="1446366"/>
             </p:xfrm>
             <a:graphic>
               <a:graphicData uri="http://schemas.openxmlformats.org/drawingml/2006/table">
@@ -2817,14 +2686,14 @@
                     <a:tableStyleId>{5C22544A-7EE6-4342-B048-85BDC9FD1C3A}</a:tableStyleId>
                   </a:tblPr>
                   <a:tblGrid>
-                    <a:gridCol w="2862483">
+                    <a:gridCol w="2726436">
                       <a:extLst>
                         <a:ext uri="{9D8B030D-6E8A-4147-A177-3AD203B41FA5}">
                           <a16:colId xmlns:a16="http://schemas.microsoft.com/office/drawing/2014/main" val="2110275228"/>
                         </a:ext>
                       </a:extLst>
                     </a:gridCol>
-                    <a:gridCol w="2862483">
+                    <a:gridCol w="2726436">
                       <a:extLst>
                         <a:ext uri="{9D8B030D-6E8A-4147-A177-3AD203B41FA5}">
                           <a16:colId xmlns:a16="http://schemas.microsoft.com/office/drawing/2014/main" val="660264833"/>
@@ -2832,7 +2701,7 @@
                       </a:extLst>
                     </a:gridCol>
                   </a:tblGrid>
-                  <a:tr h="412369">
+                  <a:tr h="355270">
                     <a:tc>
                       <a:txBody>
                         <a:bodyPr/>
@@ -2843,9 +2712,9 @@
                       </a:txBody>
                       <a:tcPr anchor="ctr">
                         <a:blipFill>
-                          <a:blip r:embed="rId9"/>
+                          <a:blip r:embed="rId5"/>
                           <a:stretch>
-                            <a:fillRect l="-213" t="-1471" r="-100851" b="-310294"/>
+                            <a:fillRect l="-223" t="-3448" r="-100893" b="-315517"/>
                           </a:stretch>
                         </a:blipFill>
                       </a:tcPr>
@@ -2860,9 +2729,9 @@
                       </a:txBody>
                       <a:tcPr>
                         <a:blipFill>
-                          <a:blip r:embed="rId9"/>
+                          <a:blip r:embed="rId5"/>
                           <a:stretch>
-                            <a:fillRect l="-100213" t="-1471" r="-851" b="-310294"/>
+                            <a:fillRect l="-100447" t="-3448" r="-1119" b="-315517"/>
                           </a:stretch>
                         </a:blipFill>
                       </a:tcPr>
@@ -2873,7 +2742,7 @@
                       </a:ext>
                     </a:extLst>
                   </a:tr>
-                  <a:tr h="468165">
+                  <a:tr h="403340">
                     <a:tc>
                       <a:txBody>
                         <a:bodyPr/>
@@ -2884,9 +2753,9 @@
                       </a:txBody>
                       <a:tcPr>
                         <a:blipFill>
-                          <a:blip r:embed="rId9"/>
+                          <a:blip r:embed="rId5"/>
                           <a:stretch>
-                            <a:fillRect l="-213" t="-89610" r="-100851" b="-174026"/>
+                            <a:fillRect l="-223" t="-89552" r="-100893" b="-173134"/>
                           </a:stretch>
                         </a:blipFill>
                       </a:tcPr>
@@ -2901,9 +2770,9 @@
                       </a:txBody>
                       <a:tcPr>
                         <a:blipFill>
-                          <a:blip r:embed="rId9"/>
+                          <a:blip r:embed="rId5"/>
                           <a:stretch>
-                            <a:fillRect l="-100213" t="-89610" r="-851" b="-174026"/>
+                            <a:fillRect l="-100447" t="-89552" r="-1119" b="-173134"/>
                           </a:stretch>
                         </a:blipFill>
                       </a:tcPr>
@@ -2914,7 +2783,7 @@
                       </a:ext>
                     </a:extLst>
                   </a:tr>
-                  <a:tr h="399146">
+                  <a:tr h="343878">
                     <a:tc>
                       <a:txBody>
                         <a:bodyPr/>
@@ -2925,9 +2794,9 @@
                       </a:txBody>
                       <a:tcPr>
                         <a:blipFill>
-                          <a:blip r:embed="rId9"/>
+                          <a:blip r:embed="rId5"/>
                           <a:stretch>
-                            <a:fillRect l="-213" t="-224615" r="-100851" b="-106154"/>
+                            <a:fillRect l="-223" t="-226786" r="-100893" b="-107143"/>
                           </a:stretch>
                         </a:blipFill>
                       </a:tcPr>
@@ -2942,9 +2811,9 @@
                       </a:txBody>
                       <a:tcPr>
                         <a:blipFill>
-                          <a:blip r:embed="rId9"/>
+                          <a:blip r:embed="rId5"/>
                           <a:stretch>
-                            <a:fillRect l="-100213" t="-224615" r="-851" b="-106154"/>
+                            <a:fillRect l="-100447" t="-226786" r="-1119" b="-107143"/>
                           </a:stretch>
                         </a:blipFill>
                       </a:tcPr>
@@ -2955,7 +2824,7 @@
                       </a:ext>
                     </a:extLst>
                   </a:tr>
-                  <a:tr h="399146">
+                  <a:tr h="343878">
                     <a:tc>
                       <a:txBody>
                         <a:bodyPr/>
@@ -2966,9 +2835,9 @@
                       </a:txBody>
                       <a:tcPr>
                         <a:blipFill>
-                          <a:blip r:embed="rId9"/>
+                          <a:blip r:embed="rId5"/>
                           <a:stretch>
-                            <a:fillRect l="-213" t="-319697" r="-100851" b="-4545"/>
+                            <a:fillRect l="-223" t="-321053" r="-100893" b="-5263"/>
                           </a:stretch>
                         </a:blipFill>
                       </a:tcPr>
@@ -2983,9 +2852,9 @@
                       </a:txBody>
                       <a:tcPr>
                         <a:blipFill>
-                          <a:blip r:embed="rId9"/>
+                          <a:blip r:embed="rId5"/>
                           <a:stretch>
-                            <a:fillRect l="-100213" t="-319697" r="-851" b="-4545"/>
+                            <a:fillRect l="-100447" t="-321053" r="-1119" b="-5263"/>
                           </a:stretch>
                         </a:blipFill>
                       </a:tcPr>
@@ -3002,6 +2871,5436 @@
           </p:graphicFrame>
         </mc:Fallback>
       </mc:AlternateContent>
+      <mc:AlternateContent xmlns:mc="http://schemas.openxmlformats.org/markup-compatibility/2006">
+        <mc:Choice xmlns:a14="http://schemas.microsoft.com/office/drawing/2010/main" Requires="a14">
+          <p:sp>
+            <p:nvSpPr>
+              <p:cNvPr id="6" name="TextBox 5">
+                <a:extLst>
+                  <a:ext uri="{FF2B5EF4-FFF2-40B4-BE49-F238E27FC236}">
+                    <a16:creationId xmlns:a16="http://schemas.microsoft.com/office/drawing/2014/main" id="{47FDBE2E-A3C7-AAC5-4BF9-18AB83260F2F}"/>
+                  </a:ext>
+                </a:extLst>
+              </p:cNvPr>
+              <p:cNvSpPr txBox="1"/>
+              <p:nvPr/>
+            </p:nvSpPr>
+            <p:spPr>
+              <a:xfrm>
+                <a:off x="6482975" y="6359768"/>
+                <a:ext cx="5040496" cy="276999"/>
+              </a:xfrm>
+              <a:prstGeom prst="rect">
+                <a:avLst/>
+              </a:prstGeom>
+              <a:noFill/>
+            </p:spPr>
+            <p:txBody>
+              <a:bodyPr wrap="square" rtlCol="0">
+                <a:spAutoFit/>
+              </a:bodyPr>
+              <a:lstStyle/>
+              <a:p>
+                <a14:m>
+                  <m:oMath xmlns:m="http://schemas.openxmlformats.org/officeDocument/2006/math">
+                    <m:r>
+                      <a:rPr lang="en-US" sz="1200" i="1" dirty="0" smtClean="0">
+                        <a:latin typeface="Cambria Math" panose="02040503050406030204" pitchFamily="18" charset="0"/>
+                      </a:rPr>
+                      <m:t>𝑋</m:t>
+                    </m:r>
+                    <m:r>
+                      <a:rPr lang="en-US" sz="1200" i="0" dirty="0">
+                        <a:latin typeface="Cambria Math" panose="02040503050406030204" pitchFamily="18" charset="0"/>
+                      </a:rPr>
+                      <m:t>1​</m:t>
+                    </m:r>
+                    <m:r>
+                      <a:rPr lang="en-US" sz="1200" i="1" dirty="0">
+                        <a:latin typeface="Cambria Math" panose="02040503050406030204" pitchFamily="18" charset="0"/>
+                      </a:rPr>
+                      <m:t>𝑍</m:t>
+                    </m:r>
+                    <m:r>
+                      <a:rPr lang="en-US" sz="1200" i="0" dirty="0">
+                        <a:latin typeface="Cambria Math" panose="02040503050406030204" pitchFamily="18" charset="0"/>
+                      </a:rPr>
+                      <m:t>2​⟶</m:t>
+                    </m:r>
+                    <m:r>
+                      <a:rPr lang="en-US" sz="1200" i="1" dirty="0">
+                        <a:latin typeface="Cambria Math" panose="02040503050406030204" pitchFamily="18" charset="0"/>
+                      </a:rPr>
+                      <m:t>𝐻</m:t>
+                    </m:r>
+                    <m:d>
+                      <m:dPr>
+                        <m:ctrlPr>
+                          <a:rPr lang="en-US" sz="1200" i="0" dirty="0">
+                            <a:latin typeface="Cambria Math" panose="02040503050406030204" pitchFamily="18" charset="0"/>
+                          </a:rPr>
+                        </m:ctrlPr>
+                      </m:dPr>
+                      <m:e>
+                        <m:r>
+                          <a:rPr lang="en-US" sz="1200" i="0" dirty="0">
+                            <a:latin typeface="Cambria Math" panose="02040503050406030204" pitchFamily="18" charset="0"/>
+                          </a:rPr>
+                          <m:t>1</m:t>
+                        </m:r>
+                      </m:e>
+                    </m:d>
+                    <m:r>
+                      <a:rPr lang="en-US" sz="1200" i="1" dirty="0">
+                        <a:latin typeface="Cambria Math" panose="02040503050406030204" pitchFamily="18" charset="0"/>
+                      </a:rPr>
+                      <m:t>𝑅𝑍𝑍</m:t>
+                    </m:r>
+                    <m:r>
+                      <a:rPr lang="en-US" sz="1200" i="0" dirty="0">
+                        <a:latin typeface="Cambria Math" panose="02040503050406030204" pitchFamily="18" charset="0"/>
+                      </a:rPr>
+                      <m:t>​</m:t>
+                    </m:r>
+                    <m:d>
+                      <m:dPr>
+                        <m:ctrlPr>
+                          <a:rPr lang="en-US" sz="1200" i="1" dirty="0">
+                            <a:latin typeface="Cambria Math" panose="02040503050406030204" pitchFamily="18" charset="0"/>
+                          </a:rPr>
+                        </m:ctrlPr>
+                      </m:dPr>
+                      <m:e>
+                        <m:r>
+                          <a:rPr lang="en-US" sz="1200" i="1" dirty="0">
+                            <a:latin typeface="Cambria Math" panose="02040503050406030204" pitchFamily="18" charset="0"/>
+                          </a:rPr>
+                          <m:t>𝐷</m:t>
+                        </m:r>
+                        <m:r>
+                          <a:rPr lang="en-US" sz="1200" i="1" dirty="0">
+                            <a:latin typeface="Cambria Math" panose="02040503050406030204" pitchFamily="18" charset="0"/>
+                          </a:rPr>
+                          <m:t>𝜏</m:t>
+                        </m:r>
+                        <m:r>
+                          <a:rPr lang="en-US" sz="1200" i="0" dirty="0">
+                            <a:latin typeface="Cambria Math" panose="02040503050406030204" pitchFamily="18" charset="0"/>
+                          </a:rPr>
+                          <m:t>/2</m:t>
+                        </m:r>
+                      </m:e>
+                    </m:d>
+                    <m:r>
+                      <a:rPr lang="en-US" sz="1200" i="1" dirty="0">
+                        <a:latin typeface="Cambria Math" panose="02040503050406030204" pitchFamily="18" charset="0"/>
+                      </a:rPr>
+                      <m:t>𝐻</m:t>
+                    </m:r>
+                    <m:d>
+                      <m:dPr>
+                        <m:ctrlPr>
+                          <a:rPr lang="en-US" sz="1200" i="0" dirty="0">
+                            <a:latin typeface="Cambria Math" panose="02040503050406030204" pitchFamily="18" charset="0"/>
+                          </a:rPr>
+                        </m:ctrlPr>
+                      </m:dPr>
+                      <m:e>
+                        <m:r>
+                          <a:rPr lang="en-US" sz="1200" i="0" dirty="0">
+                            <a:latin typeface="Cambria Math" panose="02040503050406030204" pitchFamily="18" charset="0"/>
+                          </a:rPr>
+                          <m:t>1</m:t>
+                        </m:r>
+                      </m:e>
+                    </m:d>
+                  </m:oMath>
+                </a14:m>
+                <a:r>
+                  <a:rPr lang="en-US" sz="1200" dirty="0"/>
+                  <a:t>; </a:t>
+                </a:r>
+                <a14:m>
+                  <m:oMath xmlns:m="http://schemas.openxmlformats.org/officeDocument/2006/math">
+                    <m:r>
+                      <a:rPr lang="en-US" sz="1200" i="1" dirty="0" smtClean="0">
+                        <a:latin typeface="Cambria Math" panose="02040503050406030204" pitchFamily="18" charset="0"/>
+                      </a:rPr>
+                      <m:t>𝑍</m:t>
+                    </m:r>
+                    <m:r>
+                      <a:rPr lang="en-US" sz="1200" i="0" dirty="0">
+                        <a:latin typeface="Cambria Math" panose="02040503050406030204" pitchFamily="18" charset="0"/>
+                      </a:rPr>
+                      <m:t>1​</m:t>
+                    </m:r>
+                    <m:r>
+                      <a:rPr lang="en-US" sz="1200" i="1" dirty="0">
+                        <a:latin typeface="Cambria Math" panose="02040503050406030204" pitchFamily="18" charset="0"/>
+                      </a:rPr>
+                      <m:t>𝑋</m:t>
+                    </m:r>
+                    <m:r>
+                      <a:rPr lang="en-US" sz="1200" i="0" dirty="0">
+                        <a:latin typeface="Cambria Math" panose="02040503050406030204" pitchFamily="18" charset="0"/>
+                      </a:rPr>
+                      <m:t>2​⟶</m:t>
+                    </m:r>
+                    <m:r>
+                      <a:rPr lang="en-US" sz="1200" i="1" dirty="0">
+                        <a:latin typeface="Cambria Math" panose="02040503050406030204" pitchFamily="18" charset="0"/>
+                      </a:rPr>
+                      <m:t>𝐻</m:t>
+                    </m:r>
+                    <m:d>
+                      <m:dPr>
+                        <m:ctrlPr>
+                          <a:rPr lang="en-US" sz="1200" i="0" dirty="0">
+                            <a:latin typeface="Cambria Math" panose="02040503050406030204" pitchFamily="18" charset="0"/>
+                          </a:rPr>
+                        </m:ctrlPr>
+                      </m:dPr>
+                      <m:e>
+                        <m:r>
+                          <a:rPr lang="en-US" sz="1200" i="0" dirty="0">
+                            <a:latin typeface="Cambria Math" panose="02040503050406030204" pitchFamily="18" charset="0"/>
+                          </a:rPr>
+                          <m:t>2</m:t>
+                        </m:r>
+                      </m:e>
+                    </m:d>
+                    <m:r>
+                      <a:rPr lang="en-US" sz="1200" i="1" dirty="0">
+                        <a:latin typeface="Cambria Math" panose="02040503050406030204" pitchFamily="18" charset="0"/>
+                      </a:rPr>
+                      <m:t>𝑅𝑍𝑍</m:t>
+                    </m:r>
+                    <m:r>
+                      <a:rPr lang="en-US" sz="1200" i="0" dirty="0">
+                        <a:latin typeface="Cambria Math" panose="02040503050406030204" pitchFamily="18" charset="0"/>
+                      </a:rPr>
+                      <m:t>​</m:t>
+                    </m:r>
+                    <m:d>
+                      <m:dPr>
+                        <m:ctrlPr>
+                          <a:rPr lang="en-US" sz="1200" i="0" dirty="0">
+                            <a:latin typeface="Cambria Math" panose="02040503050406030204" pitchFamily="18" charset="0"/>
+                          </a:rPr>
+                        </m:ctrlPr>
+                      </m:dPr>
+                      <m:e>
+                        <m:r>
+                          <a:rPr lang="en-US" sz="1200" i="0" dirty="0">
+                            <a:latin typeface="Cambria Math" panose="02040503050406030204" pitchFamily="18" charset="0"/>
+                          </a:rPr>
+                          <m:t>−</m:t>
+                        </m:r>
+                        <m:r>
+                          <a:rPr lang="en-US" sz="1200" i="1" dirty="0">
+                            <a:latin typeface="Cambria Math" panose="02040503050406030204" pitchFamily="18" charset="0"/>
+                          </a:rPr>
+                          <m:t>𝐷</m:t>
+                        </m:r>
+                        <m:r>
+                          <a:rPr lang="en-US" sz="1200" i="1" dirty="0">
+                            <a:latin typeface="Cambria Math" panose="02040503050406030204" pitchFamily="18" charset="0"/>
+                          </a:rPr>
+                          <m:t>𝜏</m:t>
+                        </m:r>
+                        <m:r>
+                          <a:rPr lang="en-US" sz="1200" i="0" dirty="0">
+                            <a:latin typeface="Cambria Math" panose="02040503050406030204" pitchFamily="18" charset="0"/>
+                          </a:rPr>
+                          <m:t>/2</m:t>
+                        </m:r>
+                      </m:e>
+                    </m:d>
+                    <m:r>
+                      <a:rPr lang="en-US" sz="1200" i="1" dirty="0">
+                        <a:latin typeface="Cambria Math" panose="02040503050406030204" pitchFamily="18" charset="0"/>
+                      </a:rPr>
+                      <m:t>𝐻</m:t>
+                    </m:r>
+                    <m:d>
+                      <m:dPr>
+                        <m:ctrlPr>
+                          <a:rPr lang="en-US" sz="1200" i="0" dirty="0">
+                            <a:latin typeface="Cambria Math" panose="02040503050406030204" pitchFamily="18" charset="0"/>
+                          </a:rPr>
+                        </m:ctrlPr>
+                      </m:dPr>
+                      <m:e>
+                        <m:r>
+                          <a:rPr lang="en-US" sz="1200" i="0" dirty="0">
+                            <a:latin typeface="Cambria Math" panose="02040503050406030204" pitchFamily="18" charset="0"/>
+                          </a:rPr>
+                          <m:t>2</m:t>
+                        </m:r>
+                      </m:e>
+                    </m:d>
+                  </m:oMath>
+                </a14:m>
+                <a:endParaRPr lang="en-US" sz="1200" dirty="0"/>
+              </a:p>
+            </p:txBody>
+          </p:sp>
+        </mc:Choice>
+        <mc:Fallback>
+          <p:sp>
+            <p:nvSpPr>
+              <p:cNvPr id="6" name="TextBox 5">
+                <a:extLst>
+                  <a:ext uri="{FF2B5EF4-FFF2-40B4-BE49-F238E27FC236}">
+                    <a16:creationId xmlns:a16="http://schemas.microsoft.com/office/drawing/2014/main" id="{47FDBE2E-A3C7-AAC5-4BF9-18AB83260F2F}"/>
+                  </a:ext>
+                </a:extLst>
+              </p:cNvPr>
+              <p:cNvSpPr txBox="1">
+                <a:spLocks noRot="1" noChangeAspect="1" noMove="1" noResize="1" noEditPoints="1" noAdjustHandles="1" noChangeArrowheads="1" noChangeShapeType="1" noTextEdit="1"/>
+              </p:cNvSpPr>
+              <p:nvPr/>
+            </p:nvSpPr>
+            <p:spPr>
+              <a:xfrm>
+                <a:off x="6482975" y="6359768"/>
+                <a:ext cx="5040496" cy="276999"/>
+              </a:xfrm>
+              <a:prstGeom prst="rect">
+                <a:avLst/>
+              </a:prstGeom>
+              <a:blipFill>
+                <a:blip r:embed="rId6"/>
+                <a:stretch>
+                  <a:fillRect b="-15217"/>
+                </a:stretch>
+              </a:blipFill>
+            </p:spPr>
+            <p:txBody>
+              <a:bodyPr/>
+              <a:lstStyle/>
+              <a:p>
+                <a:r>
+                  <a:rPr lang="en-US">
+                    <a:noFill/>
+                  </a:rPr>
+                  <a:t> </a:t>
+                </a:r>
+              </a:p>
+            </p:txBody>
+          </p:sp>
+        </mc:Fallback>
+      </mc:AlternateContent>
+      <mc:AlternateContent xmlns:mc="http://schemas.openxmlformats.org/markup-compatibility/2006">
+        <mc:Choice xmlns:a14="http://schemas.microsoft.com/office/drawing/2010/main" Requires="a14">
+          <p:sp>
+            <p:nvSpPr>
+              <p:cNvPr id="10" name="TextBox 9">
+                <a:extLst>
+                  <a:ext uri="{FF2B5EF4-FFF2-40B4-BE49-F238E27FC236}">
+                    <a16:creationId xmlns:a16="http://schemas.microsoft.com/office/drawing/2014/main" id="{6C1968B5-0E0C-82AF-3A13-668CB350F3BF}"/>
+                  </a:ext>
+                </a:extLst>
+              </p:cNvPr>
+              <p:cNvSpPr txBox="1"/>
+              <p:nvPr/>
+            </p:nvSpPr>
+            <p:spPr>
+              <a:xfrm>
+                <a:off x="1388601" y="4147832"/>
+                <a:ext cx="9358203" cy="276999"/>
+              </a:xfrm>
+              <a:prstGeom prst="rect">
+                <a:avLst/>
+              </a:prstGeom>
+              <a:noFill/>
+            </p:spPr>
+            <p:txBody>
+              <a:bodyPr wrap="none" rtlCol="0">
+                <a:spAutoFit/>
+              </a:bodyPr>
+              <a:lstStyle/>
+              <a:p>
+                <a14:m>
+                  <m:oMathPara xmlns:m="http://schemas.openxmlformats.org/officeDocument/2006/math">
+                    <m:oMath>
+                      <m:r>
+                        <a:rPr lang="en-US" sz="1200" i="1" dirty="0" smtClean="0">
+                          <a:latin typeface="Cambria Math" panose="02040503050406030204" pitchFamily="18" charset="0"/>
+                        </a:rPr>
+                        <m:t>𝑅𝑍</m:t>
+                      </m:r>
+                      <m:d>
+                        <m:dPr>
+                          <m:ctrlPr>
+                            <a:rPr lang="en-US" sz="1200" i="0" dirty="0">
+                              <a:latin typeface="Cambria Math" panose="02040503050406030204" pitchFamily="18" charset="0"/>
+                            </a:rPr>
+                          </m:ctrlPr>
+                        </m:dPr>
+                        <m:e>
+                          <m:r>
+                            <a:rPr lang="en-US" sz="1200" i="0" dirty="0">
+                              <a:latin typeface="Cambria Math" panose="02040503050406030204" pitchFamily="18" charset="0"/>
+                            </a:rPr>
+                            <m:t>1</m:t>
+                          </m:r>
+                        </m:e>
+                      </m:d>
+                      <m:r>
+                        <a:rPr lang="en-US" sz="1200" i="0" dirty="0">
+                          <a:latin typeface="Cambria Math" panose="02040503050406030204" pitchFamily="18" charset="0"/>
+                        </a:rPr>
+                        <m:t>​</m:t>
+                      </m:r>
+                      <m:d>
+                        <m:dPr>
+                          <m:ctrlPr>
+                            <a:rPr lang="en-US" sz="1200" i="1" dirty="0">
+                              <a:latin typeface="Cambria Math" panose="02040503050406030204" pitchFamily="18" charset="0"/>
+                            </a:rPr>
+                          </m:ctrlPr>
+                        </m:dPr>
+                        <m:e>
+                          <m:r>
+                            <a:rPr lang="en-US" sz="1200" i="1" dirty="0">
+                              <a:latin typeface="Cambria Math" panose="02040503050406030204" pitchFamily="18" charset="0"/>
+                            </a:rPr>
+                            <m:t>𝑏</m:t>
+                          </m:r>
+                          <m:r>
+                            <a:rPr lang="en-US" sz="1200" i="1" dirty="0">
+                              <a:latin typeface="Cambria Math" panose="02040503050406030204" pitchFamily="18" charset="0"/>
+                            </a:rPr>
+                            <m:t>𝜏</m:t>
+                          </m:r>
+                        </m:e>
+                      </m:d>
+                      <m:r>
+                        <a:rPr lang="en-US" sz="1200" i="0" dirty="0">
+                          <a:latin typeface="Cambria Math" panose="02040503050406030204" pitchFamily="18" charset="0"/>
+                        </a:rPr>
+                        <m:t>→</m:t>
+                      </m:r>
+                      <m:r>
+                        <a:rPr lang="en-US" sz="1200" i="1" dirty="0">
+                          <a:latin typeface="Cambria Math" panose="02040503050406030204" pitchFamily="18" charset="0"/>
+                        </a:rPr>
+                        <m:t>𝑅𝑍</m:t>
+                      </m:r>
+                      <m:d>
+                        <m:dPr>
+                          <m:ctrlPr>
+                            <a:rPr lang="en-US" sz="1200" i="0" dirty="0">
+                              <a:latin typeface="Cambria Math" panose="02040503050406030204" pitchFamily="18" charset="0"/>
+                            </a:rPr>
+                          </m:ctrlPr>
+                        </m:dPr>
+                        <m:e>
+                          <m:r>
+                            <a:rPr lang="en-US" sz="1200" i="0" dirty="0">
+                              <a:latin typeface="Cambria Math" panose="02040503050406030204" pitchFamily="18" charset="0"/>
+                            </a:rPr>
+                            <m:t>2</m:t>
+                          </m:r>
+                        </m:e>
+                      </m:d>
+                      <m:r>
+                        <a:rPr lang="en-US" sz="1200" i="0" dirty="0">
+                          <a:latin typeface="Cambria Math" panose="02040503050406030204" pitchFamily="18" charset="0"/>
+                        </a:rPr>
+                        <m:t>​</m:t>
+                      </m:r>
+                      <m:d>
+                        <m:dPr>
+                          <m:ctrlPr>
+                            <a:rPr lang="en-US" sz="1200" i="1" dirty="0">
+                              <a:latin typeface="Cambria Math" panose="02040503050406030204" pitchFamily="18" charset="0"/>
+                            </a:rPr>
+                          </m:ctrlPr>
+                        </m:dPr>
+                        <m:e>
+                          <m:r>
+                            <a:rPr lang="en-US" sz="1200" i="1" dirty="0">
+                              <a:latin typeface="Cambria Math" panose="02040503050406030204" pitchFamily="18" charset="0"/>
+                            </a:rPr>
+                            <m:t>𝑏</m:t>
+                          </m:r>
+                          <m:r>
+                            <a:rPr lang="en-US" sz="1200" i="1" dirty="0">
+                              <a:latin typeface="Cambria Math" panose="02040503050406030204" pitchFamily="18" charset="0"/>
+                            </a:rPr>
+                            <m:t>𝜏</m:t>
+                          </m:r>
+                        </m:e>
+                      </m:d>
+                      <m:r>
+                        <a:rPr lang="en-US" sz="1200" i="0" dirty="0">
+                          <a:latin typeface="Cambria Math" panose="02040503050406030204" pitchFamily="18" charset="0"/>
+                        </a:rPr>
+                        <m:t>→</m:t>
+                      </m:r>
+                      <m:r>
+                        <a:rPr lang="en-US" sz="1200" i="1" dirty="0">
+                          <a:latin typeface="Cambria Math" panose="02040503050406030204" pitchFamily="18" charset="0"/>
+                        </a:rPr>
+                        <m:t>𝑅𝑋𝑋</m:t>
+                      </m:r>
+                      <m:r>
+                        <a:rPr lang="en-US" sz="1200" i="0" dirty="0">
+                          <a:latin typeface="Cambria Math" panose="02040503050406030204" pitchFamily="18" charset="0"/>
+                        </a:rPr>
+                        <m:t>​</m:t>
+                      </m:r>
+                      <m:d>
+                        <m:dPr>
+                          <m:ctrlPr>
+                            <a:rPr lang="en-US" sz="1200" i="1" dirty="0">
+                              <a:latin typeface="Cambria Math" panose="02040503050406030204" pitchFamily="18" charset="0"/>
+                            </a:rPr>
+                          </m:ctrlPr>
+                        </m:dPr>
+                        <m:e>
+                          <m:r>
+                            <a:rPr lang="en-US" sz="1200" i="1" dirty="0">
+                              <a:latin typeface="Cambria Math" panose="02040503050406030204" pitchFamily="18" charset="0"/>
+                            </a:rPr>
+                            <m:t>𝐽</m:t>
+                          </m:r>
+                          <m:r>
+                            <a:rPr lang="en-US" sz="1200" i="1" dirty="0">
+                              <a:latin typeface="Cambria Math" panose="02040503050406030204" pitchFamily="18" charset="0"/>
+                            </a:rPr>
+                            <m:t>𝜏</m:t>
+                          </m:r>
+                          <m:r>
+                            <a:rPr lang="en-US" sz="1200" i="0" dirty="0">
+                              <a:latin typeface="Cambria Math" panose="02040503050406030204" pitchFamily="18" charset="0"/>
+                            </a:rPr>
+                            <m:t>/2</m:t>
+                          </m:r>
+                        </m:e>
+                      </m:d>
+                      <m:r>
+                        <a:rPr lang="en-US" sz="1200" i="0" dirty="0">
+                          <a:latin typeface="Cambria Math" panose="02040503050406030204" pitchFamily="18" charset="0"/>
+                        </a:rPr>
+                        <m:t>→</m:t>
+                      </m:r>
+                      <m:r>
+                        <a:rPr lang="en-US" sz="1200" i="1" dirty="0">
+                          <a:latin typeface="Cambria Math" panose="02040503050406030204" pitchFamily="18" charset="0"/>
+                        </a:rPr>
+                        <m:t>𝑅𝑌𝑌</m:t>
+                      </m:r>
+                      <m:r>
+                        <a:rPr lang="en-US" sz="1200" i="0" dirty="0">
+                          <a:latin typeface="Cambria Math" panose="02040503050406030204" pitchFamily="18" charset="0"/>
+                        </a:rPr>
+                        <m:t>​</m:t>
+                      </m:r>
+                      <m:d>
+                        <m:dPr>
+                          <m:ctrlPr>
+                            <a:rPr lang="en-US" sz="1200" i="1" dirty="0">
+                              <a:latin typeface="Cambria Math" panose="02040503050406030204" pitchFamily="18" charset="0"/>
+                            </a:rPr>
+                          </m:ctrlPr>
+                        </m:dPr>
+                        <m:e>
+                          <m:r>
+                            <a:rPr lang="en-US" sz="1200" i="1" dirty="0">
+                              <a:latin typeface="Cambria Math" panose="02040503050406030204" pitchFamily="18" charset="0"/>
+                            </a:rPr>
+                            <m:t>𝐽</m:t>
+                          </m:r>
+                          <m:r>
+                            <a:rPr lang="en-US" sz="1200" i="1" dirty="0">
+                              <a:latin typeface="Cambria Math" panose="02040503050406030204" pitchFamily="18" charset="0"/>
+                            </a:rPr>
+                            <m:t>𝜏</m:t>
+                          </m:r>
+                          <m:r>
+                            <a:rPr lang="en-US" sz="1200" i="0" dirty="0">
+                              <a:latin typeface="Cambria Math" panose="02040503050406030204" pitchFamily="18" charset="0"/>
+                            </a:rPr>
+                            <m:t>/2</m:t>
+                          </m:r>
+                        </m:e>
+                      </m:d>
+                      <m:r>
+                        <a:rPr lang="en-US" sz="1200" i="0" dirty="0">
+                          <a:latin typeface="Cambria Math" panose="02040503050406030204" pitchFamily="18" charset="0"/>
+                        </a:rPr>
+                        <m:t>→</m:t>
+                      </m:r>
+                      <m:r>
+                        <a:rPr lang="en-US" sz="1200" i="1" dirty="0">
+                          <a:latin typeface="Cambria Math" panose="02040503050406030204" pitchFamily="18" charset="0"/>
+                        </a:rPr>
+                        <m:t>𝑅𝑍𝑍</m:t>
+                      </m:r>
+                      <m:r>
+                        <a:rPr lang="en-US" sz="1200" i="0" dirty="0">
+                          <a:latin typeface="Cambria Math" panose="02040503050406030204" pitchFamily="18" charset="0"/>
+                        </a:rPr>
+                        <m:t>​</m:t>
+                      </m:r>
+                      <m:d>
+                        <m:dPr>
+                          <m:ctrlPr>
+                            <a:rPr lang="en-US" sz="1200" i="1" dirty="0">
+                              <a:latin typeface="Cambria Math" panose="02040503050406030204" pitchFamily="18" charset="0"/>
+                            </a:rPr>
+                          </m:ctrlPr>
+                        </m:dPr>
+                        <m:e>
+                          <m:r>
+                            <a:rPr lang="en-US" sz="1200" i="1" dirty="0">
+                              <a:latin typeface="Cambria Math" panose="02040503050406030204" pitchFamily="18" charset="0"/>
+                            </a:rPr>
+                            <m:t>𝐽</m:t>
+                          </m:r>
+                          <m:r>
+                            <a:rPr lang="en-US" sz="1200" i="1" dirty="0">
+                              <a:latin typeface="Cambria Math" panose="02040503050406030204" pitchFamily="18" charset="0"/>
+                            </a:rPr>
+                            <m:t>𝜏</m:t>
+                          </m:r>
+                          <m:r>
+                            <a:rPr lang="en-US" sz="1200" i="0" dirty="0">
+                              <a:latin typeface="Cambria Math" panose="02040503050406030204" pitchFamily="18" charset="0"/>
+                            </a:rPr>
+                            <m:t>/2</m:t>
+                          </m:r>
+                        </m:e>
+                      </m:d>
+                      <m:r>
+                        <a:rPr lang="en-US" sz="1200" i="0" dirty="0">
+                          <a:latin typeface="Cambria Math" panose="02040503050406030204" pitchFamily="18" charset="0"/>
+                        </a:rPr>
+                        <m:t>→</m:t>
+                      </m:r>
+                      <m:r>
+                        <a:rPr lang="en-US" sz="1200" i="1" dirty="0">
+                          <a:latin typeface="Cambria Math" panose="02040503050406030204" pitchFamily="18" charset="0"/>
+                        </a:rPr>
+                        <m:t>𝑏𝑙𝑜𝑐𝑐𝑜</m:t>
+                      </m:r>
+                      <m:r>
+                        <a:rPr lang="en-US" sz="1200" i="0" dirty="0">
+                          <a:latin typeface="Cambria Math" panose="02040503050406030204" pitchFamily="18" charset="0"/>
+                        </a:rPr>
+                        <m:t> </m:t>
+                      </m:r>
+                      <m:r>
+                        <a:rPr lang="en-US" sz="1200" i="1" dirty="0">
+                          <a:latin typeface="Cambria Math" panose="02040503050406030204" pitchFamily="18" charset="0"/>
+                        </a:rPr>
+                        <m:t>𝐷𝑀</m:t>
+                      </m:r>
+                      <m:r>
+                        <a:rPr lang="en-US" sz="1200" b="0" i="1" dirty="0" smtClean="0">
+                          <a:latin typeface="Cambria Math" panose="02040503050406030204" pitchFamily="18" charset="0"/>
+                        </a:rPr>
+                        <m:t> </m:t>
+                      </m:r>
+                      <m:r>
+                        <a:rPr lang="en-US" sz="1200" i="1" dirty="0">
+                          <a:latin typeface="Cambria Math" panose="02040503050406030204" pitchFamily="18" charset="0"/>
+                        </a:rPr>
+                        <m:t>𝐻</m:t>
+                      </m:r>
+                      <m:d>
+                        <m:dPr>
+                          <m:ctrlPr>
+                            <a:rPr lang="en-US" sz="1200" i="0" dirty="0">
+                              <a:latin typeface="Cambria Math" panose="02040503050406030204" pitchFamily="18" charset="0"/>
+                            </a:rPr>
+                          </m:ctrlPr>
+                        </m:dPr>
+                        <m:e>
+                          <m:r>
+                            <a:rPr lang="en-US" sz="1200" i="0" dirty="0">
+                              <a:latin typeface="Cambria Math" panose="02040503050406030204" pitchFamily="18" charset="0"/>
+                            </a:rPr>
+                            <m:t>1</m:t>
+                          </m:r>
+                        </m:e>
+                      </m:d>
+                      <m:r>
+                        <a:rPr lang="en-US" sz="1200" i="1" dirty="0">
+                          <a:latin typeface="Cambria Math" panose="02040503050406030204" pitchFamily="18" charset="0"/>
+                        </a:rPr>
+                        <m:t>𝑅𝑍𝑍</m:t>
+                      </m:r>
+                      <m:r>
+                        <a:rPr lang="en-US" sz="1200" i="0" dirty="0">
+                          <a:latin typeface="Cambria Math" panose="02040503050406030204" pitchFamily="18" charset="0"/>
+                        </a:rPr>
+                        <m:t>​</m:t>
+                      </m:r>
+                      <m:d>
+                        <m:dPr>
+                          <m:ctrlPr>
+                            <a:rPr lang="en-US" sz="1200" i="1" dirty="0">
+                              <a:latin typeface="Cambria Math" panose="02040503050406030204" pitchFamily="18" charset="0"/>
+                            </a:rPr>
+                          </m:ctrlPr>
+                        </m:dPr>
+                        <m:e>
+                          <m:r>
+                            <a:rPr lang="en-US" sz="1200" i="1" dirty="0">
+                              <a:latin typeface="Cambria Math" panose="02040503050406030204" pitchFamily="18" charset="0"/>
+                            </a:rPr>
+                            <m:t>𝐷</m:t>
+                          </m:r>
+                          <m:r>
+                            <a:rPr lang="en-US" sz="1200" i="1" dirty="0">
+                              <a:latin typeface="Cambria Math" panose="02040503050406030204" pitchFamily="18" charset="0"/>
+                            </a:rPr>
+                            <m:t>𝜏</m:t>
+                          </m:r>
+                          <m:r>
+                            <a:rPr lang="en-US" sz="1200" i="0" dirty="0">
+                              <a:latin typeface="Cambria Math" panose="02040503050406030204" pitchFamily="18" charset="0"/>
+                            </a:rPr>
+                            <m:t>/2</m:t>
+                          </m:r>
+                        </m:e>
+                      </m:d>
+                      <m:r>
+                        <a:rPr lang="en-US" sz="1200" i="1" dirty="0">
+                          <a:latin typeface="Cambria Math" panose="02040503050406030204" pitchFamily="18" charset="0"/>
+                        </a:rPr>
+                        <m:t>𝐻</m:t>
+                      </m:r>
+                      <m:d>
+                        <m:dPr>
+                          <m:ctrlPr>
+                            <a:rPr lang="en-US" sz="1200" i="0" dirty="0">
+                              <a:latin typeface="Cambria Math" panose="02040503050406030204" pitchFamily="18" charset="0"/>
+                            </a:rPr>
+                          </m:ctrlPr>
+                        </m:dPr>
+                        <m:e>
+                          <m:r>
+                            <a:rPr lang="en-US" sz="1200" i="0" dirty="0">
+                              <a:latin typeface="Cambria Math" panose="02040503050406030204" pitchFamily="18" charset="0"/>
+                            </a:rPr>
+                            <m:t>1</m:t>
+                          </m:r>
+                        </m:e>
+                      </m:d>
+                      <m:r>
+                        <a:rPr lang="en-US" sz="1200" i="0" dirty="0">
+                          <a:latin typeface="Cambria Math" panose="02040503050406030204" pitchFamily="18" charset="0"/>
+                        </a:rPr>
+                        <m:t>​​→</m:t>
+                      </m:r>
+                      <m:r>
+                        <a:rPr lang="en-US" sz="1200" i="1" dirty="0">
+                          <a:latin typeface="Cambria Math" panose="02040503050406030204" pitchFamily="18" charset="0"/>
+                        </a:rPr>
+                        <m:t>𝑏𝑙𝑜𝑐𝑐𝑜</m:t>
+                      </m:r>
+                      <m:r>
+                        <a:rPr lang="en-US" sz="1200" i="0" dirty="0">
+                          <a:latin typeface="Cambria Math" panose="02040503050406030204" pitchFamily="18" charset="0"/>
+                        </a:rPr>
+                        <m:t> </m:t>
+                      </m:r>
+                      <m:r>
+                        <a:rPr lang="en-US" sz="1200" i="1" dirty="0">
+                          <a:latin typeface="Cambria Math" panose="02040503050406030204" pitchFamily="18" charset="0"/>
+                        </a:rPr>
+                        <m:t>𝐷𝑀</m:t>
+                      </m:r>
+                      <m:r>
+                        <a:rPr lang="en-US" sz="1200" b="0" i="1" dirty="0" smtClean="0">
+                          <a:latin typeface="Cambria Math" panose="02040503050406030204" pitchFamily="18" charset="0"/>
+                        </a:rPr>
+                        <m:t> </m:t>
+                      </m:r>
+                      <m:r>
+                        <a:rPr lang="en-US" sz="1200" i="1" dirty="0">
+                          <a:latin typeface="Cambria Math" panose="02040503050406030204" pitchFamily="18" charset="0"/>
+                        </a:rPr>
+                        <m:t>𝐻</m:t>
+                      </m:r>
+                      <m:d>
+                        <m:dPr>
+                          <m:ctrlPr>
+                            <a:rPr lang="en-US" sz="1200" i="0" dirty="0">
+                              <a:latin typeface="Cambria Math" panose="02040503050406030204" pitchFamily="18" charset="0"/>
+                            </a:rPr>
+                          </m:ctrlPr>
+                        </m:dPr>
+                        <m:e>
+                          <m:r>
+                            <a:rPr lang="en-US" sz="1200" i="0" dirty="0">
+                              <a:latin typeface="Cambria Math" panose="02040503050406030204" pitchFamily="18" charset="0"/>
+                            </a:rPr>
+                            <m:t>2</m:t>
+                          </m:r>
+                        </m:e>
+                      </m:d>
+                      <m:r>
+                        <a:rPr lang="en-US" sz="1200" i="1" dirty="0">
+                          <a:latin typeface="Cambria Math" panose="02040503050406030204" pitchFamily="18" charset="0"/>
+                        </a:rPr>
+                        <m:t>𝑅𝑍𝑍</m:t>
+                      </m:r>
+                      <m:r>
+                        <a:rPr lang="en-US" sz="1200" i="0" dirty="0">
+                          <a:latin typeface="Cambria Math" panose="02040503050406030204" pitchFamily="18" charset="0"/>
+                        </a:rPr>
+                        <m:t>​</m:t>
+                      </m:r>
+                      <m:d>
+                        <m:dPr>
+                          <m:ctrlPr>
+                            <a:rPr lang="en-US" sz="1200" i="0" dirty="0">
+                              <a:latin typeface="Cambria Math" panose="02040503050406030204" pitchFamily="18" charset="0"/>
+                            </a:rPr>
+                          </m:ctrlPr>
+                        </m:dPr>
+                        <m:e>
+                          <m:r>
+                            <a:rPr lang="en-US" sz="1200" i="0" dirty="0">
+                              <a:latin typeface="Cambria Math" panose="02040503050406030204" pitchFamily="18" charset="0"/>
+                            </a:rPr>
+                            <m:t>−</m:t>
+                          </m:r>
+                          <m:r>
+                            <a:rPr lang="en-US" sz="1200" i="1" dirty="0">
+                              <a:latin typeface="Cambria Math" panose="02040503050406030204" pitchFamily="18" charset="0"/>
+                            </a:rPr>
+                            <m:t>𝐷</m:t>
+                          </m:r>
+                          <m:r>
+                            <a:rPr lang="en-US" sz="1200" i="1" dirty="0">
+                              <a:latin typeface="Cambria Math" panose="02040503050406030204" pitchFamily="18" charset="0"/>
+                            </a:rPr>
+                            <m:t>𝜏</m:t>
+                          </m:r>
+                          <m:r>
+                            <a:rPr lang="en-US" sz="1200" i="0" dirty="0">
+                              <a:latin typeface="Cambria Math" panose="02040503050406030204" pitchFamily="18" charset="0"/>
+                            </a:rPr>
+                            <m:t>/2</m:t>
+                          </m:r>
+                        </m:e>
+                      </m:d>
+                      <m:r>
+                        <a:rPr lang="en-US" sz="1200" i="1" dirty="0">
+                          <a:latin typeface="Cambria Math" panose="02040503050406030204" pitchFamily="18" charset="0"/>
+                        </a:rPr>
+                        <m:t>𝐻</m:t>
+                      </m:r>
+                      <m:d>
+                        <m:dPr>
+                          <m:ctrlPr>
+                            <a:rPr lang="en-US" sz="1200" i="0" dirty="0">
+                              <a:latin typeface="Cambria Math" panose="02040503050406030204" pitchFamily="18" charset="0"/>
+                            </a:rPr>
+                          </m:ctrlPr>
+                        </m:dPr>
+                        <m:e>
+                          <m:r>
+                            <a:rPr lang="en-US" sz="1200" i="0" dirty="0">
+                              <a:latin typeface="Cambria Math" panose="02040503050406030204" pitchFamily="18" charset="0"/>
+                            </a:rPr>
+                            <m:t>2</m:t>
+                          </m:r>
+                        </m:e>
+                      </m:d>
+                      <m:r>
+                        <a:rPr lang="en-US" sz="1200" i="0" dirty="0">
+                          <a:latin typeface="Cambria Math" panose="02040503050406030204" pitchFamily="18" charset="0"/>
+                        </a:rPr>
+                        <m:t>​​</m:t>
+                      </m:r>
+                    </m:oMath>
+                  </m:oMathPara>
+                </a14:m>
+                <a:endParaRPr lang="en-US" sz="1200" dirty="0"/>
+              </a:p>
+            </p:txBody>
+          </p:sp>
+        </mc:Choice>
+        <mc:Fallback>
+          <p:sp>
+            <p:nvSpPr>
+              <p:cNvPr id="10" name="TextBox 9">
+                <a:extLst>
+                  <a:ext uri="{FF2B5EF4-FFF2-40B4-BE49-F238E27FC236}">
+                    <a16:creationId xmlns:a16="http://schemas.microsoft.com/office/drawing/2014/main" id="{6C1968B5-0E0C-82AF-3A13-668CB350F3BF}"/>
+                  </a:ext>
+                </a:extLst>
+              </p:cNvPr>
+              <p:cNvSpPr txBox="1">
+                <a:spLocks noRot="1" noChangeAspect="1" noMove="1" noResize="1" noEditPoints="1" noAdjustHandles="1" noChangeArrowheads="1" noChangeShapeType="1" noTextEdit="1"/>
+              </p:cNvSpPr>
+              <p:nvPr/>
+            </p:nvSpPr>
+            <p:spPr>
+              <a:xfrm>
+                <a:off x="1388601" y="4147832"/>
+                <a:ext cx="9358203" cy="276999"/>
+              </a:xfrm>
+              <a:prstGeom prst="rect">
+                <a:avLst/>
+              </a:prstGeom>
+              <a:blipFill>
+                <a:blip r:embed="rId7"/>
+                <a:stretch>
+                  <a:fillRect b="-4348"/>
+                </a:stretch>
+              </a:blipFill>
+            </p:spPr>
+            <p:txBody>
+              <a:bodyPr/>
+              <a:lstStyle/>
+              <a:p>
+                <a:r>
+                  <a:rPr lang="en-US">
+                    <a:noFill/>
+                  </a:rPr>
+                  <a:t> </a:t>
+                </a:r>
+              </a:p>
+            </p:txBody>
+          </p:sp>
+        </mc:Fallback>
+      </mc:AlternateContent>
+      <p:sp>
+        <p:nvSpPr>
+          <p:cNvPr id="9" name="Titolo trimero">
+            <a:extLst>
+              <a:ext uri="{FF2B5EF4-FFF2-40B4-BE49-F238E27FC236}">
+                <a16:creationId xmlns:a16="http://schemas.microsoft.com/office/drawing/2014/main" id="{391A99A2-3C52-4FAE-0EE5-5B67D764AA14}"/>
+              </a:ext>
+            </a:extLst>
+          </p:cNvPr>
+          <p:cNvSpPr txBox="1"/>
+          <p:nvPr/>
+        </p:nvSpPr>
+        <p:spPr>
+          <a:xfrm>
+            <a:off x="611936" y="1554480"/>
+            <a:ext cx="10911535" cy="530352"/>
+          </a:xfrm>
+          <a:prstGeom prst="rect">
+            <a:avLst/>
+          </a:prstGeom>
+          <a:noFill/>
+          <a:ln/>
+        </p:spPr>
+        <p:txBody>
+          <a:bodyPr wrap="square" lIns="0" tIns="0" rIns="0" bIns="0" rtlCol="0" anchor="ctr"/>
+          <a:lstStyle/>
+          <a:p>
+            <a:pPr marL="0" indent="0" algn="ctr">
+              <a:buNone/>
+            </a:pPr>
+            <a:r>
+              <a:rPr lang="en-US" sz="2100" b="1" dirty="0" err="1">
+                <a:solidFill>
+                  <a:srgbClr val="173A5E"/>
+                </a:solidFill>
+                <a:latin typeface="Calibri" pitchFamily="34" charset="0"/>
+                <a:ea typeface="Calibri" pitchFamily="34" charset="-122"/>
+                <a:cs typeface="Calibri" pitchFamily="34" charset="-120"/>
+              </a:rPr>
+              <a:t>Implementazione</a:t>
+            </a:r>
+            <a:r>
+              <a:rPr lang="en-US" sz="2100" b="1" dirty="0">
+                <a:solidFill>
+                  <a:srgbClr val="173A5E"/>
+                </a:solidFill>
+                <a:latin typeface="Calibri" pitchFamily="34" charset="0"/>
+                <a:ea typeface="Calibri" pitchFamily="34" charset="-122"/>
+                <a:cs typeface="Calibri" pitchFamily="34" charset="-120"/>
+              </a:rPr>
+              <a:t> </a:t>
+            </a:r>
+            <a:r>
+              <a:rPr lang="en-US" sz="2100" b="1" dirty="0" err="1">
+                <a:solidFill>
+                  <a:srgbClr val="173A5E"/>
+                </a:solidFill>
+                <a:latin typeface="Calibri" pitchFamily="34" charset="0"/>
+                <a:ea typeface="Calibri" pitchFamily="34" charset="-122"/>
+                <a:cs typeface="Calibri" pitchFamily="34" charset="-120"/>
+              </a:rPr>
+              <a:t>sul</a:t>
+            </a:r>
+            <a:r>
+              <a:rPr lang="en-US" sz="2100" b="1" dirty="0">
+                <a:solidFill>
+                  <a:srgbClr val="173A5E"/>
+                </a:solidFill>
+                <a:latin typeface="Calibri" pitchFamily="34" charset="0"/>
+                <a:ea typeface="Calibri" pitchFamily="34" charset="-122"/>
+                <a:cs typeface="Calibri" pitchFamily="34" charset="-120"/>
+              </a:rPr>
+              <a:t> Circuito </a:t>
+            </a:r>
+            <a:r>
+              <a:rPr lang="en-US" sz="2100" b="1" dirty="0" err="1">
+                <a:solidFill>
+                  <a:srgbClr val="173A5E"/>
+                </a:solidFill>
+                <a:latin typeface="Calibri" pitchFamily="34" charset="0"/>
+                <a:ea typeface="Calibri" pitchFamily="34" charset="-122"/>
+                <a:cs typeface="Calibri" pitchFamily="34" charset="-120"/>
+              </a:rPr>
+              <a:t>Quantistico</a:t>
+            </a:r>
+            <a:r>
+              <a:rPr lang="en-US" sz="2100" b="1" dirty="0">
+                <a:solidFill>
+                  <a:srgbClr val="173A5E"/>
+                </a:solidFill>
+                <a:latin typeface="Calibri" pitchFamily="34" charset="0"/>
+                <a:ea typeface="Calibri" pitchFamily="34" charset="-122"/>
+                <a:cs typeface="Calibri" pitchFamily="34" charset="-120"/>
+              </a:rPr>
+              <a:t> a </a:t>
+            </a:r>
+            <a:r>
+              <a:rPr lang="en-US" sz="2100" b="1" dirty="0" err="1">
+                <a:solidFill>
+                  <a:srgbClr val="173A5E"/>
+                </a:solidFill>
+                <a:latin typeface="Calibri" pitchFamily="34" charset="0"/>
+                <a:ea typeface="Calibri" pitchFamily="34" charset="-122"/>
+                <a:cs typeface="Calibri" pitchFamily="34" charset="-120"/>
+              </a:rPr>
+              <a:t>tre</a:t>
+            </a:r>
+            <a:r>
+              <a:rPr lang="en-US" sz="2100" b="1" dirty="0">
+                <a:solidFill>
+                  <a:srgbClr val="173A5E"/>
+                </a:solidFill>
+                <a:latin typeface="Calibri" pitchFamily="34" charset="0"/>
+                <a:ea typeface="Calibri" pitchFamily="34" charset="-122"/>
+                <a:cs typeface="Calibri" pitchFamily="34" charset="-120"/>
+              </a:rPr>
+              <a:t> qubit (</a:t>
+            </a:r>
+            <a:r>
+              <a:rPr lang="en-US" sz="2100" b="1" dirty="0" err="1">
+                <a:solidFill>
+                  <a:srgbClr val="173A5E"/>
+                </a:solidFill>
+                <a:latin typeface="Calibri" pitchFamily="34" charset="0"/>
+                <a:ea typeface="Calibri" pitchFamily="34" charset="-122"/>
+                <a:cs typeface="Calibri" pitchFamily="34" charset="-120"/>
+              </a:rPr>
+              <a:t>Trimero</a:t>
+            </a:r>
+            <a:r>
+              <a:rPr lang="en-US" sz="2100" b="1" dirty="0">
+                <a:solidFill>
+                  <a:srgbClr val="173A5E"/>
+                </a:solidFill>
+                <a:latin typeface="Calibri" pitchFamily="34" charset="0"/>
+                <a:ea typeface="Calibri" pitchFamily="34" charset="-122"/>
+                <a:cs typeface="Calibri" pitchFamily="34" charset="-120"/>
+              </a:rPr>
+              <a:t>)</a:t>
+            </a:r>
+            <a:endParaRPr lang="en-US" sz="2100" dirty="0"/>
+          </a:p>
+        </p:txBody>
+      </p:sp>
+      <p:pic>
+        <p:nvPicPr>
+          <p:cNvPr id="14" name="Picture 13">
+            <a:extLst>
+              <a:ext uri="{FF2B5EF4-FFF2-40B4-BE49-F238E27FC236}">
+                <a16:creationId xmlns:a16="http://schemas.microsoft.com/office/drawing/2014/main" id="{C0FA1B48-4521-9172-6400-DCC8A5CF4805}"/>
+              </a:ext>
+            </a:extLst>
+          </p:cNvPr>
+          <p:cNvPicPr>
+            <a:picLocks noChangeAspect="1"/>
+          </p:cNvPicPr>
+          <p:nvPr/>
+        </p:nvPicPr>
+        <p:blipFill>
+          <a:blip r:embed="rId8"/>
+          <a:stretch>
+            <a:fillRect/>
+          </a:stretch>
+        </p:blipFill>
+        <p:spPr>
+          <a:xfrm>
+            <a:off x="419947" y="2148840"/>
+            <a:ext cx="11413066" cy="2275991"/>
+          </a:xfrm>
+          <a:prstGeom prst="rect">
+            <a:avLst/>
+          </a:prstGeom>
+        </p:spPr>
+      </p:pic>
+      <mc:AlternateContent xmlns:mc="http://schemas.openxmlformats.org/markup-compatibility/2006">
+        <mc:Choice xmlns:a14="http://schemas.microsoft.com/office/drawing/2010/main" Requires="a14">
+          <p:sp>
+            <p:nvSpPr>
+              <p:cNvPr id="15" name="TextBox 14">
+                <a:extLst>
+                  <a:ext uri="{FF2B5EF4-FFF2-40B4-BE49-F238E27FC236}">
+                    <a16:creationId xmlns:a16="http://schemas.microsoft.com/office/drawing/2014/main" id="{768889EB-DC5E-75A4-13C2-28B4779EE3A4}"/>
+                  </a:ext>
+                </a:extLst>
+              </p:cNvPr>
+              <p:cNvSpPr txBox="1"/>
+              <p:nvPr/>
+            </p:nvSpPr>
+            <p:spPr>
+              <a:xfrm>
+                <a:off x="8649546" y="5808296"/>
+                <a:ext cx="3183467" cy="830997"/>
+              </a:xfrm>
+              <a:prstGeom prst="rect">
+                <a:avLst/>
+              </a:prstGeom>
+              <a:noFill/>
+            </p:spPr>
+            <p:txBody>
+              <a:bodyPr wrap="square" rtlCol="0">
+                <a:spAutoFit/>
+              </a:bodyPr>
+              <a:lstStyle/>
+              <a:p>
+                <a:r>
+                  <a:rPr lang="en-US" sz="1200" dirty="0"/>
+                  <a:t>Il </a:t>
+                </a:r>
+                <a:r>
+                  <a:rPr lang="en-US" sz="1200" dirty="0" err="1"/>
+                  <a:t>dimero</a:t>
+                </a:r>
+                <a:r>
+                  <a:rPr lang="en-US" sz="1200" dirty="0"/>
+                  <a:t> </a:t>
+                </a:r>
+                <a:r>
+                  <a:rPr lang="en-US" sz="1200" dirty="0" err="1"/>
+                  <a:t>adotta</a:t>
+                </a:r>
+                <a:r>
+                  <a:rPr lang="en-US" sz="1200" dirty="0"/>
+                  <a:t> la </a:t>
+                </a:r>
+                <a:r>
+                  <a:rPr lang="en-US" sz="1200" dirty="0" err="1"/>
+                  <a:t>convenzione</a:t>
+                </a:r>
+                <a:r>
+                  <a:rPr lang="en-US" sz="1200" dirty="0"/>
+                  <a:t> a </a:t>
+                </a:r>
+                <a:r>
+                  <a:rPr lang="en-US" sz="1200" dirty="0" err="1"/>
+                  <a:t>operatori</a:t>
+                </a:r>
+                <a:r>
+                  <a:rPr lang="en-US" sz="1200" dirty="0"/>
+                  <a:t> di spin (</a:t>
+                </a:r>
+                <a14:m>
+                  <m:oMath xmlns:m="http://schemas.openxmlformats.org/officeDocument/2006/math">
+                    <m:r>
+                      <a:rPr lang="en-US" sz="1200" i="1"/>
+                      <m:t>𝑠</m:t>
+                    </m:r>
+                    <m:r>
+                      <a:rPr lang="en-US" sz="1200"/>
+                      <m:t>=</m:t>
+                    </m:r>
+                    <m:r>
+                      <a:rPr lang="en-US" sz="1200" i="1"/>
+                      <m:t>𝜎</m:t>
+                    </m:r>
+                    <m:r>
+                      <a:rPr lang="en-US" sz="1200"/>
+                      <m:t>/2</m:t>
+                    </m:r>
+                  </m:oMath>
+                </a14:m>
+                <a:r>
+                  <a:rPr lang="en-US" sz="1200" dirty="0"/>
+                  <a:t>s), il </a:t>
+                </a:r>
+                <a:r>
+                  <a:rPr lang="en-US" sz="1200" dirty="0" err="1"/>
+                  <a:t>trimero</a:t>
+                </a:r>
+                <a:r>
+                  <a:rPr lang="en-US" sz="1200" dirty="0"/>
+                  <a:t> la </a:t>
+                </a:r>
+                <a:r>
+                  <a:rPr lang="en-US" sz="1200" dirty="0" err="1"/>
+                  <a:t>convenzione</a:t>
+                </a:r>
+                <a:r>
+                  <a:rPr lang="en-US" sz="1200" dirty="0"/>
+                  <a:t> </a:t>
+                </a:r>
+                <a:r>
+                  <a:rPr lang="en-US" sz="1200" dirty="0" err="1"/>
+                  <a:t>diretta</a:t>
+                </a:r>
+                <a:r>
+                  <a:rPr lang="en-US" sz="1200" dirty="0"/>
+                  <a:t> in Pauli - da cui il </a:t>
+                </a:r>
+                <a:r>
+                  <a:rPr lang="en-US" sz="1200" dirty="0" err="1"/>
+                  <a:t>diverso</a:t>
+                </a:r>
+                <a:r>
+                  <a:rPr lang="en-US" sz="1200" dirty="0"/>
+                  <a:t> </a:t>
+                </a:r>
+                <a:r>
+                  <a:rPr lang="en-US" sz="1200" dirty="0" err="1"/>
+                  <a:t>rapporto</a:t>
+                </a:r>
+                <a:r>
+                  <a:rPr lang="en-US" sz="1200" dirty="0"/>
+                  <a:t> </a:t>
+                </a:r>
+                <a:r>
+                  <a:rPr lang="en-US" sz="1200" dirty="0" err="1"/>
+                  <a:t>numerico</a:t>
+                </a:r>
+                <a:r>
+                  <a:rPr lang="en-US" sz="1200" dirty="0"/>
+                  <a:t> </a:t>
+                </a:r>
+                <a:r>
+                  <a:rPr lang="en-US" sz="1200" dirty="0" err="1"/>
+                  <a:t>fra</a:t>
+                </a:r>
+                <a:r>
+                  <a:rPr lang="en-US" sz="1200" dirty="0"/>
+                  <a:t> </a:t>
+                </a:r>
+                <a14:m>
+                  <m:oMath xmlns:m="http://schemas.openxmlformats.org/officeDocument/2006/math">
+                    <m:r>
+                      <a:rPr lang="en-US" sz="1200" i="1"/>
+                      <m:t>𝜏</m:t>
+                    </m:r>
+                  </m:oMath>
+                </a14:m>
+                <a:r>
+                  <a:rPr lang="en-US" sz="1200" dirty="0"/>
+                  <a:t> e </a:t>
+                </a:r>
+                <a:r>
+                  <a:rPr lang="en-US" sz="1200" dirty="0" err="1"/>
+                  <a:t>gli</a:t>
+                </a:r>
+                <a:r>
+                  <a:rPr lang="en-US" sz="1200" dirty="0"/>
+                  <a:t> </a:t>
+                </a:r>
+                <a:r>
+                  <a:rPr lang="en-US" sz="1200" dirty="0" err="1"/>
+                  <a:t>angoli</a:t>
+                </a:r>
+                <a:r>
+                  <a:rPr lang="en-US" sz="1200" dirty="0"/>
+                  <a:t> </a:t>
+                </a:r>
+                <a:r>
+                  <a:rPr lang="en-US" sz="1200" dirty="0" err="1"/>
+                  <a:t>dei</a:t>
+                </a:r>
+                <a:r>
+                  <a:rPr lang="en-US" sz="1200" dirty="0"/>
+                  <a:t> gate </a:t>
+                </a:r>
+                <a:r>
+                  <a:rPr lang="en-US" sz="1200" dirty="0" err="1"/>
+                  <a:t>nei</a:t>
+                </a:r>
+                <a:r>
+                  <a:rPr lang="en-US" sz="1200" dirty="0"/>
+                  <a:t> due </a:t>
+                </a:r>
+                <a:r>
+                  <a:rPr lang="en-US" sz="1200" dirty="0" err="1"/>
+                  <a:t>casi</a:t>
+                </a:r>
+                <a:r>
+                  <a:rPr lang="en-US" sz="1200" dirty="0"/>
+                  <a:t>.</a:t>
+                </a:r>
+              </a:p>
+            </p:txBody>
+          </p:sp>
+        </mc:Choice>
+        <mc:Fallback>
+          <p:sp>
+            <p:nvSpPr>
+              <p:cNvPr id="15" name="TextBox 14">
+                <a:extLst>
+                  <a:ext uri="{FF2B5EF4-FFF2-40B4-BE49-F238E27FC236}">
+                    <a16:creationId xmlns:a16="http://schemas.microsoft.com/office/drawing/2014/main" id="{768889EB-DC5E-75A4-13C2-28B4779EE3A4}"/>
+                  </a:ext>
+                </a:extLst>
+              </p:cNvPr>
+              <p:cNvSpPr txBox="1">
+                <a:spLocks noRot="1" noChangeAspect="1" noMove="1" noResize="1" noEditPoints="1" noAdjustHandles="1" noChangeArrowheads="1" noChangeShapeType="1" noTextEdit="1"/>
+              </p:cNvSpPr>
+              <p:nvPr/>
+            </p:nvSpPr>
+            <p:spPr>
+              <a:xfrm>
+                <a:off x="8649546" y="5808296"/>
+                <a:ext cx="3183467" cy="830997"/>
+              </a:xfrm>
+              <a:prstGeom prst="rect">
+                <a:avLst/>
+              </a:prstGeom>
+              <a:blipFill>
+                <a:blip r:embed="rId9"/>
+                <a:stretch>
+                  <a:fillRect l="-192" t="-735" b="-5147"/>
+                </a:stretch>
+              </a:blipFill>
+            </p:spPr>
+            <p:txBody>
+              <a:bodyPr/>
+              <a:lstStyle/>
+              <a:p>
+                <a:r>
+                  <a:rPr lang="en-US">
+                    <a:noFill/>
+                  </a:rPr>
+                  <a:t> </a:t>
+                </a:r>
+              </a:p>
+            </p:txBody>
+          </p:sp>
+        </mc:Fallback>
+      </mc:AlternateContent>
+      <mc:AlternateContent xmlns:mc="http://schemas.openxmlformats.org/markup-compatibility/2006">
+        <mc:Choice xmlns:a14="http://schemas.microsoft.com/office/drawing/2010/main" Requires="a14">
+          <p:graphicFrame>
+            <p:nvGraphicFramePr>
+              <p:cNvPr id="16" name="Table 15">
+                <a:extLst>
+                  <a:ext uri="{FF2B5EF4-FFF2-40B4-BE49-F238E27FC236}">
+                    <a16:creationId xmlns:a16="http://schemas.microsoft.com/office/drawing/2014/main" id="{D97C2F76-C34F-1B53-B74C-F9EFF70CE874}"/>
+                  </a:ext>
+                </a:extLst>
+              </p:cNvPr>
+              <p:cNvGraphicFramePr>
+                <a:graphicFrameLocks noGrp="1"/>
+              </p:cNvGraphicFramePr>
+              <p:nvPr>
+                <p:extLst>
+                  <p:ext uri="{D42A27DB-BD31-4B8C-83A1-F6EECF244321}">
+                    <p14:modId xmlns:p14="http://schemas.microsoft.com/office/powerpoint/2010/main" val="1757075260"/>
+                  </p:ext>
+                </p:extLst>
+              </p:nvPr>
+            </p:nvGraphicFramePr>
+            <p:xfrm>
+              <a:off x="419947" y="4287157"/>
+              <a:ext cx="7691121" cy="2320609"/>
+            </p:xfrm>
+            <a:graphic>
+              <a:graphicData uri="http://schemas.openxmlformats.org/drawingml/2006/table">
+                <a:tbl>
+                  <a:tblPr firstRow="1" bandRow="1">
+                    <a:tableStyleId>{5C22544A-7EE6-4342-B048-85BDC9FD1C3A}</a:tableStyleId>
+                  </a:tblPr>
+                  <a:tblGrid>
+                    <a:gridCol w="1976120">
+                      <a:extLst>
+                        <a:ext uri="{9D8B030D-6E8A-4147-A177-3AD203B41FA5}">
+                          <a16:colId xmlns:a16="http://schemas.microsoft.com/office/drawing/2014/main" val="2110275228"/>
+                        </a:ext>
+                      </a:extLst>
+                    </a:gridCol>
+                    <a:gridCol w="1642533">
+                      <a:extLst>
+                        <a:ext uri="{9D8B030D-6E8A-4147-A177-3AD203B41FA5}">
+                          <a16:colId xmlns:a16="http://schemas.microsoft.com/office/drawing/2014/main" val="510094434"/>
+                        </a:ext>
+                      </a:extLst>
+                    </a:gridCol>
+                    <a:gridCol w="4072468">
+                      <a:extLst>
+                        <a:ext uri="{9D8B030D-6E8A-4147-A177-3AD203B41FA5}">
+                          <a16:colId xmlns:a16="http://schemas.microsoft.com/office/drawing/2014/main" val="660264833"/>
+                        </a:ext>
+                      </a:extLst>
+                    </a:gridCol>
+                  </a:tblGrid>
+                  <a:tr h="253013">
+                    <a:tc>
+                      <a:txBody>
+                        <a:bodyPr/>
+                        <a:lstStyle/>
+                        <a:p>
+                          <a:pPr>
+                            <a:buNone/>
+                          </a:pPr>
+                          <a:r>
+                            <a:rPr lang="en-US" sz="1200" dirty="0"/>
+                            <a:t>Termine di </a:t>
+                          </a:r>
+                          <a14:m>
+                            <m:oMath xmlns:m="http://schemas.openxmlformats.org/officeDocument/2006/math">
+                              <m:r>
+                                <a:rPr lang="en-US" sz="1200" i="1">
+                                  <a:latin typeface="Cambria Math" panose="02040503050406030204" pitchFamily="18" charset="0"/>
+                                </a:rPr>
+                                <m:t>𝐻</m:t>
+                              </m:r>
+                            </m:oMath>
+                          </a14:m>
+                          <a:endParaRPr lang="en-US" sz="1200" dirty="0"/>
+                        </a:p>
+                      </a:txBody>
+                      <a:tcPr anchor="ctr"/>
+                    </a:tc>
+                    <a:tc>
+                      <a:txBody>
+                        <a:bodyPr/>
+                        <a:lstStyle/>
+                        <a:p>
+                          <a:r>
+                            <a:rPr lang="en-US" sz="1200"/>
+                            <a:t>Qubit</a:t>
+                          </a:r>
+                          <a:endParaRPr lang="en-US" sz="1200" dirty="0"/>
+                        </a:p>
+                      </a:txBody>
+                      <a:tcPr/>
+                    </a:tc>
+                    <a:tc>
+                      <a:txBody>
+                        <a:bodyPr/>
+                        <a:lstStyle/>
+                        <a:p>
+                          <a:r>
+                            <a:rPr lang="en-US" sz="1200" dirty="0"/>
+                            <a:t>Blocchi </a:t>
+                          </a:r>
+                          <a14:m>
+                            <m:oMath xmlns:m="http://schemas.openxmlformats.org/officeDocument/2006/math">
+                              <m:sSup>
+                                <m:sSupPr>
+                                  <m:ctrlPr>
+                                    <a:rPr lang="en-US" sz="1200" b="1" i="1" kern="1200">
+                                      <a:solidFill>
+                                        <a:schemeClr val="lt1"/>
+                                      </a:solidFill>
+                                      <a:latin typeface="Cambria Math" panose="02040503050406030204" pitchFamily="18" charset="0"/>
+                                      <a:ea typeface="+mn-ea"/>
+                                      <a:cs typeface="+mn-cs"/>
+                                    </a:rPr>
+                                  </m:ctrlPr>
+                                </m:sSupPr>
+                                <m:e>
+                                  <m:r>
+                                    <a:rPr lang="en-US" sz="1200" b="1" i="1" kern="1200">
+                                      <a:solidFill>
+                                        <a:schemeClr val="lt1"/>
+                                      </a:solidFill>
+                                      <a:latin typeface="Cambria Math" panose="02040503050406030204" pitchFamily="18" charset="0"/>
+                                      <a:ea typeface="+mn-ea"/>
+                                      <a:cs typeface="+mn-cs"/>
+                                    </a:rPr>
+                                    <m:t>𝑒</m:t>
+                                  </m:r>
+                                </m:e>
+                                <m:sup>
+                                  <m:r>
+                                    <a:rPr lang="en-US" sz="1200" b="1" i="0" kern="1200">
+                                      <a:solidFill>
+                                        <a:schemeClr val="lt1"/>
+                                      </a:solidFill>
+                                      <a:latin typeface="Cambria Math" panose="02040503050406030204" pitchFamily="18" charset="0"/>
+                                      <a:ea typeface="+mn-ea"/>
+                                      <a:cs typeface="+mn-cs"/>
+                                    </a:rPr>
+                                    <m:t>−</m:t>
+                                  </m:r>
+                                  <m:r>
+                                    <a:rPr lang="en-US" sz="1200" b="1" i="1" kern="1200">
+                                      <a:solidFill>
+                                        <a:schemeClr val="lt1"/>
+                                      </a:solidFill>
+                                      <a:latin typeface="Cambria Math" panose="02040503050406030204" pitchFamily="18" charset="0"/>
+                                      <a:ea typeface="+mn-ea"/>
+                                      <a:cs typeface="+mn-cs"/>
+                                    </a:rPr>
+                                    <m:t>𝑖</m:t>
+                                  </m:r>
+                                  <m:sSub>
+                                    <m:sSubPr>
+                                      <m:ctrlPr>
+                                        <a:rPr lang="en-US" sz="1200" b="1" i="1" kern="1200">
+                                          <a:solidFill>
+                                            <a:schemeClr val="lt1"/>
+                                          </a:solidFill>
+                                          <a:latin typeface="Cambria Math" panose="02040503050406030204" pitchFamily="18" charset="0"/>
+                                          <a:ea typeface="+mn-ea"/>
+                                          <a:cs typeface="+mn-cs"/>
+                                        </a:rPr>
+                                      </m:ctrlPr>
+                                    </m:sSubPr>
+                                    <m:e>
+                                      <m:r>
+                                        <a:rPr lang="en-US" sz="1200" b="1" i="1" kern="1200">
+                                          <a:solidFill>
+                                            <a:schemeClr val="lt1"/>
+                                          </a:solidFill>
+                                          <a:latin typeface="Cambria Math" panose="02040503050406030204" pitchFamily="18" charset="0"/>
+                                          <a:ea typeface="+mn-ea"/>
+                                          <a:cs typeface="+mn-cs"/>
+                                        </a:rPr>
+                                        <m:t>𝐻</m:t>
+                                      </m:r>
+                                    </m:e>
+                                    <m:sub>
+                                      <m:r>
+                                        <a:rPr lang="en-US" sz="1200" b="1" i="1" kern="1200">
+                                          <a:solidFill>
+                                            <a:schemeClr val="lt1"/>
+                                          </a:solidFill>
+                                          <a:latin typeface="Cambria Math" panose="02040503050406030204" pitchFamily="18" charset="0"/>
+                                          <a:ea typeface="+mn-ea"/>
+                                          <a:cs typeface="+mn-cs"/>
+                                        </a:rPr>
+                                        <m:t>𝑗</m:t>
+                                      </m:r>
+                                    </m:sub>
+                                  </m:sSub>
+                                  <m:r>
+                                    <m:rPr>
+                                      <m:sty m:val="p"/>
+                                    </m:rPr>
+                                    <a:rPr lang="en-US" sz="1200" b="1" i="0" kern="1200">
+                                      <a:solidFill>
+                                        <a:schemeClr val="lt1"/>
+                                      </a:solidFill>
+                                      <a:latin typeface="Cambria Math" panose="02040503050406030204" pitchFamily="18" charset="0"/>
+                                      <a:ea typeface="+mn-ea"/>
+                                      <a:cs typeface="+mn-cs"/>
+                                    </a:rPr>
+                                    <m:t>Δ</m:t>
+                                  </m:r>
+                                  <m:r>
+                                    <a:rPr lang="en-US" sz="1200" b="1" i="1" kern="1200">
+                                      <a:solidFill>
+                                        <a:schemeClr val="lt1"/>
+                                      </a:solidFill>
+                                      <a:latin typeface="Cambria Math" panose="02040503050406030204" pitchFamily="18" charset="0"/>
+                                      <a:ea typeface="+mn-ea"/>
+                                      <a:cs typeface="+mn-cs"/>
+                                    </a:rPr>
+                                    <m:t>𝑡</m:t>
+                                  </m:r>
+                                </m:sup>
+                              </m:sSup>
+                            </m:oMath>
+                          </a14:m>
+                          <a:endParaRPr lang="en-US" sz="1200" dirty="0"/>
+                        </a:p>
+                      </a:txBody>
+                      <a:tcPr/>
+                    </a:tc>
+                    <a:extLst>
+                      <a:ext uri="{0D108BD9-81ED-4DB2-BD59-A6C34878D82A}">
+                        <a16:rowId xmlns:a16="http://schemas.microsoft.com/office/drawing/2014/main" val="944284243"/>
+                      </a:ext>
+                    </a:extLst>
+                  </a:tr>
+                  <a:tr h="243108">
+                    <a:tc>
+                      <a:txBody>
+                        <a:bodyPr/>
+                        <a:lstStyle/>
+                        <a:p>
+                          <a:pPr marL="0" marR="0" lvl="0" indent="0" algn="l" defTabSz="914400" rtl="0" eaLnBrk="1" fontAlgn="auto" latinLnBrk="0" hangingPunct="1">
+                            <a:lnSpc>
+                              <a:spcPct val="100000"/>
+                            </a:lnSpc>
+                            <a:spcBef>
+                              <a:spcPts val="0"/>
+                            </a:spcBef>
+                            <a:spcAft>
+                              <a:spcPts val="0"/>
+                            </a:spcAft>
+                            <a:buClrTx/>
+                            <a:buSzTx/>
+                            <a:buFontTx/>
+                            <a:buNone/>
+                            <a:tabLst/>
+                            <a:defRPr/>
+                          </a:pPr>
+                          <a14:m>
+                            <m:oMathPara xmlns:m="http://schemas.openxmlformats.org/officeDocument/2006/math">
+                              <m:oMath>
+                                <m:r>
+                                  <m:rPr>
+                                    <m:nor/>
+                                  </m:rPr>
+                                  <a:rPr lang="en-US" sz="1200" smtClean="0"/>
+                                  <m:t>Scambio(1,2)</m:t>
+                                </m:r>
+                              </m:oMath>
+                            </m:oMathPara>
+                          </a14:m>
+                          <a:endParaRPr lang="en-US" sz="1200" dirty="0"/>
+                        </a:p>
+                      </a:txBody>
+                      <a:tcPr/>
+                    </a:tc>
+                    <a:tc>
+                      <a:txBody>
+                        <a:bodyPr/>
+                        <a:lstStyle/>
+                        <a:p>
+                          <a14:m>
+                            <m:oMathPara xmlns:m="http://schemas.openxmlformats.org/officeDocument/2006/math">
+                              <m:oMath>
+                                <m:d>
+                                  <m:dPr>
+                                    <m:ctrlPr>
+                                      <a:rPr lang="en-US" sz="1200" i="1" dirty="0" smtClean="0">
+                                        <a:latin typeface="Cambria Math" panose="02040503050406030204" pitchFamily="18" charset="0"/>
+                                      </a:rPr>
+                                    </m:ctrlPr>
+                                  </m:dPr>
+                                  <m:e>
+                                    <m:r>
+                                      <a:rPr lang="en-US" sz="1200" i="1" dirty="0" smtClean="0">
+                                        <a:latin typeface="Cambria Math" panose="02040503050406030204" pitchFamily="18" charset="0"/>
+                                      </a:rPr>
+                                      <m:t>𝑞</m:t>
+                                    </m:r>
+                                    <m:r>
+                                      <a:rPr lang="en-US" sz="1200" i="0" dirty="0" smtClean="0">
+                                        <a:latin typeface="Cambria Math" panose="02040503050406030204" pitchFamily="18" charset="0"/>
+                                      </a:rPr>
+                                      <m:t>2​,</m:t>
+                                    </m:r>
+                                    <m:r>
+                                      <a:rPr lang="en-US" sz="1200" i="1" dirty="0" smtClean="0">
+                                        <a:latin typeface="Cambria Math" panose="02040503050406030204" pitchFamily="18" charset="0"/>
+                                      </a:rPr>
+                                      <m:t>𝑞</m:t>
+                                    </m:r>
+                                    <m:r>
+                                      <a:rPr lang="en-US" sz="1200" i="0" dirty="0" smtClean="0">
+                                        <a:latin typeface="Cambria Math" panose="02040503050406030204" pitchFamily="18" charset="0"/>
+                                      </a:rPr>
+                                      <m:t>1​</m:t>
+                                    </m:r>
+                                  </m:e>
+                                </m:d>
+                              </m:oMath>
+                            </m:oMathPara>
+                          </a14:m>
+                          <a:endParaRPr lang="en-US" sz="1200" dirty="0"/>
+                        </a:p>
+                      </a:txBody>
+                      <a:tcPr/>
+                    </a:tc>
+                    <a:tc>
+                      <a:txBody>
+                        <a:bodyPr/>
+                        <a:lstStyle/>
+                        <a:p>
+                          <a14:m>
+                            <m:oMathPara xmlns:m="http://schemas.openxmlformats.org/officeDocument/2006/math">
+                              <m:oMath>
+                                <m:r>
+                                  <a:rPr lang="en-US" sz="1200" i="1" dirty="0" smtClean="0">
+                                    <a:effectLst/>
+                                    <a:latin typeface="Cambria Math" panose="02040503050406030204" pitchFamily="18" charset="0"/>
+                                  </a:rPr>
+                                  <m:t>𝑅𝑋𝑋</m:t>
+                                </m:r>
+                                <m:r>
+                                  <a:rPr lang="en-US" sz="1200" i="0" dirty="0" smtClean="0">
+                                    <a:effectLst/>
+                                    <a:latin typeface="Cambria Math" panose="02040503050406030204" pitchFamily="18" charset="0"/>
+                                  </a:rPr>
+                                  <m:t>​</m:t>
+                                </m:r>
+                                <m:d>
+                                  <m:dPr>
+                                    <m:ctrlPr>
+                                      <a:rPr lang="en-US" sz="1200" i="0" dirty="0" smtClean="0">
+                                        <a:effectLst/>
+                                        <a:latin typeface="Cambria Math" panose="02040503050406030204" pitchFamily="18" charset="0"/>
+                                      </a:rPr>
+                                    </m:ctrlPr>
+                                  </m:dPr>
+                                  <m:e>
+                                    <m:r>
+                                      <a:rPr lang="en-US" sz="1200" i="0" dirty="0" smtClean="0">
+                                        <a:effectLst/>
+                                        <a:latin typeface="Cambria Math" panose="02040503050406030204" pitchFamily="18" charset="0"/>
+                                      </a:rPr>
+                                      <m:t>2</m:t>
+                                    </m:r>
+                                    <m:r>
+                                      <a:rPr lang="en-US" sz="1200" i="1" dirty="0" smtClean="0">
+                                        <a:effectLst/>
+                                        <a:latin typeface="Cambria Math" panose="02040503050406030204" pitchFamily="18" charset="0"/>
+                                      </a:rPr>
+                                      <m:t>𝐽</m:t>
+                                    </m:r>
+                                    <m:r>
+                                      <a:rPr lang="en-US" sz="1200" i="1" dirty="0" smtClean="0">
+                                        <a:effectLst/>
+                                        <a:latin typeface="Cambria Math" panose="02040503050406030204" pitchFamily="18" charset="0"/>
+                                      </a:rPr>
+                                      <m:t>𝜏</m:t>
+                                    </m:r>
+                                  </m:e>
+                                </m:d>
+                                <m:r>
+                                  <a:rPr lang="en-US" sz="1200" i="0" dirty="0" smtClean="0">
+                                    <a:effectLst/>
+                                    <a:latin typeface="Cambria Math" panose="02040503050406030204" pitchFamily="18" charset="0"/>
+                                  </a:rPr>
+                                  <m:t>,</m:t>
+                                </m:r>
+                                <m:r>
+                                  <a:rPr lang="en-US" sz="1200" i="1" dirty="0" smtClean="0">
+                                    <a:effectLst/>
+                                    <a:latin typeface="Cambria Math" panose="02040503050406030204" pitchFamily="18" charset="0"/>
+                                  </a:rPr>
+                                  <m:t>𝑅𝑌𝑌</m:t>
+                                </m:r>
+                                <m:r>
+                                  <a:rPr lang="en-US" sz="1200" i="0" dirty="0" smtClean="0">
+                                    <a:effectLst/>
+                                    <a:latin typeface="Cambria Math" panose="02040503050406030204" pitchFamily="18" charset="0"/>
+                                  </a:rPr>
+                                  <m:t>​</m:t>
+                                </m:r>
+                                <m:d>
+                                  <m:dPr>
+                                    <m:ctrlPr>
+                                      <a:rPr lang="en-US" sz="1200" i="0" dirty="0" smtClean="0">
+                                        <a:effectLst/>
+                                        <a:latin typeface="Cambria Math" panose="02040503050406030204" pitchFamily="18" charset="0"/>
+                                      </a:rPr>
+                                    </m:ctrlPr>
+                                  </m:dPr>
+                                  <m:e>
+                                    <m:r>
+                                      <a:rPr lang="en-US" sz="1200" i="0" dirty="0" smtClean="0">
+                                        <a:effectLst/>
+                                        <a:latin typeface="Cambria Math" panose="02040503050406030204" pitchFamily="18" charset="0"/>
+                                      </a:rPr>
+                                      <m:t>2</m:t>
+                                    </m:r>
+                                    <m:r>
+                                      <a:rPr lang="en-US" sz="1200" i="1" dirty="0" smtClean="0">
+                                        <a:effectLst/>
+                                        <a:latin typeface="Cambria Math" panose="02040503050406030204" pitchFamily="18" charset="0"/>
+                                      </a:rPr>
+                                      <m:t>𝐽</m:t>
+                                    </m:r>
+                                    <m:r>
+                                      <a:rPr lang="en-US" sz="1200" i="1" dirty="0" smtClean="0">
+                                        <a:effectLst/>
+                                        <a:latin typeface="Cambria Math" panose="02040503050406030204" pitchFamily="18" charset="0"/>
+                                      </a:rPr>
+                                      <m:t>𝜏</m:t>
+                                    </m:r>
+                                  </m:e>
+                                </m:d>
+                                <m:r>
+                                  <a:rPr lang="en-US" sz="1200" i="0" dirty="0" smtClean="0">
+                                    <a:effectLst/>
+                                    <a:latin typeface="Cambria Math" panose="02040503050406030204" pitchFamily="18" charset="0"/>
+                                  </a:rPr>
+                                  <m:t>,</m:t>
+                                </m:r>
+                                <m:r>
+                                  <a:rPr lang="en-US" sz="1200" i="1" dirty="0" smtClean="0">
+                                    <a:effectLst/>
+                                    <a:latin typeface="Cambria Math" panose="02040503050406030204" pitchFamily="18" charset="0"/>
+                                  </a:rPr>
+                                  <m:t>𝑅𝑍𝑍</m:t>
+                                </m:r>
+                                <m:r>
+                                  <a:rPr lang="en-US" sz="1200" i="0" dirty="0" smtClean="0">
+                                    <a:effectLst/>
+                                    <a:latin typeface="Cambria Math" panose="02040503050406030204" pitchFamily="18" charset="0"/>
+                                  </a:rPr>
+                                  <m:t>​</m:t>
+                                </m:r>
+                                <m:d>
+                                  <m:dPr>
+                                    <m:ctrlPr>
+                                      <a:rPr lang="en-US" sz="1200" i="0" dirty="0" smtClean="0">
+                                        <a:effectLst/>
+                                        <a:latin typeface="Cambria Math" panose="02040503050406030204" pitchFamily="18" charset="0"/>
+                                      </a:rPr>
+                                    </m:ctrlPr>
+                                  </m:dPr>
+                                  <m:e>
+                                    <m:r>
+                                      <a:rPr lang="en-US" sz="1200" i="0" dirty="0" smtClean="0">
+                                        <a:effectLst/>
+                                        <a:latin typeface="Cambria Math" panose="02040503050406030204" pitchFamily="18" charset="0"/>
+                                      </a:rPr>
+                                      <m:t>2</m:t>
+                                    </m:r>
+                                    <m:r>
+                                      <a:rPr lang="en-US" sz="1200" i="1" dirty="0" smtClean="0">
+                                        <a:effectLst/>
+                                        <a:latin typeface="Cambria Math" panose="02040503050406030204" pitchFamily="18" charset="0"/>
+                                      </a:rPr>
+                                      <m:t>𝐽</m:t>
+                                    </m:r>
+                                    <m:r>
+                                      <a:rPr lang="en-US" sz="1200" i="1" dirty="0" smtClean="0">
+                                        <a:effectLst/>
+                                        <a:latin typeface="Cambria Math" panose="02040503050406030204" pitchFamily="18" charset="0"/>
+                                      </a:rPr>
+                                      <m:t>𝜏</m:t>
+                                    </m:r>
+                                  </m:e>
+                                </m:d>
+                              </m:oMath>
+                            </m:oMathPara>
+                          </a14:m>
+                          <a:endParaRPr lang="en-US" sz="1200" dirty="0"/>
+                        </a:p>
+                      </a:txBody>
+                      <a:tcPr/>
+                    </a:tc>
+                    <a:extLst>
+                      <a:ext uri="{0D108BD9-81ED-4DB2-BD59-A6C34878D82A}">
+                        <a16:rowId xmlns:a16="http://schemas.microsoft.com/office/drawing/2014/main" val="1794692388"/>
+                      </a:ext>
+                    </a:extLst>
+                  </a:tr>
+                  <a:tr h="243108">
+                    <a:tc>
+                      <a:txBody>
+                        <a:bodyPr/>
+                        <a:lstStyle/>
+                        <a:p>
+                          <a:pPr marL="0" marR="0" lvl="0" indent="0" algn="l" defTabSz="914400" rtl="0" eaLnBrk="1" fontAlgn="auto" latinLnBrk="0" hangingPunct="1">
+                            <a:lnSpc>
+                              <a:spcPct val="100000"/>
+                            </a:lnSpc>
+                            <a:spcBef>
+                              <a:spcPts val="0"/>
+                            </a:spcBef>
+                            <a:spcAft>
+                              <a:spcPts val="0"/>
+                            </a:spcAft>
+                            <a:buClrTx/>
+                            <a:buSzTx/>
+                            <a:buFontTx/>
+                            <a:buNone/>
+                            <a:tabLst/>
+                            <a:defRPr/>
+                          </a:pPr>
+                          <a14:m>
+                            <m:oMathPara xmlns:m="http://schemas.openxmlformats.org/officeDocument/2006/math">
+                              <m:oMath>
+                                <m:r>
+                                  <m:rPr>
+                                    <m:nor/>
+                                  </m:rPr>
+                                  <a:rPr lang="en-US" sz="1200" i="0" smtClean="0"/>
+                                  <m:t>Scambio(</m:t>
+                                </m:r>
+                                <m:r>
+                                  <m:rPr>
+                                    <m:nor/>
+                                  </m:rPr>
+                                  <a:rPr lang="en-US" sz="1200" b="0" i="0" smtClean="0"/>
+                                  <m:t>2</m:t>
+                                </m:r>
+                                <m:r>
+                                  <m:rPr>
+                                    <m:nor/>
+                                  </m:rPr>
+                                  <a:rPr lang="en-US" sz="1200" i="0" smtClean="0"/>
+                                  <m:t>,</m:t>
+                                </m:r>
+                                <m:r>
+                                  <m:rPr>
+                                    <m:nor/>
+                                  </m:rPr>
+                                  <a:rPr lang="en-US" sz="1200" b="0" i="0" smtClean="0"/>
+                                  <m:t>3</m:t>
+                                </m:r>
+                                <m:r>
+                                  <m:rPr>
+                                    <m:nor/>
+                                  </m:rPr>
+                                  <a:rPr lang="en-US" sz="1200" i="0" smtClean="0"/>
+                                  <m:t>)</m:t>
+                                </m:r>
+                              </m:oMath>
+                            </m:oMathPara>
+                          </a14:m>
+                          <a:endParaRPr lang="en-US" sz="1200" dirty="0"/>
+                        </a:p>
+                      </a:txBody>
+                      <a:tcPr/>
+                    </a:tc>
+                    <a:tc>
+                      <a:txBody>
+                        <a:bodyPr/>
+                        <a:lstStyle/>
+                        <a:p>
+                          <a14:m>
+                            <m:oMathPara xmlns:m="http://schemas.openxmlformats.org/officeDocument/2006/math">
+                              <m:oMath>
+                                <m:d>
+                                  <m:dPr>
+                                    <m:ctrlPr>
+                                      <a:rPr lang="en-US" sz="1200" i="1" dirty="0" smtClean="0">
+                                        <a:latin typeface="Cambria Math" panose="02040503050406030204" pitchFamily="18" charset="0"/>
+                                      </a:rPr>
+                                    </m:ctrlPr>
+                                  </m:dPr>
+                                  <m:e>
+                                    <m:r>
+                                      <a:rPr lang="en-US" sz="1200" i="1" dirty="0" smtClean="0">
+                                        <a:latin typeface="Cambria Math" panose="02040503050406030204" pitchFamily="18" charset="0"/>
+                                      </a:rPr>
+                                      <m:t>𝑞</m:t>
+                                    </m:r>
+                                    <m:r>
+                                      <a:rPr lang="en-US" sz="1200" i="0" dirty="0" smtClean="0">
+                                        <a:latin typeface="Cambria Math" panose="02040503050406030204" pitchFamily="18" charset="0"/>
+                                      </a:rPr>
+                                      <m:t>1​,</m:t>
+                                    </m:r>
+                                    <m:r>
+                                      <a:rPr lang="en-US" sz="1200" i="1" dirty="0" smtClean="0">
+                                        <a:latin typeface="Cambria Math" panose="02040503050406030204" pitchFamily="18" charset="0"/>
+                                      </a:rPr>
+                                      <m:t>𝑞</m:t>
+                                    </m:r>
+                                    <m:r>
+                                      <a:rPr lang="en-US" sz="1200" i="0" dirty="0" smtClean="0">
+                                        <a:latin typeface="Cambria Math" panose="02040503050406030204" pitchFamily="18" charset="0"/>
+                                      </a:rPr>
+                                      <m:t>0​</m:t>
+                                    </m:r>
+                                  </m:e>
+                                </m:d>
+                              </m:oMath>
+                            </m:oMathPara>
+                          </a14:m>
+                          <a:endParaRPr lang="en-US" sz="1200" dirty="0"/>
+                        </a:p>
+                      </a:txBody>
+                      <a:tcPr/>
+                    </a:tc>
+                    <a:tc>
+                      <a:txBody>
+                        <a:bodyPr/>
+                        <a:lstStyle/>
+                        <a:p>
+                          <a14:m>
+                            <m:oMathPara xmlns:m="http://schemas.openxmlformats.org/officeDocument/2006/math">
+                              <m:oMath>
+                                <m:r>
+                                  <a:rPr lang="en-US" sz="1200" i="1" dirty="0" smtClean="0">
+                                    <a:effectLst/>
+                                    <a:latin typeface="Cambria Math" panose="02040503050406030204" pitchFamily="18" charset="0"/>
+                                  </a:rPr>
+                                  <m:t>𝑅𝑋𝑋</m:t>
+                                </m:r>
+                                <m:r>
+                                  <a:rPr lang="en-US" sz="1200" i="0" dirty="0" smtClean="0">
+                                    <a:effectLst/>
+                                    <a:latin typeface="Cambria Math" panose="02040503050406030204" pitchFamily="18" charset="0"/>
+                                  </a:rPr>
+                                  <m:t>​</m:t>
+                                </m:r>
+                                <m:d>
+                                  <m:dPr>
+                                    <m:ctrlPr>
+                                      <a:rPr lang="en-US" sz="1200" i="0" dirty="0" smtClean="0">
+                                        <a:effectLst/>
+                                        <a:latin typeface="Cambria Math" panose="02040503050406030204" pitchFamily="18" charset="0"/>
+                                      </a:rPr>
+                                    </m:ctrlPr>
+                                  </m:dPr>
+                                  <m:e>
+                                    <m:r>
+                                      <a:rPr lang="en-US" sz="1200" i="0" dirty="0" smtClean="0">
+                                        <a:effectLst/>
+                                        <a:latin typeface="Cambria Math" panose="02040503050406030204" pitchFamily="18" charset="0"/>
+                                      </a:rPr>
+                                      <m:t>2</m:t>
+                                    </m:r>
+                                    <m:r>
+                                      <a:rPr lang="en-US" sz="1200" i="1" dirty="0" smtClean="0">
+                                        <a:effectLst/>
+                                        <a:latin typeface="Cambria Math" panose="02040503050406030204" pitchFamily="18" charset="0"/>
+                                      </a:rPr>
+                                      <m:t>𝐽</m:t>
+                                    </m:r>
+                                    <m:r>
+                                      <a:rPr lang="en-US" sz="1200" i="0" dirty="0" smtClean="0">
+                                        <a:effectLst/>
+                                        <a:latin typeface="Cambria Math" panose="02040503050406030204" pitchFamily="18" charset="0"/>
+                                      </a:rPr>
+                                      <m:t>′</m:t>
+                                    </m:r>
+                                    <m:r>
+                                      <a:rPr lang="en-US" sz="1200" i="1" dirty="0" smtClean="0">
+                                        <a:effectLst/>
+                                        <a:latin typeface="Cambria Math" panose="02040503050406030204" pitchFamily="18" charset="0"/>
+                                      </a:rPr>
+                                      <m:t>𝜏</m:t>
+                                    </m:r>
+                                  </m:e>
+                                </m:d>
+                                <m:r>
+                                  <a:rPr lang="en-US" sz="1200" i="0" dirty="0" smtClean="0">
+                                    <a:effectLst/>
+                                    <a:latin typeface="Cambria Math" panose="02040503050406030204" pitchFamily="18" charset="0"/>
+                                  </a:rPr>
+                                  <m:t>,</m:t>
+                                </m:r>
+                                <m:r>
+                                  <a:rPr lang="en-US" sz="1200" i="1" dirty="0" smtClean="0">
+                                    <a:effectLst/>
+                                    <a:latin typeface="Cambria Math" panose="02040503050406030204" pitchFamily="18" charset="0"/>
+                                  </a:rPr>
+                                  <m:t>𝑅𝑌𝑌</m:t>
+                                </m:r>
+                                <m:r>
+                                  <a:rPr lang="en-US" sz="1200" i="0" dirty="0" smtClean="0">
+                                    <a:effectLst/>
+                                    <a:latin typeface="Cambria Math" panose="02040503050406030204" pitchFamily="18" charset="0"/>
+                                  </a:rPr>
+                                  <m:t>​</m:t>
+                                </m:r>
+                                <m:d>
+                                  <m:dPr>
+                                    <m:ctrlPr>
+                                      <a:rPr lang="en-US" sz="1200" i="0" dirty="0" smtClean="0">
+                                        <a:effectLst/>
+                                        <a:latin typeface="Cambria Math" panose="02040503050406030204" pitchFamily="18" charset="0"/>
+                                      </a:rPr>
+                                    </m:ctrlPr>
+                                  </m:dPr>
+                                  <m:e>
+                                    <m:r>
+                                      <a:rPr lang="en-US" sz="1200" i="0" dirty="0" smtClean="0">
+                                        <a:effectLst/>
+                                        <a:latin typeface="Cambria Math" panose="02040503050406030204" pitchFamily="18" charset="0"/>
+                                      </a:rPr>
+                                      <m:t>2</m:t>
+                                    </m:r>
+                                    <m:r>
+                                      <a:rPr lang="en-US" sz="1200" i="1" dirty="0" smtClean="0">
+                                        <a:effectLst/>
+                                        <a:latin typeface="Cambria Math" panose="02040503050406030204" pitchFamily="18" charset="0"/>
+                                      </a:rPr>
+                                      <m:t>𝐽</m:t>
+                                    </m:r>
+                                    <m:r>
+                                      <a:rPr lang="en-US" sz="1200" i="0" dirty="0" smtClean="0">
+                                        <a:effectLst/>
+                                        <a:latin typeface="Cambria Math" panose="02040503050406030204" pitchFamily="18" charset="0"/>
+                                      </a:rPr>
+                                      <m:t>′</m:t>
+                                    </m:r>
+                                    <m:r>
+                                      <a:rPr lang="en-US" sz="1200" i="1" dirty="0" smtClean="0">
+                                        <a:effectLst/>
+                                        <a:latin typeface="Cambria Math" panose="02040503050406030204" pitchFamily="18" charset="0"/>
+                                      </a:rPr>
+                                      <m:t>𝜏</m:t>
+                                    </m:r>
+                                  </m:e>
+                                </m:d>
+                                <m:r>
+                                  <a:rPr lang="en-US" sz="1200" i="0" dirty="0" smtClean="0">
+                                    <a:effectLst/>
+                                    <a:latin typeface="Cambria Math" panose="02040503050406030204" pitchFamily="18" charset="0"/>
+                                  </a:rPr>
+                                  <m:t>,</m:t>
+                                </m:r>
+                                <m:r>
+                                  <a:rPr lang="en-US" sz="1200" i="1" dirty="0" smtClean="0">
+                                    <a:effectLst/>
+                                    <a:latin typeface="Cambria Math" panose="02040503050406030204" pitchFamily="18" charset="0"/>
+                                  </a:rPr>
+                                  <m:t>𝑅𝑍𝑍</m:t>
+                                </m:r>
+                                <m:r>
+                                  <a:rPr lang="en-US" sz="1200" i="0" dirty="0" smtClean="0">
+                                    <a:effectLst/>
+                                    <a:latin typeface="Cambria Math" panose="02040503050406030204" pitchFamily="18" charset="0"/>
+                                  </a:rPr>
+                                  <m:t>​</m:t>
+                                </m:r>
+                                <m:d>
+                                  <m:dPr>
+                                    <m:ctrlPr>
+                                      <a:rPr lang="en-US" sz="1200" i="0" dirty="0" smtClean="0">
+                                        <a:effectLst/>
+                                        <a:latin typeface="Cambria Math" panose="02040503050406030204" pitchFamily="18" charset="0"/>
+                                      </a:rPr>
+                                    </m:ctrlPr>
+                                  </m:dPr>
+                                  <m:e>
+                                    <m:r>
+                                      <a:rPr lang="en-US" sz="1200" i="0" dirty="0" smtClean="0">
+                                        <a:effectLst/>
+                                        <a:latin typeface="Cambria Math" panose="02040503050406030204" pitchFamily="18" charset="0"/>
+                                      </a:rPr>
+                                      <m:t>2</m:t>
+                                    </m:r>
+                                    <m:r>
+                                      <a:rPr lang="en-US" sz="1200" i="1" dirty="0" smtClean="0">
+                                        <a:effectLst/>
+                                        <a:latin typeface="Cambria Math" panose="02040503050406030204" pitchFamily="18" charset="0"/>
+                                      </a:rPr>
+                                      <m:t>𝐽</m:t>
+                                    </m:r>
+                                    <m:r>
+                                      <a:rPr lang="en-US" sz="1200" i="0" dirty="0" smtClean="0">
+                                        <a:effectLst/>
+                                        <a:latin typeface="Cambria Math" panose="02040503050406030204" pitchFamily="18" charset="0"/>
+                                      </a:rPr>
+                                      <m:t>′</m:t>
+                                    </m:r>
+                                    <m:r>
+                                      <a:rPr lang="en-US" sz="1200" i="1" dirty="0" smtClean="0">
+                                        <a:effectLst/>
+                                        <a:latin typeface="Cambria Math" panose="02040503050406030204" pitchFamily="18" charset="0"/>
+                                      </a:rPr>
+                                      <m:t>𝜏</m:t>
+                                    </m:r>
+                                  </m:e>
+                                </m:d>
+                              </m:oMath>
+                            </m:oMathPara>
+                          </a14:m>
+                          <a:endParaRPr lang="en-US" sz="1200" dirty="0"/>
+                        </a:p>
+                      </a:txBody>
+                      <a:tcPr/>
+                    </a:tc>
+                    <a:extLst>
+                      <a:ext uri="{0D108BD9-81ED-4DB2-BD59-A6C34878D82A}">
+                        <a16:rowId xmlns:a16="http://schemas.microsoft.com/office/drawing/2014/main" val="73067340"/>
+                      </a:ext>
+                    </a:extLst>
+                  </a:tr>
+                  <a:tr h="243108">
+                    <a:tc>
+                      <a:txBody>
+                        <a:bodyPr/>
+                        <a:lstStyle/>
+                        <a:p>
+                          <a:pPr marL="0" marR="0" lvl="0" indent="0" algn="l" defTabSz="914400" rtl="0" eaLnBrk="1" fontAlgn="auto" latinLnBrk="0" hangingPunct="1">
+                            <a:lnSpc>
+                              <a:spcPct val="100000"/>
+                            </a:lnSpc>
+                            <a:spcBef>
+                              <a:spcPts val="0"/>
+                            </a:spcBef>
+                            <a:spcAft>
+                              <a:spcPts val="0"/>
+                            </a:spcAft>
+                            <a:buClrTx/>
+                            <a:buSzTx/>
+                            <a:buFontTx/>
+                            <a:buNone/>
+                            <a:tabLst/>
+                            <a:defRPr/>
+                          </a:pPr>
+                          <a14:m>
+                            <m:oMathPara xmlns:m="http://schemas.openxmlformats.org/officeDocument/2006/math">
+                              <m:oMath>
+                                <m:r>
+                                  <m:rPr>
+                                    <m:nor/>
+                                  </m:rPr>
+                                  <a:rPr lang="en-US" sz="1200" i="0" smtClean="0"/>
+                                  <m:t>Scambio(</m:t>
+                                </m:r>
+                                <m:r>
+                                  <m:rPr>
+                                    <m:nor/>
+                                  </m:rPr>
+                                  <a:rPr lang="en-US" sz="1200" b="0" i="0" smtClean="0"/>
+                                  <m:t>3</m:t>
+                                </m:r>
+                                <m:r>
+                                  <m:rPr>
+                                    <m:nor/>
+                                  </m:rPr>
+                                  <a:rPr lang="en-US" sz="1200" i="0" smtClean="0"/>
+                                  <m:t>,</m:t>
+                                </m:r>
+                                <m:r>
+                                  <m:rPr>
+                                    <m:nor/>
+                                  </m:rPr>
+                                  <a:rPr lang="en-US" sz="1200" b="0" i="0" smtClean="0"/>
+                                  <m:t>1</m:t>
+                                </m:r>
+                                <m:r>
+                                  <m:rPr>
+                                    <m:nor/>
+                                  </m:rPr>
+                                  <a:rPr lang="en-US" sz="1200" i="0" smtClean="0"/>
+                                  <m:t>)</m:t>
+                                </m:r>
+                              </m:oMath>
+                            </m:oMathPara>
+                          </a14:m>
+                          <a:endParaRPr lang="en-US" sz="1200" dirty="0"/>
+                        </a:p>
+                      </a:txBody>
+                      <a:tcPr/>
+                    </a:tc>
+                    <a:tc>
+                      <a:txBody>
+                        <a:bodyPr/>
+                        <a:lstStyle/>
+                        <a:p>
+                          <a14:m>
+                            <m:oMathPara xmlns:m="http://schemas.openxmlformats.org/officeDocument/2006/math">
+                              <m:oMath>
+                                <m:d>
+                                  <m:dPr>
+                                    <m:ctrlPr>
+                                      <a:rPr lang="en-US" sz="1200" i="1" dirty="0" smtClean="0">
+                                        <a:latin typeface="Cambria Math" panose="02040503050406030204" pitchFamily="18" charset="0"/>
+                                      </a:rPr>
+                                    </m:ctrlPr>
+                                  </m:dPr>
+                                  <m:e>
+                                    <m:r>
+                                      <a:rPr lang="en-US" sz="1200" i="1" dirty="0" smtClean="0">
+                                        <a:latin typeface="Cambria Math" panose="02040503050406030204" pitchFamily="18" charset="0"/>
+                                      </a:rPr>
+                                      <m:t>𝑞</m:t>
+                                    </m:r>
+                                    <m:r>
+                                      <a:rPr lang="en-US" sz="1200" i="0" dirty="0" smtClean="0">
+                                        <a:latin typeface="Cambria Math" panose="02040503050406030204" pitchFamily="18" charset="0"/>
+                                      </a:rPr>
+                                      <m:t>0​,</m:t>
+                                    </m:r>
+                                    <m:r>
+                                      <a:rPr lang="en-US" sz="1200" i="1" dirty="0" smtClean="0">
+                                        <a:latin typeface="Cambria Math" panose="02040503050406030204" pitchFamily="18" charset="0"/>
+                                      </a:rPr>
+                                      <m:t>𝑞</m:t>
+                                    </m:r>
+                                    <m:r>
+                                      <a:rPr lang="en-US" sz="1200" i="0" dirty="0" smtClean="0">
+                                        <a:latin typeface="Cambria Math" panose="02040503050406030204" pitchFamily="18" charset="0"/>
+                                      </a:rPr>
+                                      <m:t>2​</m:t>
+                                    </m:r>
+                                  </m:e>
+                                </m:d>
+                              </m:oMath>
+                            </m:oMathPara>
+                          </a14:m>
+                          <a:endParaRPr lang="en-US" sz="1200" dirty="0"/>
+                        </a:p>
+                      </a:txBody>
+                      <a:tcPr/>
+                    </a:tc>
+                    <a:tc>
+                      <a:txBody>
+                        <a:bodyPr/>
+                        <a:lstStyle/>
+                        <a:p>
+                          <a14:m>
+                            <m:oMathPara xmlns:m="http://schemas.openxmlformats.org/officeDocument/2006/math">
+                              <m:oMath>
+                                <m:r>
+                                  <a:rPr lang="en-US" sz="1200" i="1" dirty="0" smtClean="0">
+                                    <a:effectLst/>
+                                    <a:latin typeface="Cambria Math" panose="02040503050406030204" pitchFamily="18" charset="0"/>
+                                  </a:rPr>
+                                  <m:t>𝑅𝑋𝑋</m:t>
+                                </m:r>
+                                <m:r>
+                                  <a:rPr lang="en-US" sz="1200" i="0" dirty="0" smtClean="0">
+                                    <a:effectLst/>
+                                    <a:latin typeface="Cambria Math" panose="02040503050406030204" pitchFamily="18" charset="0"/>
+                                  </a:rPr>
+                                  <m:t>​</m:t>
+                                </m:r>
+                                <m:d>
+                                  <m:dPr>
+                                    <m:ctrlPr>
+                                      <a:rPr lang="en-US" sz="1200" i="0" dirty="0" smtClean="0">
+                                        <a:effectLst/>
+                                        <a:latin typeface="Cambria Math" panose="02040503050406030204" pitchFamily="18" charset="0"/>
+                                      </a:rPr>
+                                    </m:ctrlPr>
+                                  </m:dPr>
+                                  <m:e>
+                                    <m:r>
+                                      <a:rPr lang="en-US" sz="1200" i="0" dirty="0" smtClean="0">
+                                        <a:effectLst/>
+                                        <a:latin typeface="Cambria Math" panose="02040503050406030204" pitchFamily="18" charset="0"/>
+                                      </a:rPr>
+                                      <m:t>2</m:t>
+                                    </m:r>
+                                    <m:r>
+                                      <a:rPr lang="en-US" sz="1200" i="1" dirty="0" smtClean="0">
+                                        <a:effectLst/>
+                                        <a:latin typeface="Cambria Math" panose="02040503050406030204" pitchFamily="18" charset="0"/>
+                                      </a:rPr>
+                                      <m:t>𝐽</m:t>
+                                    </m:r>
+                                    <m:r>
+                                      <a:rPr lang="en-US" sz="1200" i="0" dirty="0" smtClean="0">
+                                        <a:effectLst/>
+                                        <a:latin typeface="Cambria Math" panose="02040503050406030204" pitchFamily="18" charset="0"/>
+                                      </a:rPr>
+                                      <m:t>′</m:t>
+                                    </m:r>
+                                    <m:r>
+                                      <a:rPr lang="en-US" sz="1200" i="1" dirty="0" smtClean="0">
+                                        <a:effectLst/>
+                                        <a:latin typeface="Cambria Math" panose="02040503050406030204" pitchFamily="18" charset="0"/>
+                                      </a:rPr>
+                                      <m:t>𝜏</m:t>
+                                    </m:r>
+                                  </m:e>
+                                </m:d>
+                                <m:r>
+                                  <a:rPr lang="en-US" sz="1200" i="0" dirty="0" smtClean="0">
+                                    <a:effectLst/>
+                                    <a:latin typeface="Cambria Math" panose="02040503050406030204" pitchFamily="18" charset="0"/>
+                                  </a:rPr>
+                                  <m:t>,</m:t>
+                                </m:r>
+                                <m:r>
+                                  <a:rPr lang="en-US" sz="1200" i="1" dirty="0" smtClean="0">
+                                    <a:effectLst/>
+                                    <a:latin typeface="Cambria Math" panose="02040503050406030204" pitchFamily="18" charset="0"/>
+                                  </a:rPr>
+                                  <m:t>𝑅𝑌𝑌</m:t>
+                                </m:r>
+                                <m:r>
+                                  <a:rPr lang="en-US" sz="1200" i="0" dirty="0" smtClean="0">
+                                    <a:effectLst/>
+                                    <a:latin typeface="Cambria Math" panose="02040503050406030204" pitchFamily="18" charset="0"/>
+                                  </a:rPr>
+                                  <m:t>​</m:t>
+                                </m:r>
+                                <m:d>
+                                  <m:dPr>
+                                    <m:ctrlPr>
+                                      <a:rPr lang="en-US" sz="1200" i="0" dirty="0" smtClean="0">
+                                        <a:effectLst/>
+                                        <a:latin typeface="Cambria Math" panose="02040503050406030204" pitchFamily="18" charset="0"/>
+                                      </a:rPr>
+                                    </m:ctrlPr>
+                                  </m:dPr>
+                                  <m:e>
+                                    <m:r>
+                                      <a:rPr lang="en-US" sz="1200" i="0" dirty="0" smtClean="0">
+                                        <a:effectLst/>
+                                        <a:latin typeface="Cambria Math" panose="02040503050406030204" pitchFamily="18" charset="0"/>
+                                      </a:rPr>
+                                      <m:t>2</m:t>
+                                    </m:r>
+                                    <m:r>
+                                      <a:rPr lang="en-US" sz="1200" i="1" dirty="0" smtClean="0">
+                                        <a:effectLst/>
+                                        <a:latin typeface="Cambria Math" panose="02040503050406030204" pitchFamily="18" charset="0"/>
+                                      </a:rPr>
+                                      <m:t>𝐽</m:t>
+                                    </m:r>
+                                    <m:r>
+                                      <a:rPr lang="en-US" sz="1200" i="0" dirty="0" smtClean="0">
+                                        <a:effectLst/>
+                                        <a:latin typeface="Cambria Math" panose="02040503050406030204" pitchFamily="18" charset="0"/>
+                                      </a:rPr>
+                                      <m:t>′</m:t>
+                                    </m:r>
+                                    <m:r>
+                                      <a:rPr lang="en-US" sz="1200" i="1" dirty="0" smtClean="0">
+                                        <a:effectLst/>
+                                        <a:latin typeface="Cambria Math" panose="02040503050406030204" pitchFamily="18" charset="0"/>
+                                      </a:rPr>
+                                      <m:t>𝜏</m:t>
+                                    </m:r>
+                                  </m:e>
+                                </m:d>
+                                <m:r>
+                                  <a:rPr lang="en-US" sz="1200" i="0" dirty="0" smtClean="0">
+                                    <a:effectLst/>
+                                    <a:latin typeface="Cambria Math" panose="02040503050406030204" pitchFamily="18" charset="0"/>
+                                  </a:rPr>
+                                  <m:t>,</m:t>
+                                </m:r>
+                                <m:r>
+                                  <a:rPr lang="en-US" sz="1200" i="1" dirty="0" smtClean="0">
+                                    <a:effectLst/>
+                                    <a:latin typeface="Cambria Math" panose="02040503050406030204" pitchFamily="18" charset="0"/>
+                                  </a:rPr>
+                                  <m:t>𝑅𝑍𝑍</m:t>
+                                </m:r>
+                                <m:r>
+                                  <a:rPr lang="en-US" sz="1200" i="0" dirty="0" smtClean="0">
+                                    <a:effectLst/>
+                                    <a:latin typeface="Cambria Math" panose="02040503050406030204" pitchFamily="18" charset="0"/>
+                                  </a:rPr>
+                                  <m:t>​</m:t>
+                                </m:r>
+                                <m:d>
+                                  <m:dPr>
+                                    <m:ctrlPr>
+                                      <a:rPr lang="en-US" sz="1200" i="0" dirty="0" smtClean="0">
+                                        <a:effectLst/>
+                                        <a:latin typeface="Cambria Math" panose="02040503050406030204" pitchFamily="18" charset="0"/>
+                                      </a:rPr>
+                                    </m:ctrlPr>
+                                  </m:dPr>
+                                  <m:e>
+                                    <m:r>
+                                      <a:rPr lang="en-US" sz="1200" i="0" dirty="0" smtClean="0">
+                                        <a:effectLst/>
+                                        <a:latin typeface="Cambria Math" panose="02040503050406030204" pitchFamily="18" charset="0"/>
+                                      </a:rPr>
+                                      <m:t>2</m:t>
+                                    </m:r>
+                                    <m:r>
+                                      <a:rPr lang="en-US" sz="1200" i="1" dirty="0" smtClean="0">
+                                        <a:effectLst/>
+                                        <a:latin typeface="Cambria Math" panose="02040503050406030204" pitchFamily="18" charset="0"/>
+                                      </a:rPr>
+                                      <m:t>𝐽</m:t>
+                                    </m:r>
+                                    <m:r>
+                                      <a:rPr lang="en-US" sz="1200" i="0" dirty="0" smtClean="0">
+                                        <a:effectLst/>
+                                        <a:latin typeface="Cambria Math" panose="02040503050406030204" pitchFamily="18" charset="0"/>
+                                      </a:rPr>
+                                      <m:t>′</m:t>
+                                    </m:r>
+                                    <m:r>
+                                      <a:rPr lang="en-US" sz="1200" i="1" dirty="0" smtClean="0">
+                                        <a:effectLst/>
+                                        <a:latin typeface="Cambria Math" panose="02040503050406030204" pitchFamily="18" charset="0"/>
+                                      </a:rPr>
+                                      <m:t>𝜏</m:t>
+                                    </m:r>
+                                  </m:e>
+                                </m:d>
+                              </m:oMath>
+                            </m:oMathPara>
+                          </a14:m>
+                          <a:endParaRPr lang="en-US" sz="1200" dirty="0"/>
+                        </a:p>
+                      </a:txBody>
+                      <a:tcPr/>
+                    </a:tc>
+                    <a:extLst>
+                      <a:ext uri="{0D108BD9-81ED-4DB2-BD59-A6C34878D82A}">
+                        <a16:rowId xmlns:a16="http://schemas.microsoft.com/office/drawing/2014/main" val="1831271688"/>
+                      </a:ext>
+                    </a:extLst>
+                  </a:tr>
+                  <a:tr h="283233">
+                    <a:tc>
+                      <a:txBody>
+                        <a:bodyPr/>
+                        <a:lstStyle/>
+                        <a:p>
+                          <a:pPr marL="0" marR="0" lvl="0" indent="0" algn="l" defTabSz="914400" rtl="0" eaLnBrk="1" fontAlgn="auto" latinLnBrk="0" hangingPunct="1">
+                            <a:lnSpc>
+                              <a:spcPct val="100000"/>
+                            </a:lnSpc>
+                            <a:spcBef>
+                              <a:spcPts val="0"/>
+                            </a:spcBef>
+                            <a:spcAft>
+                              <a:spcPts val="0"/>
+                            </a:spcAft>
+                            <a:buClrTx/>
+                            <a:buSzTx/>
+                            <a:buFontTx/>
+                            <a:buNone/>
+                            <a:tabLst/>
+                            <a:defRPr/>
+                          </a:pPr>
+                          <a14:m>
+                            <m:oMathPara xmlns:m="http://schemas.openxmlformats.org/officeDocument/2006/math">
+                              <m:oMath>
+                                <m:r>
+                                  <m:rPr>
+                                    <m:nor/>
+                                  </m:rPr>
+                                  <a:rPr lang="en-US" sz="1200" i="0" smtClean="0"/>
+                                  <m:t>C</m:t>
+                                </m:r>
+                                <m:r>
+                                  <m:rPr>
+                                    <m:nor/>
+                                  </m:rPr>
+                                  <a:rPr lang="en-US" sz="1200" b="0" i="0" smtClean="0"/>
+                                  <m:t>ampo</m:t>
+                                </m:r>
+                              </m:oMath>
+                            </m:oMathPara>
+                          </a14:m>
+                          <a:endParaRPr lang="en-US" sz="1200" dirty="0"/>
+                        </a:p>
+                      </a:txBody>
+                      <a:tcPr/>
+                    </a:tc>
+                    <a:tc>
+                      <a:txBody>
+                        <a:bodyPr/>
+                        <a:lstStyle/>
+                        <a:p>
+                          <a14:m>
+                            <m:oMathPara xmlns:m="http://schemas.openxmlformats.org/officeDocument/2006/math">
+                              <m:oMath>
+                                <m:r>
+                                  <m:rPr>
+                                    <m:nor/>
+                                  </m:rPr>
+                                  <a:rPr lang="en-US" sz="1200" smtClean="0">
+                                    <a:effectLst/>
+                                  </a:rPr>
+                                  <m:t>q0</m:t>
+                                </m:r>
+                                <m:r>
+                                  <m:rPr>
+                                    <m:nor/>
+                                  </m:rPr>
+                                  <a:rPr lang="en-US" sz="1200" smtClean="0"/>
+                                  <m:t>​,</m:t>
+                                </m:r>
+                                <m:r>
+                                  <m:rPr>
+                                    <m:nor/>
+                                  </m:rPr>
+                                  <a:rPr lang="en-US" sz="1200" smtClean="0">
+                                    <a:effectLst/>
+                                  </a:rPr>
+                                  <m:t>q1</m:t>
+                                </m:r>
+                                <m:r>
+                                  <m:rPr>
+                                    <m:nor/>
+                                  </m:rPr>
+                                  <a:rPr lang="en-US" sz="1200" smtClean="0"/>
+                                  <m:t>​,</m:t>
+                                </m:r>
+                                <m:r>
+                                  <m:rPr>
+                                    <m:nor/>
+                                  </m:rPr>
+                                  <a:rPr lang="en-US" sz="1200" smtClean="0">
+                                    <a:effectLst/>
+                                  </a:rPr>
+                                  <m:t>q2</m:t>
+                                </m:r>
+                                <m:r>
+                                  <m:rPr>
+                                    <m:nor/>
+                                  </m:rPr>
+                                  <a:rPr lang="en-US" sz="1200" smtClean="0"/>
+                                  <m:t>​</m:t>
+                                </m:r>
+                              </m:oMath>
+                            </m:oMathPara>
+                          </a14:m>
+                          <a:endParaRPr lang="en-US" sz="1200" dirty="0"/>
+                        </a:p>
+                      </a:txBody>
+                      <a:tcPr/>
+                    </a:tc>
+                    <a:tc>
+                      <a:txBody>
+                        <a:bodyPr/>
+                        <a:lstStyle/>
+                        <a:p>
+                          <a:pPr algn="ctr"/>
+                          <a14:m>
+                            <m:oMath xmlns:m="http://schemas.openxmlformats.org/officeDocument/2006/math">
+                              <m:sSubSup>
+                                <m:sSubSupPr>
+                                  <m:ctrlPr>
+                                    <a:rPr lang="en-US" sz="1200" i="1" kern="1200">
+                                      <a:solidFill>
+                                        <a:schemeClr val="dk1"/>
+                                      </a:solidFill>
+                                      <a:latin typeface="Cambria Math" panose="02040503050406030204" pitchFamily="18" charset="0"/>
+                                      <a:ea typeface="+mn-ea"/>
+                                      <a:cs typeface="+mn-cs"/>
+                                    </a:rPr>
+                                  </m:ctrlPr>
+                                </m:sSubSupPr>
+                                <m:e>
+                                  <m:r>
+                                    <a:rPr lang="en-US" sz="1200" i="1" kern="1200">
+                                      <a:solidFill>
+                                        <a:schemeClr val="dk1"/>
+                                      </a:solidFill>
+                                      <a:latin typeface="Cambria Math" panose="02040503050406030204" pitchFamily="18" charset="0"/>
+                                      <a:ea typeface="+mn-ea"/>
+                                      <a:cs typeface="+mn-cs"/>
+                                    </a:rPr>
+                                    <m:t>𝑅</m:t>
+                                  </m:r>
+                                </m:e>
+                                <m:sub>
+                                  <m:r>
+                                    <a:rPr lang="en-US" sz="1200" i="1" kern="1200">
+                                      <a:solidFill>
+                                        <a:schemeClr val="dk1"/>
+                                      </a:solidFill>
+                                      <a:latin typeface="Cambria Math" panose="02040503050406030204" pitchFamily="18" charset="0"/>
+                                      <a:ea typeface="+mn-ea"/>
+                                      <a:cs typeface="+mn-cs"/>
+                                    </a:rPr>
+                                    <m:t>𝑍</m:t>
+                                  </m:r>
+                                </m:sub>
+                                <m:sup>
+                                  <m:d>
+                                    <m:dPr>
+                                      <m:ctrlPr>
+                                        <a:rPr lang="en-US" sz="1200" b="0" i="0" kern="1200" smtClean="0">
+                                          <a:solidFill>
+                                            <a:schemeClr val="dk1"/>
+                                          </a:solidFill>
+                                          <a:latin typeface="Cambria Math" panose="02040503050406030204" pitchFamily="18" charset="0"/>
+                                          <a:ea typeface="+mn-ea"/>
+                                          <a:cs typeface="+mn-cs"/>
+                                        </a:rPr>
+                                      </m:ctrlPr>
+                                    </m:dPr>
+                                    <m:e>
+                                      <m:r>
+                                        <a:rPr lang="en-US" sz="1200" b="0" i="0" kern="1200" smtClean="0">
+                                          <a:solidFill>
+                                            <a:schemeClr val="dk1"/>
+                                          </a:solidFill>
+                                          <a:latin typeface="Cambria Math" panose="02040503050406030204" pitchFamily="18" charset="0"/>
+                                          <a:ea typeface="+mn-ea"/>
+                                          <a:cs typeface="+mn-cs"/>
+                                        </a:rPr>
+                                        <m:t>0</m:t>
+                                      </m:r>
+                                    </m:e>
+                                  </m:d>
+                                </m:sup>
+                              </m:sSubSup>
+                              <m:d>
+                                <m:dPr>
+                                  <m:ctrlPr>
+                                    <a:rPr lang="en-US" sz="1200" i="0" kern="1200">
+                                      <a:solidFill>
+                                        <a:schemeClr val="dk1"/>
+                                      </a:solidFill>
+                                      <a:latin typeface="Cambria Math" panose="02040503050406030204" pitchFamily="18" charset="0"/>
+                                      <a:ea typeface="+mn-ea"/>
+                                      <a:cs typeface="+mn-cs"/>
+                                    </a:rPr>
+                                  </m:ctrlPr>
+                                </m:dPr>
+                                <m:e>
+                                  <m:r>
+                                    <a:rPr lang="en-US" sz="1200" i="0" kern="1200">
+                                      <a:solidFill>
+                                        <a:schemeClr val="dk1"/>
+                                      </a:solidFill>
+                                      <a:latin typeface="Cambria Math" panose="02040503050406030204" pitchFamily="18" charset="0"/>
+                                      <a:ea typeface="+mn-ea"/>
+                                      <a:cs typeface="+mn-cs"/>
+                                    </a:rPr>
+                                    <m:t>2</m:t>
+                                  </m:r>
+                                  <m:r>
+                                    <a:rPr lang="en-US" sz="1200" i="1" kern="1200">
+                                      <a:solidFill>
+                                        <a:schemeClr val="dk1"/>
+                                      </a:solidFill>
+                                      <a:latin typeface="Cambria Math" panose="02040503050406030204" pitchFamily="18" charset="0"/>
+                                      <a:ea typeface="+mn-ea"/>
+                                      <a:cs typeface="+mn-cs"/>
+                                    </a:rPr>
+                                    <m:t>𝑏</m:t>
+                                  </m:r>
+                                  <m:r>
+                                    <a:rPr lang="en-US" sz="1200" i="1" kern="1200">
+                                      <a:solidFill>
+                                        <a:schemeClr val="dk1"/>
+                                      </a:solidFill>
+                                      <a:latin typeface="Cambria Math" panose="02040503050406030204" pitchFamily="18" charset="0"/>
+                                      <a:ea typeface="+mn-ea"/>
+                                      <a:cs typeface="+mn-cs"/>
+                                    </a:rPr>
+                                    <m:t>𝜏</m:t>
+                                  </m:r>
+                                </m:e>
+                              </m:d>
+                            </m:oMath>
+                          </a14:m>
+                          <a:r>
+                            <a:rPr lang="en-US" sz="1200" dirty="0"/>
+                            <a:t>, </a:t>
+                          </a:r>
+                          <a14:m>
+                            <m:oMath xmlns:m="http://schemas.openxmlformats.org/officeDocument/2006/math">
+                              <m:sSubSup>
+                                <m:sSubSupPr>
+                                  <m:ctrlPr>
+                                    <a:rPr lang="en-US" sz="1200" i="1" kern="1200">
+                                      <a:solidFill>
+                                        <a:schemeClr val="dk1"/>
+                                      </a:solidFill>
+                                      <a:latin typeface="+mn-lt"/>
+                                      <a:ea typeface="+mn-ea"/>
+                                      <a:cs typeface="+mn-cs"/>
+                                    </a:rPr>
+                                  </m:ctrlPr>
+                                </m:sSubSupPr>
+                                <m:e>
+                                  <m:r>
+                                    <a:rPr lang="en-US" sz="1200" i="1" kern="1200">
+                                      <a:solidFill>
+                                        <a:schemeClr val="dk1"/>
+                                      </a:solidFill>
+                                      <a:latin typeface="+mn-lt"/>
+                                      <a:ea typeface="+mn-ea"/>
+                                      <a:cs typeface="+mn-cs"/>
+                                    </a:rPr>
+                                    <m:t>𝑅</m:t>
+                                  </m:r>
+                                </m:e>
+                                <m:sub>
+                                  <m:r>
+                                    <a:rPr lang="en-US" sz="1200" i="1" kern="1200">
+                                      <a:solidFill>
+                                        <a:schemeClr val="dk1"/>
+                                      </a:solidFill>
+                                      <a:latin typeface="+mn-lt"/>
+                                      <a:ea typeface="+mn-ea"/>
+                                      <a:cs typeface="+mn-cs"/>
+                                    </a:rPr>
+                                    <m:t>𝑍</m:t>
+                                  </m:r>
+                                </m:sub>
+                                <m:sup>
+                                  <m:d>
+                                    <m:dPr>
+                                      <m:ctrlPr>
+                                        <a:rPr lang="en-US" sz="1200" i="0" kern="1200">
+                                          <a:solidFill>
+                                            <a:schemeClr val="dk1"/>
+                                          </a:solidFill>
+                                          <a:latin typeface="+mn-lt"/>
+                                          <a:ea typeface="+mn-ea"/>
+                                          <a:cs typeface="+mn-cs"/>
+                                        </a:rPr>
+                                      </m:ctrlPr>
+                                    </m:dPr>
+                                    <m:e>
+                                      <m:r>
+                                        <a:rPr lang="en-US" sz="1200" i="0" kern="1200">
+                                          <a:solidFill>
+                                            <a:schemeClr val="dk1"/>
+                                          </a:solidFill>
+                                          <a:latin typeface="+mn-lt"/>
+                                          <a:ea typeface="+mn-ea"/>
+                                          <a:cs typeface="+mn-cs"/>
+                                        </a:rPr>
+                                        <m:t>1</m:t>
+                                      </m:r>
+                                    </m:e>
+                                  </m:d>
+                                </m:sup>
+                              </m:sSubSup>
+                              <m:d>
+                                <m:dPr>
+                                  <m:ctrlPr>
+                                    <a:rPr lang="en-US" sz="1200" i="0" kern="1200">
+                                      <a:solidFill>
+                                        <a:schemeClr val="dk1"/>
+                                      </a:solidFill>
+                                      <a:latin typeface="+mn-lt"/>
+                                      <a:ea typeface="+mn-ea"/>
+                                      <a:cs typeface="+mn-cs"/>
+                                    </a:rPr>
+                                  </m:ctrlPr>
+                                </m:dPr>
+                                <m:e>
+                                  <m:r>
+                                    <a:rPr lang="en-US" sz="1200" i="0" kern="1200">
+                                      <a:solidFill>
+                                        <a:schemeClr val="dk1"/>
+                                      </a:solidFill>
+                                      <a:latin typeface="+mn-lt"/>
+                                      <a:ea typeface="+mn-ea"/>
+                                      <a:cs typeface="+mn-cs"/>
+                                    </a:rPr>
+                                    <m:t>2</m:t>
+                                  </m:r>
+                                  <m:r>
+                                    <a:rPr lang="en-US" sz="1200" i="1" kern="1200">
+                                      <a:solidFill>
+                                        <a:schemeClr val="dk1"/>
+                                      </a:solidFill>
+                                      <a:latin typeface="+mn-lt"/>
+                                      <a:ea typeface="+mn-ea"/>
+                                      <a:cs typeface="+mn-cs"/>
+                                    </a:rPr>
+                                    <m:t>𝑏</m:t>
+                                  </m:r>
+                                  <m:r>
+                                    <a:rPr lang="en-US" sz="1200" i="1" kern="1200">
+                                      <a:solidFill>
+                                        <a:schemeClr val="dk1"/>
+                                      </a:solidFill>
+                                      <a:latin typeface="+mn-lt"/>
+                                      <a:ea typeface="+mn-ea"/>
+                                      <a:cs typeface="+mn-cs"/>
+                                    </a:rPr>
+                                    <m:t>𝜏</m:t>
+                                  </m:r>
+                                </m:e>
+                              </m:d>
+                            </m:oMath>
+                          </a14:m>
+                          <a:r>
+                            <a:rPr lang="en-US" sz="1200" dirty="0"/>
+                            <a:t>, </a:t>
+                          </a:r>
+                          <a14:m>
+                            <m:oMath xmlns:m="http://schemas.openxmlformats.org/officeDocument/2006/math">
+                              <m:sSubSup>
+                                <m:sSubSupPr>
+                                  <m:ctrlPr>
+                                    <a:rPr lang="en-US" sz="1200" i="1" kern="1200">
+                                      <a:solidFill>
+                                        <a:schemeClr val="dk1"/>
+                                      </a:solidFill>
+                                      <a:latin typeface="+mn-lt"/>
+                                      <a:ea typeface="+mn-ea"/>
+                                      <a:cs typeface="+mn-cs"/>
+                                    </a:rPr>
+                                  </m:ctrlPr>
+                                </m:sSubSupPr>
+                                <m:e>
+                                  <m:r>
+                                    <a:rPr lang="en-US" sz="1200" i="1" kern="1200">
+                                      <a:solidFill>
+                                        <a:schemeClr val="dk1"/>
+                                      </a:solidFill>
+                                      <a:latin typeface="+mn-lt"/>
+                                      <a:ea typeface="+mn-ea"/>
+                                      <a:cs typeface="+mn-cs"/>
+                                    </a:rPr>
+                                    <m:t>𝑅</m:t>
+                                  </m:r>
+                                </m:e>
+                                <m:sub>
+                                  <m:r>
+                                    <a:rPr lang="en-US" sz="1200" i="1" kern="1200">
+                                      <a:solidFill>
+                                        <a:schemeClr val="dk1"/>
+                                      </a:solidFill>
+                                      <a:latin typeface="+mn-lt"/>
+                                      <a:ea typeface="+mn-ea"/>
+                                      <a:cs typeface="+mn-cs"/>
+                                    </a:rPr>
+                                    <m:t>𝑍</m:t>
+                                  </m:r>
+                                </m:sub>
+                                <m:sup>
+                                  <m:d>
+                                    <m:dPr>
+                                      <m:ctrlPr>
+                                        <a:rPr lang="en-US" sz="1200" i="0" kern="1200">
+                                          <a:solidFill>
+                                            <a:schemeClr val="dk1"/>
+                                          </a:solidFill>
+                                          <a:latin typeface="+mn-lt"/>
+                                          <a:ea typeface="+mn-ea"/>
+                                          <a:cs typeface="+mn-cs"/>
+                                        </a:rPr>
+                                      </m:ctrlPr>
+                                    </m:dPr>
+                                    <m:e>
+                                      <m:r>
+                                        <a:rPr lang="en-US" sz="1200" i="0" kern="1200">
+                                          <a:solidFill>
+                                            <a:schemeClr val="dk1"/>
+                                          </a:solidFill>
+                                          <a:latin typeface="+mn-lt"/>
+                                          <a:ea typeface="+mn-ea"/>
+                                          <a:cs typeface="+mn-cs"/>
+                                        </a:rPr>
+                                        <m:t>2</m:t>
+                                      </m:r>
+                                    </m:e>
+                                  </m:d>
+                                </m:sup>
+                              </m:sSubSup>
+                              <m:d>
+                                <m:dPr>
+                                  <m:ctrlPr>
+                                    <a:rPr lang="en-US" sz="1200" i="0" kern="1200">
+                                      <a:solidFill>
+                                        <a:schemeClr val="dk1"/>
+                                      </a:solidFill>
+                                      <a:latin typeface="+mn-lt"/>
+                                      <a:ea typeface="+mn-ea"/>
+                                      <a:cs typeface="+mn-cs"/>
+                                    </a:rPr>
+                                  </m:ctrlPr>
+                                </m:dPr>
+                                <m:e>
+                                  <m:r>
+                                    <a:rPr lang="en-US" sz="1200" i="0" kern="1200">
+                                      <a:solidFill>
+                                        <a:schemeClr val="dk1"/>
+                                      </a:solidFill>
+                                      <a:latin typeface="+mn-lt"/>
+                                      <a:ea typeface="+mn-ea"/>
+                                      <a:cs typeface="+mn-cs"/>
+                                    </a:rPr>
+                                    <m:t>2</m:t>
+                                  </m:r>
+                                  <m:r>
+                                    <a:rPr lang="en-US" sz="1200" i="1" kern="1200">
+                                      <a:solidFill>
+                                        <a:schemeClr val="dk1"/>
+                                      </a:solidFill>
+                                      <a:latin typeface="+mn-lt"/>
+                                      <a:ea typeface="+mn-ea"/>
+                                      <a:cs typeface="+mn-cs"/>
+                                    </a:rPr>
+                                    <m:t>𝑏</m:t>
+                                  </m:r>
+                                  <m:r>
+                                    <a:rPr lang="en-US" sz="1200" i="1" kern="1200">
+                                      <a:solidFill>
+                                        <a:schemeClr val="dk1"/>
+                                      </a:solidFill>
+                                      <a:latin typeface="+mn-lt"/>
+                                      <a:ea typeface="+mn-ea"/>
+                                      <a:cs typeface="+mn-cs"/>
+                                    </a:rPr>
+                                    <m:t>𝜏</m:t>
+                                  </m:r>
+                                </m:e>
+                              </m:d>
+                            </m:oMath>
+                          </a14:m>
+                          <a:endParaRPr lang="en-US" sz="1200" dirty="0"/>
+                        </a:p>
+                      </a:txBody>
+                      <a:tcPr/>
+                    </a:tc>
+                    <a:extLst>
+                      <a:ext uri="{0D108BD9-81ED-4DB2-BD59-A6C34878D82A}">
+                        <a16:rowId xmlns:a16="http://schemas.microsoft.com/office/drawing/2014/main" val="1284039892"/>
+                      </a:ext>
+                    </a:extLst>
+                  </a:tr>
+                  <a:tr h="254082">
+                    <a:tc>
+                      <a:txBody>
+                        <a:bodyPr/>
+                        <a:lstStyle/>
+                        <a:p>
+                          <a:pPr marL="0" marR="0" lvl="0" indent="0" algn="l" defTabSz="914400" rtl="0" eaLnBrk="1" fontAlgn="auto" latinLnBrk="0" hangingPunct="1">
+                            <a:lnSpc>
+                              <a:spcPct val="100000"/>
+                            </a:lnSpc>
+                            <a:spcBef>
+                              <a:spcPts val="0"/>
+                            </a:spcBef>
+                            <a:spcAft>
+                              <a:spcPts val="0"/>
+                            </a:spcAft>
+                            <a:buClrTx/>
+                            <a:buSzTx/>
+                            <a:buFontTx/>
+                            <a:buNone/>
+                            <a:tabLst/>
+                            <a:defRPr/>
+                          </a:pPr>
+                          <a14:m>
+                            <m:oMathPara xmlns:m="http://schemas.openxmlformats.org/officeDocument/2006/math">
+                              <m:oMath>
+                                <m:r>
+                                  <m:rPr>
+                                    <m:nor/>
+                                  </m:rPr>
+                                  <a:rPr lang="en-US" sz="1200" smtClean="0"/>
+                                  <m:t>DM </m:t>
+                                </m:r>
+                                <m:d>
+                                  <m:dPr>
+                                    <m:sepChr m:val=","/>
+                                    <m:ctrlPr>
+                                      <a:rPr lang="en-US" sz="1200" i="0" kern="1200">
+                                        <a:solidFill>
+                                          <a:schemeClr val="dk1"/>
+                                        </a:solidFill>
+                                        <a:latin typeface="+mn-lt"/>
+                                        <a:ea typeface="+mn-ea"/>
+                                        <a:cs typeface="+mn-cs"/>
+                                      </a:rPr>
+                                    </m:ctrlPr>
+                                  </m:dPr>
+                                  <m:e>
+                                    <m:r>
+                                      <a:rPr lang="en-US" sz="1200" i="0" kern="1200">
+                                        <a:solidFill>
+                                          <a:schemeClr val="dk1"/>
+                                        </a:solidFill>
+                                        <a:latin typeface="+mn-lt"/>
+                                        <a:ea typeface="+mn-ea"/>
+                                        <a:cs typeface="+mn-cs"/>
+                                      </a:rPr>
+                                      <m:t>1</m:t>
+                                    </m:r>
+                                  </m:e>
+                                  <m:e>
+                                    <m:r>
+                                      <a:rPr lang="en-US" sz="1200" i="0" kern="1200">
+                                        <a:solidFill>
+                                          <a:schemeClr val="dk1"/>
+                                        </a:solidFill>
+                                        <a:latin typeface="+mn-lt"/>
+                                        <a:ea typeface="+mn-ea"/>
+                                        <a:cs typeface="+mn-cs"/>
+                                      </a:rPr>
+                                      <m:t>2</m:t>
+                                    </m:r>
+                                  </m:e>
+                                </m:d>
+                              </m:oMath>
+                            </m:oMathPara>
+                          </a14:m>
+                          <a:endParaRPr lang="en-US" sz="1200" dirty="0"/>
+                        </a:p>
+                      </a:txBody>
+                      <a:tcPr/>
+                    </a:tc>
+                    <a:tc>
+                      <a:txBody>
+                        <a:bodyPr/>
+                        <a:lstStyle/>
+                        <a:p>
+                          <a14:m>
+                            <m:oMathPara xmlns:m="http://schemas.openxmlformats.org/officeDocument/2006/math">
+                              <m:oMath>
+                                <m:d>
+                                  <m:dPr>
+                                    <m:ctrlPr>
+                                      <a:rPr lang="en-US" sz="1200" i="1" dirty="0" smtClean="0">
+                                        <a:latin typeface="Cambria Math" panose="02040503050406030204" pitchFamily="18" charset="0"/>
+                                      </a:rPr>
+                                    </m:ctrlPr>
+                                  </m:dPr>
+                                  <m:e>
+                                    <m:r>
+                                      <a:rPr lang="en-US" sz="1200" i="1" dirty="0" smtClean="0">
+                                        <a:latin typeface="Cambria Math" panose="02040503050406030204" pitchFamily="18" charset="0"/>
+                                      </a:rPr>
+                                      <m:t>𝑞</m:t>
+                                    </m:r>
+                                    <m:r>
+                                      <a:rPr lang="en-US" sz="1200" i="0" dirty="0" smtClean="0">
+                                        <a:latin typeface="Cambria Math" panose="02040503050406030204" pitchFamily="18" charset="0"/>
+                                      </a:rPr>
+                                      <m:t>2​,</m:t>
+                                    </m:r>
+                                    <m:r>
+                                      <a:rPr lang="en-US" sz="1200" i="1" dirty="0" smtClean="0">
+                                        <a:latin typeface="Cambria Math" panose="02040503050406030204" pitchFamily="18" charset="0"/>
+                                      </a:rPr>
+                                      <m:t>𝑞</m:t>
+                                    </m:r>
+                                    <m:r>
+                                      <a:rPr lang="en-US" sz="1200" i="0" dirty="0" smtClean="0">
+                                        <a:latin typeface="Cambria Math" panose="02040503050406030204" pitchFamily="18" charset="0"/>
+                                      </a:rPr>
+                                      <m:t>1​</m:t>
+                                    </m:r>
+                                  </m:e>
+                                </m:d>
+                              </m:oMath>
+                            </m:oMathPara>
+                          </a14:m>
+                          <a:endParaRPr lang="en-US" sz="1200" dirty="0"/>
+                        </a:p>
+                      </a:txBody>
+                      <a:tcPr/>
+                    </a:tc>
+                    <a:tc>
+                      <a:txBody>
+                        <a:bodyPr/>
+                        <a:lstStyle/>
+                        <a:p>
+                          <a:pPr algn="ctr"/>
+                          <a14:m>
+                            <m:oMath xmlns:m="http://schemas.openxmlformats.org/officeDocument/2006/math">
+                              <m:sSup>
+                                <m:sSupPr>
+                                  <m:ctrlPr>
+                                    <a:rPr lang="en-US" sz="1200" i="1" kern="1200">
+                                      <a:solidFill>
+                                        <a:schemeClr val="dk1"/>
+                                      </a:solidFill>
+                                      <a:latin typeface="Cambria Math" panose="02040503050406030204" pitchFamily="18" charset="0"/>
+                                      <a:ea typeface="+mn-ea"/>
+                                      <a:cs typeface="+mn-cs"/>
+                                    </a:rPr>
+                                  </m:ctrlPr>
+                                </m:sSupPr>
+                                <m:e>
+                                  <m:r>
+                                    <a:rPr lang="en-US" sz="1200" i="1" kern="1200">
+                                      <a:solidFill>
+                                        <a:schemeClr val="dk1"/>
+                                      </a:solidFill>
+                                      <a:latin typeface="Cambria Math" panose="02040503050406030204" pitchFamily="18" charset="0"/>
+                                      <a:ea typeface="+mn-ea"/>
+                                      <a:cs typeface="+mn-cs"/>
+                                    </a:rPr>
+                                    <m:t>𝐻</m:t>
+                                  </m:r>
+                                </m:e>
+                                <m:sup>
+                                  <m:d>
+                                    <m:dPr>
+                                      <m:ctrlPr>
+                                        <a:rPr lang="en-US" sz="1200" i="0" kern="1200">
+                                          <a:solidFill>
+                                            <a:schemeClr val="dk1"/>
+                                          </a:solidFill>
+                                          <a:latin typeface="Cambria Math" panose="02040503050406030204" pitchFamily="18" charset="0"/>
+                                          <a:ea typeface="+mn-ea"/>
+                                          <a:cs typeface="+mn-cs"/>
+                                        </a:rPr>
+                                      </m:ctrlPr>
+                                    </m:dPr>
+                                    <m:e>
+                                      <m:r>
+                                        <a:rPr lang="en-US" sz="1200" i="0" kern="1200">
+                                          <a:solidFill>
+                                            <a:schemeClr val="dk1"/>
+                                          </a:solidFill>
+                                          <a:latin typeface="Cambria Math" panose="02040503050406030204" pitchFamily="18" charset="0"/>
+                                          <a:ea typeface="+mn-ea"/>
+                                          <a:cs typeface="+mn-cs"/>
+                                        </a:rPr>
+                                        <m:t>2</m:t>
+                                      </m:r>
+                                    </m:e>
+                                  </m:d>
+                                </m:sup>
+                              </m:sSup>
+                            </m:oMath>
+                          </a14:m>
+                          <a:r>
+                            <a:rPr lang="en-US" sz="1200" dirty="0"/>
+                            <a:t>, </a:t>
+                          </a:r>
+                          <a14:m>
+                            <m:oMath xmlns:m="http://schemas.openxmlformats.org/officeDocument/2006/math">
+                              <m:sSub>
+                                <m:sSubPr>
+                                  <m:ctrlPr>
+                                    <a:rPr lang="en-US" sz="1200" i="1" kern="1200">
+                                      <a:solidFill>
+                                        <a:schemeClr val="dk1"/>
+                                      </a:solidFill>
+                                      <a:latin typeface="+mn-lt"/>
+                                      <a:ea typeface="+mn-ea"/>
+                                      <a:cs typeface="+mn-cs"/>
+                                    </a:rPr>
+                                  </m:ctrlPr>
+                                </m:sSubPr>
+                                <m:e>
+                                  <m:r>
+                                    <a:rPr lang="en-US" sz="1200" i="1" kern="1200">
+                                      <a:solidFill>
+                                        <a:schemeClr val="dk1"/>
+                                      </a:solidFill>
+                                      <a:latin typeface="+mn-lt"/>
+                                      <a:ea typeface="+mn-ea"/>
+                                      <a:cs typeface="+mn-cs"/>
+                                    </a:rPr>
+                                    <m:t>𝑅</m:t>
+                                  </m:r>
+                                </m:e>
+                                <m:sub>
+                                  <m:r>
+                                    <a:rPr lang="en-US" sz="1200" i="1" kern="1200">
+                                      <a:solidFill>
+                                        <a:schemeClr val="dk1"/>
+                                      </a:solidFill>
+                                      <a:latin typeface="+mn-lt"/>
+                                      <a:ea typeface="+mn-ea"/>
+                                      <a:cs typeface="+mn-cs"/>
+                                    </a:rPr>
+                                    <m:t>𝑍𝑍</m:t>
+                                  </m:r>
+                                </m:sub>
+                              </m:sSub>
+                              <m:d>
+                                <m:dPr>
+                                  <m:ctrlPr>
+                                    <a:rPr lang="en-US" sz="1200" i="0" kern="1200">
+                                      <a:solidFill>
+                                        <a:schemeClr val="dk1"/>
+                                      </a:solidFill>
+                                      <a:latin typeface="+mn-lt"/>
+                                      <a:ea typeface="+mn-ea"/>
+                                      <a:cs typeface="+mn-cs"/>
+                                    </a:rPr>
+                                  </m:ctrlPr>
+                                </m:dPr>
+                                <m:e>
+                                  <m:r>
+                                    <a:rPr lang="en-US" sz="1200" i="0" kern="1200">
+                                      <a:solidFill>
+                                        <a:schemeClr val="dk1"/>
+                                      </a:solidFill>
+                                      <a:latin typeface="+mn-lt"/>
+                                      <a:ea typeface="+mn-ea"/>
+                                      <a:cs typeface="+mn-cs"/>
+                                    </a:rPr>
+                                    <m:t>2</m:t>
+                                  </m:r>
+                                  <m:r>
+                                    <a:rPr lang="en-US" sz="1200" i="1" kern="1200">
+                                      <a:solidFill>
+                                        <a:schemeClr val="dk1"/>
+                                      </a:solidFill>
+                                      <a:latin typeface="+mn-lt"/>
+                                      <a:ea typeface="+mn-ea"/>
+                                      <a:cs typeface="+mn-cs"/>
+                                    </a:rPr>
+                                    <m:t>𝐷</m:t>
+                                  </m:r>
+                                  <m:r>
+                                    <a:rPr lang="en-US" sz="1200" i="1" kern="1200">
+                                      <a:solidFill>
+                                        <a:schemeClr val="dk1"/>
+                                      </a:solidFill>
+                                      <a:latin typeface="+mn-lt"/>
+                                      <a:ea typeface="+mn-ea"/>
+                                      <a:cs typeface="+mn-cs"/>
+                                    </a:rPr>
+                                    <m:t>𝜏</m:t>
+                                  </m:r>
+                                </m:e>
+                              </m:d>
+                            </m:oMath>
+                          </a14:m>
+                          <a:r>
+                            <a:rPr lang="en-US" sz="1200" dirty="0"/>
+                            <a:t>, </a:t>
+                          </a:r>
+                          <a14:m>
+                            <m:oMath xmlns:m="http://schemas.openxmlformats.org/officeDocument/2006/math">
+                              <m:sSup>
+                                <m:sSupPr>
+                                  <m:ctrlPr>
+                                    <a:rPr lang="en-US" sz="1200" i="1" kern="1200">
+                                      <a:solidFill>
+                                        <a:schemeClr val="dk1"/>
+                                      </a:solidFill>
+                                      <a:latin typeface="+mn-lt"/>
+                                      <a:ea typeface="+mn-ea"/>
+                                      <a:cs typeface="+mn-cs"/>
+                                    </a:rPr>
+                                  </m:ctrlPr>
+                                </m:sSupPr>
+                                <m:e>
+                                  <m:r>
+                                    <a:rPr lang="en-US" sz="1200" i="1" kern="1200">
+                                      <a:solidFill>
+                                        <a:schemeClr val="dk1"/>
+                                      </a:solidFill>
+                                      <a:latin typeface="+mn-lt"/>
+                                      <a:ea typeface="+mn-ea"/>
+                                      <a:cs typeface="+mn-cs"/>
+                                    </a:rPr>
+                                    <m:t>𝐻</m:t>
+                                  </m:r>
+                                </m:e>
+                                <m:sup>
+                                  <m:d>
+                                    <m:dPr>
+                                      <m:ctrlPr>
+                                        <a:rPr lang="en-US" sz="1200" i="0" kern="1200">
+                                          <a:solidFill>
+                                            <a:schemeClr val="dk1"/>
+                                          </a:solidFill>
+                                          <a:latin typeface="+mn-lt"/>
+                                          <a:ea typeface="+mn-ea"/>
+                                          <a:cs typeface="+mn-cs"/>
+                                        </a:rPr>
+                                      </m:ctrlPr>
+                                    </m:dPr>
+                                    <m:e>
+                                      <m:r>
+                                        <a:rPr lang="en-US" sz="1200" i="0" kern="1200">
+                                          <a:solidFill>
+                                            <a:schemeClr val="dk1"/>
+                                          </a:solidFill>
+                                          <a:latin typeface="+mn-lt"/>
+                                          <a:ea typeface="+mn-ea"/>
+                                          <a:cs typeface="+mn-cs"/>
+                                        </a:rPr>
+                                        <m:t>2</m:t>
+                                      </m:r>
+                                    </m:e>
+                                  </m:d>
+                                </m:sup>
+                              </m:sSup>
+                            </m:oMath>
+                          </a14:m>
+                          <a:r>
+                            <a:rPr lang="en-US" sz="1200" dirty="0"/>
+                            <a:t>, </a:t>
+                          </a:r>
+                          <a14:m>
+                            <m:oMath xmlns:m="http://schemas.openxmlformats.org/officeDocument/2006/math">
+                              <m:sSup>
+                                <m:sSupPr>
+                                  <m:ctrlPr>
+                                    <a:rPr lang="en-US" sz="1200" i="1" kern="1200">
+                                      <a:solidFill>
+                                        <a:schemeClr val="dk1"/>
+                                      </a:solidFill>
+                                      <a:latin typeface="+mn-lt"/>
+                                      <a:ea typeface="+mn-ea"/>
+                                      <a:cs typeface="+mn-cs"/>
+                                    </a:rPr>
+                                  </m:ctrlPr>
+                                </m:sSupPr>
+                                <m:e>
+                                  <m:r>
+                                    <a:rPr lang="en-US" sz="1200" i="1" kern="1200">
+                                      <a:solidFill>
+                                        <a:schemeClr val="dk1"/>
+                                      </a:solidFill>
+                                      <a:latin typeface="+mn-lt"/>
+                                      <a:ea typeface="+mn-ea"/>
+                                      <a:cs typeface="+mn-cs"/>
+                                    </a:rPr>
+                                    <m:t>𝐻</m:t>
+                                  </m:r>
+                                </m:e>
+                                <m:sup>
+                                  <m:d>
+                                    <m:dPr>
+                                      <m:ctrlPr>
+                                        <a:rPr lang="en-US" sz="1200" i="0" kern="1200">
+                                          <a:solidFill>
+                                            <a:schemeClr val="dk1"/>
+                                          </a:solidFill>
+                                          <a:latin typeface="+mn-lt"/>
+                                          <a:ea typeface="+mn-ea"/>
+                                          <a:cs typeface="+mn-cs"/>
+                                        </a:rPr>
+                                      </m:ctrlPr>
+                                    </m:dPr>
+                                    <m:e>
+                                      <m:r>
+                                        <a:rPr lang="en-US" sz="1200" i="0" kern="1200">
+                                          <a:solidFill>
+                                            <a:schemeClr val="dk1"/>
+                                          </a:solidFill>
+                                          <a:latin typeface="+mn-lt"/>
+                                          <a:ea typeface="+mn-ea"/>
+                                          <a:cs typeface="+mn-cs"/>
+                                        </a:rPr>
+                                        <m:t>1</m:t>
+                                      </m:r>
+                                    </m:e>
+                                  </m:d>
+                                </m:sup>
+                              </m:sSup>
+                            </m:oMath>
+                          </a14:m>
+                          <a:r>
+                            <a:rPr lang="en-US" sz="1200" dirty="0"/>
+                            <a:t>, </a:t>
+                          </a:r>
+                          <a14:m>
+                            <m:oMath xmlns:m="http://schemas.openxmlformats.org/officeDocument/2006/math">
+                              <m:sSub>
+                                <m:sSubPr>
+                                  <m:ctrlPr>
+                                    <a:rPr lang="en-US" sz="1200" i="1" kern="1200">
+                                      <a:solidFill>
+                                        <a:schemeClr val="dk1"/>
+                                      </a:solidFill>
+                                      <a:latin typeface="+mn-lt"/>
+                                      <a:ea typeface="+mn-ea"/>
+                                      <a:cs typeface="+mn-cs"/>
+                                    </a:rPr>
+                                  </m:ctrlPr>
+                                </m:sSubPr>
+                                <m:e>
+                                  <m:r>
+                                    <a:rPr lang="en-US" sz="1200" i="1" kern="1200">
+                                      <a:solidFill>
+                                        <a:schemeClr val="dk1"/>
+                                      </a:solidFill>
+                                      <a:latin typeface="+mn-lt"/>
+                                      <a:ea typeface="+mn-ea"/>
+                                      <a:cs typeface="+mn-cs"/>
+                                    </a:rPr>
+                                    <m:t>𝑅</m:t>
+                                  </m:r>
+                                </m:e>
+                                <m:sub>
+                                  <m:r>
+                                    <a:rPr lang="en-US" sz="1200" i="1" kern="1200">
+                                      <a:solidFill>
+                                        <a:schemeClr val="dk1"/>
+                                      </a:solidFill>
+                                      <a:latin typeface="+mn-lt"/>
+                                      <a:ea typeface="+mn-ea"/>
+                                      <a:cs typeface="+mn-cs"/>
+                                    </a:rPr>
+                                    <m:t>𝑍𝑍</m:t>
+                                  </m:r>
+                                </m:sub>
+                              </m:sSub>
+                              <m:d>
+                                <m:dPr>
+                                  <m:ctrlPr>
+                                    <a:rPr lang="en-US" sz="1200" i="0" kern="1200">
+                                      <a:solidFill>
+                                        <a:schemeClr val="dk1"/>
+                                      </a:solidFill>
+                                      <a:latin typeface="+mn-lt"/>
+                                      <a:ea typeface="+mn-ea"/>
+                                      <a:cs typeface="+mn-cs"/>
+                                    </a:rPr>
+                                  </m:ctrlPr>
+                                </m:dPr>
+                                <m:e>
+                                  <m:r>
+                                    <a:rPr lang="en-US" sz="1200" i="0" kern="1200">
+                                      <a:solidFill>
+                                        <a:schemeClr val="dk1"/>
+                                      </a:solidFill>
+                                      <a:latin typeface="+mn-lt"/>
+                                      <a:ea typeface="+mn-ea"/>
+                                      <a:cs typeface="+mn-cs"/>
+                                    </a:rPr>
+                                    <m:t>−2</m:t>
+                                  </m:r>
+                                  <m:r>
+                                    <a:rPr lang="en-US" sz="1200" i="1" kern="1200">
+                                      <a:solidFill>
+                                        <a:schemeClr val="dk1"/>
+                                      </a:solidFill>
+                                      <a:latin typeface="+mn-lt"/>
+                                      <a:ea typeface="+mn-ea"/>
+                                      <a:cs typeface="+mn-cs"/>
+                                    </a:rPr>
+                                    <m:t>𝐷</m:t>
+                                  </m:r>
+                                  <m:r>
+                                    <a:rPr lang="en-US" sz="1200" i="1" kern="1200">
+                                      <a:solidFill>
+                                        <a:schemeClr val="dk1"/>
+                                      </a:solidFill>
+                                      <a:latin typeface="+mn-lt"/>
+                                      <a:ea typeface="+mn-ea"/>
+                                      <a:cs typeface="+mn-cs"/>
+                                    </a:rPr>
+                                    <m:t>𝜏</m:t>
+                                  </m:r>
+                                </m:e>
+                              </m:d>
+                            </m:oMath>
+                          </a14:m>
+                          <a:r>
+                            <a:rPr lang="en-US" sz="1200" dirty="0"/>
+                            <a:t>, </a:t>
+                          </a:r>
+                          <a14:m>
+                            <m:oMath xmlns:m="http://schemas.openxmlformats.org/officeDocument/2006/math">
+                              <m:sSup>
+                                <m:sSupPr>
+                                  <m:ctrlPr>
+                                    <a:rPr lang="en-US" sz="1200" i="1" kern="1200">
+                                      <a:solidFill>
+                                        <a:schemeClr val="dk1"/>
+                                      </a:solidFill>
+                                      <a:latin typeface="+mn-lt"/>
+                                      <a:ea typeface="+mn-ea"/>
+                                      <a:cs typeface="+mn-cs"/>
+                                    </a:rPr>
+                                  </m:ctrlPr>
+                                </m:sSupPr>
+                                <m:e>
+                                  <m:r>
+                                    <a:rPr lang="en-US" sz="1200" i="1" kern="1200">
+                                      <a:solidFill>
+                                        <a:schemeClr val="dk1"/>
+                                      </a:solidFill>
+                                      <a:latin typeface="+mn-lt"/>
+                                      <a:ea typeface="+mn-ea"/>
+                                      <a:cs typeface="+mn-cs"/>
+                                    </a:rPr>
+                                    <m:t>𝐻</m:t>
+                                  </m:r>
+                                </m:e>
+                                <m:sup>
+                                  <m:d>
+                                    <m:dPr>
+                                      <m:ctrlPr>
+                                        <a:rPr lang="en-US" sz="1200" i="0" kern="1200">
+                                          <a:solidFill>
+                                            <a:schemeClr val="dk1"/>
+                                          </a:solidFill>
+                                          <a:latin typeface="+mn-lt"/>
+                                          <a:ea typeface="+mn-ea"/>
+                                          <a:cs typeface="+mn-cs"/>
+                                        </a:rPr>
+                                      </m:ctrlPr>
+                                    </m:dPr>
+                                    <m:e>
+                                      <m:r>
+                                        <a:rPr lang="en-US" sz="1200" i="0" kern="1200">
+                                          <a:solidFill>
+                                            <a:schemeClr val="dk1"/>
+                                          </a:solidFill>
+                                          <a:latin typeface="+mn-lt"/>
+                                          <a:ea typeface="+mn-ea"/>
+                                          <a:cs typeface="+mn-cs"/>
+                                        </a:rPr>
+                                        <m:t>1</m:t>
+                                      </m:r>
+                                    </m:e>
+                                  </m:d>
+                                </m:sup>
+                              </m:sSup>
+                            </m:oMath>
+                          </a14:m>
+                          <a:endParaRPr lang="en-US" sz="1200" dirty="0"/>
+                        </a:p>
+                      </a:txBody>
+                      <a:tcPr/>
+                    </a:tc>
+                    <a:extLst>
+                      <a:ext uri="{0D108BD9-81ED-4DB2-BD59-A6C34878D82A}">
+                        <a16:rowId xmlns:a16="http://schemas.microsoft.com/office/drawing/2014/main" val="1624636173"/>
+                      </a:ext>
+                    </a:extLst>
+                  </a:tr>
+                  <a:tr h="282838">
+                    <a:tc>
+                      <a:txBody>
+                        <a:bodyPr/>
+                        <a:lstStyle/>
+                        <a:p>
+                          <a:pPr marL="0" marR="0" lvl="0" indent="0" algn="l" defTabSz="914400" rtl="0" eaLnBrk="1" fontAlgn="auto" latinLnBrk="0" hangingPunct="1">
+                            <a:lnSpc>
+                              <a:spcPct val="100000"/>
+                            </a:lnSpc>
+                            <a:spcBef>
+                              <a:spcPts val="0"/>
+                            </a:spcBef>
+                            <a:spcAft>
+                              <a:spcPts val="0"/>
+                            </a:spcAft>
+                            <a:buClrTx/>
+                            <a:buSzTx/>
+                            <a:buFontTx/>
+                            <a:buNone/>
+                            <a:tabLst/>
+                            <a:defRPr/>
+                          </a:pPr>
+                          <a14:m>
+                            <m:oMathPara xmlns:m="http://schemas.openxmlformats.org/officeDocument/2006/math">
+                              <m:oMath>
+                                <m:r>
+                                  <m:rPr>
+                                    <m:nor/>
+                                  </m:rPr>
+                                  <a:rPr lang="en-US" sz="1200" i="0" smtClean="0"/>
+                                  <m:t>DM </m:t>
+                                </m:r>
+                                <m:d>
+                                  <m:dPr>
+                                    <m:sepChr m:val=","/>
+                                    <m:ctrlPr>
+                                      <a:rPr lang="en-US" sz="1200" b="0" i="0" kern="1200" smtClean="0">
+                                        <a:solidFill>
+                                          <a:schemeClr val="dk1"/>
+                                        </a:solidFill>
+                                        <a:latin typeface="Cambria Math" panose="02040503050406030204" pitchFamily="18" charset="0"/>
+                                        <a:ea typeface="+mn-ea"/>
+                                        <a:cs typeface="+mn-cs"/>
+                                      </a:rPr>
+                                    </m:ctrlPr>
+                                  </m:dPr>
+                                  <m:e>
+                                    <m:r>
+                                      <a:rPr lang="en-US" sz="1200" b="0" i="0" kern="1200" smtClean="0">
+                                        <a:solidFill>
+                                          <a:schemeClr val="dk1"/>
+                                        </a:solidFill>
+                                        <a:latin typeface="Cambria Math" panose="02040503050406030204" pitchFamily="18" charset="0"/>
+                                        <a:ea typeface="+mn-ea"/>
+                                        <a:cs typeface="+mn-cs"/>
+                                      </a:rPr>
+                                      <m:t>2</m:t>
+                                    </m:r>
+                                  </m:e>
+                                  <m:e>
+                                    <m:r>
+                                      <a:rPr lang="en-US" sz="1200" b="0" i="0" kern="1200" smtClean="0">
+                                        <a:solidFill>
+                                          <a:schemeClr val="dk1"/>
+                                        </a:solidFill>
+                                        <a:latin typeface="Cambria Math" panose="02040503050406030204" pitchFamily="18" charset="0"/>
+                                        <a:ea typeface="+mn-ea"/>
+                                        <a:cs typeface="+mn-cs"/>
+                                      </a:rPr>
+                                      <m:t>3</m:t>
+                                    </m:r>
+                                  </m:e>
+                                </m:d>
+                              </m:oMath>
+                            </m:oMathPara>
+                          </a14:m>
+                          <a:endParaRPr lang="en-US" sz="1200" dirty="0"/>
+                        </a:p>
+                      </a:txBody>
+                      <a:tcPr/>
+                    </a:tc>
+                    <a:tc>
+                      <a:txBody>
+                        <a:bodyPr/>
+                        <a:lstStyle/>
+                        <a:p>
+                          <a14:m>
+                            <m:oMathPara xmlns:m="http://schemas.openxmlformats.org/officeDocument/2006/math">
+                              <m:oMath>
+                                <m:d>
+                                  <m:dPr>
+                                    <m:ctrlPr>
+                                      <a:rPr lang="en-US" sz="1200" i="1" dirty="0" smtClean="0">
+                                        <a:latin typeface="Cambria Math" panose="02040503050406030204" pitchFamily="18" charset="0"/>
+                                      </a:rPr>
+                                    </m:ctrlPr>
+                                  </m:dPr>
+                                  <m:e>
+                                    <m:r>
+                                      <a:rPr lang="en-US" sz="1200" i="1" dirty="0" smtClean="0">
+                                        <a:latin typeface="Cambria Math" panose="02040503050406030204" pitchFamily="18" charset="0"/>
+                                      </a:rPr>
+                                      <m:t>𝑞</m:t>
+                                    </m:r>
+                                    <m:r>
+                                      <a:rPr lang="en-US" sz="1200" b="0" i="0" dirty="0" smtClean="0">
+                                        <a:latin typeface="Cambria Math" panose="02040503050406030204" pitchFamily="18" charset="0"/>
+                                      </a:rPr>
+                                      <m:t>1</m:t>
+                                    </m:r>
+                                    <m:r>
+                                      <a:rPr lang="en-US" sz="1200" i="0" dirty="0" smtClean="0">
+                                        <a:latin typeface="Cambria Math" panose="02040503050406030204" pitchFamily="18" charset="0"/>
+                                      </a:rPr>
+                                      <m:t>​,</m:t>
+                                    </m:r>
+                                    <m:r>
+                                      <a:rPr lang="en-US" sz="1200" i="1" dirty="0" smtClean="0">
+                                        <a:latin typeface="Cambria Math" panose="02040503050406030204" pitchFamily="18" charset="0"/>
+                                      </a:rPr>
+                                      <m:t>𝑞</m:t>
+                                    </m:r>
+                                    <m:r>
+                                      <a:rPr lang="en-US" sz="1200" b="0" i="0" dirty="0" smtClean="0">
+                                        <a:latin typeface="Cambria Math" panose="02040503050406030204" pitchFamily="18" charset="0"/>
+                                      </a:rPr>
+                                      <m:t>0</m:t>
+                                    </m:r>
+                                    <m:r>
+                                      <a:rPr lang="en-US" sz="1200" i="0" dirty="0" smtClean="0">
+                                        <a:latin typeface="Cambria Math" panose="02040503050406030204" pitchFamily="18" charset="0"/>
+                                      </a:rPr>
+                                      <m:t>​</m:t>
+                                    </m:r>
+                                  </m:e>
+                                </m:d>
+                              </m:oMath>
+                            </m:oMathPara>
+                          </a14:m>
+                          <a:endParaRPr lang="en-US" sz="1200" dirty="0"/>
+                        </a:p>
+                      </a:txBody>
+                      <a:tcPr/>
+                    </a:tc>
+                    <a:tc>
+                      <a:txBody>
+                        <a:bodyPr/>
+                        <a:lstStyle/>
+                        <a:p>
+                          <a:pPr algn="ctr"/>
+                          <a14:m>
+                            <m:oMath xmlns:m="http://schemas.openxmlformats.org/officeDocument/2006/math">
+                              <m:sSup>
+                                <m:sSupPr>
+                                  <m:ctrlPr>
+                                    <a:rPr lang="en-US" sz="1400" i="1" kern="1200">
+                                      <a:solidFill>
+                                        <a:schemeClr val="dk1"/>
+                                      </a:solidFill>
+                                      <a:latin typeface="Cambria Math" panose="02040503050406030204" pitchFamily="18" charset="0"/>
+                                      <a:ea typeface="+mn-ea"/>
+                                      <a:cs typeface="+mn-cs"/>
+                                    </a:rPr>
+                                  </m:ctrlPr>
+                                </m:sSupPr>
+                                <m:e>
+                                  <m:r>
+                                    <a:rPr lang="en-US" sz="1400" i="1" kern="1200">
+                                      <a:solidFill>
+                                        <a:schemeClr val="dk1"/>
+                                      </a:solidFill>
+                                      <a:latin typeface="Cambria Math" panose="02040503050406030204" pitchFamily="18" charset="0"/>
+                                      <a:ea typeface="+mn-ea"/>
+                                      <a:cs typeface="+mn-cs"/>
+                                    </a:rPr>
+                                    <m:t>𝐻</m:t>
+                                  </m:r>
+                                </m:e>
+                                <m:sup>
+                                  <m:d>
+                                    <m:dPr>
+                                      <m:ctrlPr>
+                                        <a:rPr lang="en-US" sz="1400" i="0" kern="1200">
+                                          <a:solidFill>
+                                            <a:schemeClr val="dk1"/>
+                                          </a:solidFill>
+                                          <a:latin typeface="Cambria Math" panose="02040503050406030204" pitchFamily="18" charset="0"/>
+                                          <a:ea typeface="+mn-ea"/>
+                                          <a:cs typeface="+mn-cs"/>
+                                        </a:rPr>
+                                      </m:ctrlPr>
+                                    </m:dPr>
+                                    <m:e>
+                                      <m:r>
+                                        <a:rPr lang="en-US" sz="1400" i="0" kern="1200">
+                                          <a:solidFill>
+                                            <a:schemeClr val="dk1"/>
+                                          </a:solidFill>
+                                          <a:latin typeface="Cambria Math" panose="02040503050406030204" pitchFamily="18" charset="0"/>
+                                          <a:ea typeface="+mn-ea"/>
+                                          <a:cs typeface="+mn-cs"/>
+                                        </a:rPr>
+                                        <m:t>1</m:t>
+                                      </m:r>
+                                    </m:e>
+                                  </m:d>
+                                </m:sup>
+                              </m:sSup>
+                            </m:oMath>
+                          </a14:m>
+                          <a:r>
+                            <a:rPr lang="en-US" sz="1400" dirty="0"/>
+                            <a:t>, </a:t>
+                          </a:r>
+                          <a14:m>
+                            <m:oMath xmlns:m="http://schemas.openxmlformats.org/officeDocument/2006/math">
+                              <m:sSub>
+                                <m:sSubPr>
+                                  <m:ctrlPr>
+                                    <a:rPr lang="en-US" sz="1400" i="1" kern="1200">
+                                      <a:solidFill>
+                                        <a:schemeClr val="dk1"/>
+                                      </a:solidFill>
+                                      <a:latin typeface="+mn-lt"/>
+                                      <a:ea typeface="+mn-ea"/>
+                                      <a:cs typeface="+mn-cs"/>
+                                    </a:rPr>
+                                  </m:ctrlPr>
+                                </m:sSubPr>
+                                <m:e>
+                                  <m:r>
+                                    <a:rPr lang="en-US" sz="1400" i="1" kern="1200">
+                                      <a:solidFill>
+                                        <a:schemeClr val="dk1"/>
+                                      </a:solidFill>
+                                      <a:latin typeface="+mn-lt"/>
+                                      <a:ea typeface="+mn-ea"/>
+                                      <a:cs typeface="+mn-cs"/>
+                                    </a:rPr>
+                                    <m:t>𝑅</m:t>
+                                  </m:r>
+                                </m:e>
+                                <m:sub>
+                                  <m:r>
+                                    <a:rPr lang="en-US" sz="1400" i="1" kern="1200">
+                                      <a:solidFill>
+                                        <a:schemeClr val="dk1"/>
+                                      </a:solidFill>
+                                      <a:latin typeface="+mn-lt"/>
+                                      <a:ea typeface="+mn-ea"/>
+                                      <a:cs typeface="+mn-cs"/>
+                                    </a:rPr>
+                                    <m:t>𝑍𝑍</m:t>
+                                  </m:r>
+                                </m:sub>
+                              </m:sSub>
+                              <m:d>
+                                <m:dPr>
+                                  <m:ctrlPr>
+                                    <a:rPr lang="en-US" sz="1400" i="0" kern="1200">
+                                      <a:solidFill>
+                                        <a:schemeClr val="dk1"/>
+                                      </a:solidFill>
+                                      <a:latin typeface="+mn-lt"/>
+                                      <a:ea typeface="+mn-ea"/>
+                                      <a:cs typeface="+mn-cs"/>
+                                    </a:rPr>
+                                  </m:ctrlPr>
+                                </m:dPr>
+                                <m:e>
+                                  <m:r>
+                                    <a:rPr lang="en-US" sz="1400" i="0" kern="1200">
+                                      <a:solidFill>
+                                        <a:schemeClr val="dk1"/>
+                                      </a:solidFill>
+                                      <a:latin typeface="+mn-lt"/>
+                                      <a:ea typeface="+mn-ea"/>
+                                      <a:cs typeface="+mn-cs"/>
+                                    </a:rPr>
+                                    <m:t>0.8</m:t>
+                                  </m:r>
+                                  <m:r>
+                                    <a:rPr lang="en-US" sz="1400" i="1" kern="1200">
+                                      <a:solidFill>
+                                        <a:schemeClr val="dk1"/>
+                                      </a:solidFill>
+                                      <a:latin typeface="+mn-lt"/>
+                                      <a:ea typeface="+mn-ea"/>
+                                      <a:cs typeface="+mn-cs"/>
+                                    </a:rPr>
+                                    <m:t>𝐷</m:t>
+                                  </m:r>
+                                  <m:r>
+                                    <a:rPr lang="en-US" sz="1400" i="1" kern="1200">
+                                      <a:solidFill>
+                                        <a:schemeClr val="dk1"/>
+                                      </a:solidFill>
+                                      <a:latin typeface="+mn-lt"/>
+                                      <a:ea typeface="+mn-ea"/>
+                                      <a:cs typeface="+mn-cs"/>
+                                    </a:rPr>
+                                    <m:t>𝜏</m:t>
+                                  </m:r>
+                                </m:e>
+                              </m:d>
+                            </m:oMath>
+                          </a14:m>
+                          <a:r>
+                            <a:rPr lang="en-US" sz="1400" dirty="0"/>
+                            <a:t>, </a:t>
+                          </a:r>
+                          <a14:m>
+                            <m:oMath xmlns:m="http://schemas.openxmlformats.org/officeDocument/2006/math">
+                              <m:sSup>
+                                <m:sSupPr>
+                                  <m:ctrlPr>
+                                    <a:rPr lang="en-US" sz="1400" i="1" kern="1200">
+                                      <a:solidFill>
+                                        <a:schemeClr val="dk1"/>
+                                      </a:solidFill>
+                                      <a:latin typeface="+mn-lt"/>
+                                      <a:ea typeface="+mn-ea"/>
+                                      <a:cs typeface="+mn-cs"/>
+                                    </a:rPr>
+                                  </m:ctrlPr>
+                                </m:sSupPr>
+                                <m:e>
+                                  <m:r>
+                                    <a:rPr lang="en-US" sz="1400" i="1" kern="1200">
+                                      <a:solidFill>
+                                        <a:schemeClr val="dk1"/>
+                                      </a:solidFill>
+                                      <a:latin typeface="+mn-lt"/>
+                                      <a:ea typeface="+mn-ea"/>
+                                      <a:cs typeface="+mn-cs"/>
+                                    </a:rPr>
+                                    <m:t>𝐻</m:t>
+                                  </m:r>
+                                </m:e>
+                                <m:sup>
+                                  <m:d>
+                                    <m:dPr>
+                                      <m:ctrlPr>
+                                        <a:rPr lang="en-US" sz="1400" i="0" kern="1200">
+                                          <a:solidFill>
+                                            <a:schemeClr val="dk1"/>
+                                          </a:solidFill>
+                                          <a:latin typeface="+mn-lt"/>
+                                          <a:ea typeface="+mn-ea"/>
+                                          <a:cs typeface="+mn-cs"/>
+                                        </a:rPr>
+                                      </m:ctrlPr>
+                                    </m:dPr>
+                                    <m:e>
+                                      <m:r>
+                                        <a:rPr lang="en-US" sz="1400" i="0" kern="1200">
+                                          <a:solidFill>
+                                            <a:schemeClr val="dk1"/>
+                                          </a:solidFill>
+                                          <a:latin typeface="+mn-lt"/>
+                                          <a:ea typeface="+mn-ea"/>
+                                          <a:cs typeface="+mn-cs"/>
+                                        </a:rPr>
+                                        <m:t>1</m:t>
+                                      </m:r>
+                                    </m:e>
+                                  </m:d>
+                                </m:sup>
+                              </m:sSup>
+                            </m:oMath>
+                          </a14:m>
+                          <a:r>
+                            <a:rPr lang="en-US" sz="1400" dirty="0"/>
+                            <a:t>, </a:t>
+                          </a:r>
+                          <a14:m>
+                            <m:oMath xmlns:m="http://schemas.openxmlformats.org/officeDocument/2006/math">
+                              <m:sSup>
+                                <m:sSupPr>
+                                  <m:ctrlPr>
+                                    <a:rPr lang="en-US" sz="1400" i="1" kern="1200">
+                                      <a:solidFill>
+                                        <a:schemeClr val="dk1"/>
+                                      </a:solidFill>
+                                      <a:latin typeface="+mn-lt"/>
+                                      <a:ea typeface="+mn-ea"/>
+                                      <a:cs typeface="+mn-cs"/>
+                                    </a:rPr>
+                                  </m:ctrlPr>
+                                </m:sSupPr>
+                                <m:e>
+                                  <m:r>
+                                    <a:rPr lang="en-US" sz="1400" i="1" kern="1200">
+                                      <a:solidFill>
+                                        <a:schemeClr val="dk1"/>
+                                      </a:solidFill>
+                                      <a:latin typeface="+mn-lt"/>
+                                      <a:ea typeface="+mn-ea"/>
+                                      <a:cs typeface="+mn-cs"/>
+                                    </a:rPr>
+                                    <m:t>𝐻</m:t>
+                                  </m:r>
+                                </m:e>
+                                <m:sup>
+                                  <m:d>
+                                    <m:dPr>
+                                      <m:ctrlPr>
+                                        <a:rPr lang="en-US" sz="1400" i="0" kern="1200">
+                                          <a:solidFill>
+                                            <a:schemeClr val="dk1"/>
+                                          </a:solidFill>
+                                          <a:latin typeface="+mn-lt"/>
+                                          <a:ea typeface="+mn-ea"/>
+                                          <a:cs typeface="+mn-cs"/>
+                                        </a:rPr>
+                                      </m:ctrlPr>
+                                    </m:dPr>
+                                    <m:e>
+                                      <m:r>
+                                        <a:rPr lang="en-US" sz="1400" i="0" kern="1200">
+                                          <a:solidFill>
+                                            <a:schemeClr val="dk1"/>
+                                          </a:solidFill>
+                                          <a:latin typeface="+mn-lt"/>
+                                          <a:ea typeface="+mn-ea"/>
+                                          <a:cs typeface="+mn-cs"/>
+                                        </a:rPr>
+                                        <m:t>0</m:t>
+                                      </m:r>
+                                    </m:e>
+                                  </m:d>
+                                </m:sup>
+                              </m:sSup>
+                            </m:oMath>
+                          </a14:m>
+                          <a:r>
+                            <a:rPr lang="en-US" sz="1400" dirty="0"/>
+                            <a:t>, </a:t>
+                          </a:r>
+                          <a14:m>
+                            <m:oMath xmlns:m="http://schemas.openxmlformats.org/officeDocument/2006/math">
+                              <m:sSub>
+                                <m:sSubPr>
+                                  <m:ctrlPr>
+                                    <a:rPr lang="en-US" sz="1400" i="1" kern="1200">
+                                      <a:solidFill>
+                                        <a:schemeClr val="dk1"/>
+                                      </a:solidFill>
+                                      <a:latin typeface="+mn-lt"/>
+                                      <a:ea typeface="+mn-ea"/>
+                                      <a:cs typeface="+mn-cs"/>
+                                    </a:rPr>
+                                  </m:ctrlPr>
+                                </m:sSubPr>
+                                <m:e>
+                                  <m:r>
+                                    <a:rPr lang="en-US" sz="1400" i="1" kern="1200">
+                                      <a:solidFill>
+                                        <a:schemeClr val="dk1"/>
+                                      </a:solidFill>
+                                      <a:latin typeface="+mn-lt"/>
+                                      <a:ea typeface="+mn-ea"/>
+                                      <a:cs typeface="+mn-cs"/>
+                                    </a:rPr>
+                                    <m:t>𝑅</m:t>
+                                  </m:r>
+                                </m:e>
+                                <m:sub>
+                                  <m:r>
+                                    <a:rPr lang="en-US" sz="1400" i="1" kern="1200">
+                                      <a:solidFill>
+                                        <a:schemeClr val="dk1"/>
+                                      </a:solidFill>
+                                      <a:latin typeface="+mn-lt"/>
+                                      <a:ea typeface="+mn-ea"/>
+                                      <a:cs typeface="+mn-cs"/>
+                                    </a:rPr>
+                                    <m:t>𝑍𝑍</m:t>
+                                  </m:r>
+                                </m:sub>
+                              </m:sSub>
+                              <m:d>
+                                <m:dPr>
+                                  <m:ctrlPr>
+                                    <a:rPr lang="en-US" sz="1400" i="0" kern="1200">
+                                      <a:solidFill>
+                                        <a:schemeClr val="dk1"/>
+                                      </a:solidFill>
+                                      <a:latin typeface="+mn-lt"/>
+                                      <a:ea typeface="+mn-ea"/>
+                                      <a:cs typeface="+mn-cs"/>
+                                    </a:rPr>
+                                  </m:ctrlPr>
+                                </m:dPr>
+                                <m:e>
+                                  <m:r>
+                                    <a:rPr lang="en-US" sz="1400" i="0" kern="1200">
+                                      <a:solidFill>
+                                        <a:schemeClr val="dk1"/>
+                                      </a:solidFill>
+                                      <a:latin typeface="+mn-lt"/>
+                                      <a:ea typeface="+mn-ea"/>
+                                      <a:cs typeface="+mn-cs"/>
+                                    </a:rPr>
+                                    <m:t>−0.8</m:t>
+                                  </m:r>
+                                  <m:r>
+                                    <a:rPr lang="en-US" sz="1400" i="1" kern="1200">
+                                      <a:solidFill>
+                                        <a:schemeClr val="dk1"/>
+                                      </a:solidFill>
+                                      <a:latin typeface="+mn-lt"/>
+                                      <a:ea typeface="+mn-ea"/>
+                                      <a:cs typeface="+mn-cs"/>
+                                    </a:rPr>
+                                    <m:t>𝐷</m:t>
+                                  </m:r>
+                                  <m:r>
+                                    <a:rPr lang="en-US" sz="1400" i="1" kern="1200">
+                                      <a:solidFill>
+                                        <a:schemeClr val="dk1"/>
+                                      </a:solidFill>
+                                      <a:latin typeface="+mn-lt"/>
+                                      <a:ea typeface="+mn-ea"/>
+                                      <a:cs typeface="+mn-cs"/>
+                                    </a:rPr>
+                                    <m:t>𝜏</m:t>
+                                  </m:r>
+                                </m:e>
+                              </m:d>
+                            </m:oMath>
+                          </a14:m>
+                          <a:r>
+                            <a:rPr lang="en-US" sz="1400" dirty="0"/>
+                            <a:t>, </a:t>
+                          </a:r>
+                          <a14:m>
+                            <m:oMath xmlns:m="http://schemas.openxmlformats.org/officeDocument/2006/math">
+                              <m:sSup>
+                                <m:sSupPr>
+                                  <m:ctrlPr>
+                                    <a:rPr lang="en-US" sz="1400" i="1" kern="1200">
+                                      <a:solidFill>
+                                        <a:schemeClr val="dk1"/>
+                                      </a:solidFill>
+                                      <a:latin typeface="+mn-lt"/>
+                                      <a:ea typeface="+mn-ea"/>
+                                      <a:cs typeface="+mn-cs"/>
+                                    </a:rPr>
+                                  </m:ctrlPr>
+                                </m:sSupPr>
+                                <m:e>
+                                  <m:r>
+                                    <a:rPr lang="en-US" sz="1400" i="1" kern="1200">
+                                      <a:solidFill>
+                                        <a:schemeClr val="dk1"/>
+                                      </a:solidFill>
+                                      <a:latin typeface="+mn-lt"/>
+                                      <a:ea typeface="+mn-ea"/>
+                                      <a:cs typeface="+mn-cs"/>
+                                    </a:rPr>
+                                    <m:t>𝐻</m:t>
+                                  </m:r>
+                                </m:e>
+                                <m:sup>
+                                  <m:d>
+                                    <m:dPr>
+                                      <m:ctrlPr>
+                                        <a:rPr lang="en-US" sz="1400" i="0" kern="1200">
+                                          <a:solidFill>
+                                            <a:schemeClr val="dk1"/>
+                                          </a:solidFill>
+                                          <a:latin typeface="+mn-lt"/>
+                                          <a:ea typeface="+mn-ea"/>
+                                          <a:cs typeface="+mn-cs"/>
+                                        </a:rPr>
+                                      </m:ctrlPr>
+                                    </m:dPr>
+                                    <m:e>
+                                      <m:r>
+                                        <a:rPr lang="en-US" sz="1400" i="0" kern="1200">
+                                          <a:solidFill>
+                                            <a:schemeClr val="dk1"/>
+                                          </a:solidFill>
+                                          <a:latin typeface="+mn-lt"/>
+                                          <a:ea typeface="+mn-ea"/>
+                                          <a:cs typeface="+mn-cs"/>
+                                        </a:rPr>
+                                        <m:t>0</m:t>
+                                      </m:r>
+                                    </m:e>
+                                  </m:d>
+                                </m:sup>
+                              </m:sSup>
+                            </m:oMath>
+                          </a14:m>
+                          <a:endParaRPr lang="en-US" sz="1400" dirty="0"/>
+                        </a:p>
+                      </a:txBody>
+                      <a:tcPr/>
+                    </a:tc>
+                    <a:extLst>
+                      <a:ext uri="{0D108BD9-81ED-4DB2-BD59-A6C34878D82A}">
+                        <a16:rowId xmlns:a16="http://schemas.microsoft.com/office/drawing/2014/main" val="2160563795"/>
+                      </a:ext>
+                    </a:extLst>
+                  </a:tr>
+                  <a:tr h="270120">
+                    <a:tc>
+                      <a:txBody>
+                        <a:bodyPr/>
+                        <a:lstStyle/>
+                        <a:p>
+                          <a:pPr marL="0" marR="0" lvl="0" indent="0" algn="l" defTabSz="914400" rtl="0" eaLnBrk="1" fontAlgn="auto" latinLnBrk="0" hangingPunct="1">
+                            <a:lnSpc>
+                              <a:spcPct val="100000"/>
+                            </a:lnSpc>
+                            <a:spcBef>
+                              <a:spcPts val="0"/>
+                            </a:spcBef>
+                            <a:spcAft>
+                              <a:spcPts val="0"/>
+                            </a:spcAft>
+                            <a:buClrTx/>
+                            <a:buSzTx/>
+                            <a:buFontTx/>
+                            <a:buNone/>
+                            <a:tabLst/>
+                            <a:defRPr/>
+                          </a:pPr>
+                          <a14:m>
+                            <m:oMathPara xmlns:m="http://schemas.openxmlformats.org/officeDocument/2006/math">
+                              <m:oMath>
+                                <m:r>
+                                  <m:rPr>
+                                    <m:nor/>
+                                  </m:rPr>
+                                  <a:rPr lang="en-US" sz="1200" i="0" smtClean="0"/>
+                                  <m:t>DM </m:t>
+                                </m:r>
+                                <m:d>
+                                  <m:dPr>
+                                    <m:sepChr m:val=","/>
+                                    <m:ctrlPr>
+                                      <a:rPr lang="en-US" sz="1200" b="0" i="0" kern="1200" smtClean="0">
+                                        <a:solidFill>
+                                          <a:schemeClr val="dk1"/>
+                                        </a:solidFill>
+                                        <a:latin typeface="Cambria Math" panose="02040503050406030204" pitchFamily="18" charset="0"/>
+                                        <a:ea typeface="+mn-ea"/>
+                                        <a:cs typeface="+mn-cs"/>
+                                      </a:rPr>
+                                    </m:ctrlPr>
+                                  </m:dPr>
+                                  <m:e>
+                                    <m:r>
+                                      <a:rPr lang="en-US" sz="1200" b="0" i="0" kern="1200" smtClean="0">
+                                        <a:solidFill>
+                                          <a:schemeClr val="dk1"/>
+                                        </a:solidFill>
+                                        <a:latin typeface="Cambria Math" panose="02040503050406030204" pitchFamily="18" charset="0"/>
+                                        <a:ea typeface="+mn-ea"/>
+                                        <a:cs typeface="+mn-cs"/>
+                                      </a:rPr>
+                                      <m:t>3</m:t>
+                                    </m:r>
+                                  </m:e>
+                                  <m:e>
+                                    <m:r>
+                                      <a:rPr lang="en-US" sz="1200" b="0" i="0" kern="1200" smtClean="0">
+                                        <a:solidFill>
+                                          <a:schemeClr val="dk1"/>
+                                        </a:solidFill>
+                                        <a:latin typeface="Cambria Math" panose="02040503050406030204" pitchFamily="18" charset="0"/>
+                                        <a:ea typeface="+mn-ea"/>
+                                        <a:cs typeface="+mn-cs"/>
+                                      </a:rPr>
+                                      <m:t>1</m:t>
+                                    </m:r>
+                                  </m:e>
+                                </m:d>
+                              </m:oMath>
+                            </m:oMathPara>
+                          </a14:m>
+                          <a:endParaRPr lang="en-US" sz="1200" dirty="0"/>
+                        </a:p>
+                      </a:txBody>
+                      <a:tcPr/>
+                    </a:tc>
+                    <a:tc>
+                      <a:txBody>
+                        <a:bodyPr/>
+                        <a:lstStyle/>
+                        <a:p>
+                          <a14:m>
+                            <m:oMathPara xmlns:m="http://schemas.openxmlformats.org/officeDocument/2006/math">
+                              <m:oMath>
+                                <m:d>
+                                  <m:dPr>
+                                    <m:ctrlPr>
+                                      <a:rPr lang="en-US" sz="1200" i="1" dirty="0" smtClean="0">
+                                        <a:latin typeface="Cambria Math" panose="02040503050406030204" pitchFamily="18" charset="0"/>
+                                      </a:rPr>
+                                    </m:ctrlPr>
+                                  </m:dPr>
+                                  <m:e>
+                                    <m:r>
+                                      <a:rPr lang="en-US" sz="1200" i="1" dirty="0" smtClean="0">
+                                        <a:latin typeface="Cambria Math" panose="02040503050406030204" pitchFamily="18" charset="0"/>
+                                      </a:rPr>
+                                      <m:t>𝑞</m:t>
+                                    </m:r>
+                                    <m:r>
+                                      <a:rPr lang="en-US" sz="1200" b="0" i="0" dirty="0" smtClean="0">
+                                        <a:latin typeface="Cambria Math" panose="02040503050406030204" pitchFamily="18" charset="0"/>
+                                      </a:rPr>
+                                      <m:t>0</m:t>
+                                    </m:r>
+                                    <m:r>
+                                      <a:rPr lang="en-US" sz="1200" i="0" dirty="0" smtClean="0">
+                                        <a:latin typeface="Cambria Math" panose="02040503050406030204" pitchFamily="18" charset="0"/>
+                                      </a:rPr>
+                                      <m:t>​,</m:t>
+                                    </m:r>
+                                    <m:r>
+                                      <a:rPr lang="en-US" sz="1200" i="1" dirty="0" smtClean="0">
+                                        <a:latin typeface="Cambria Math" panose="02040503050406030204" pitchFamily="18" charset="0"/>
+                                      </a:rPr>
+                                      <m:t>𝑞</m:t>
+                                    </m:r>
+                                    <m:r>
+                                      <a:rPr lang="en-US" sz="1200" b="0" i="0" dirty="0" smtClean="0">
+                                        <a:latin typeface="Cambria Math" panose="02040503050406030204" pitchFamily="18" charset="0"/>
+                                      </a:rPr>
+                                      <m:t>2</m:t>
+                                    </m:r>
+                                    <m:r>
+                                      <a:rPr lang="en-US" sz="1200" i="0" dirty="0" smtClean="0">
+                                        <a:latin typeface="Cambria Math" panose="02040503050406030204" pitchFamily="18" charset="0"/>
+                                      </a:rPr>
+                                      <m:t>​</m:t>
+                                    </m:r>
+                                  </m:e>
+                                </m:d>
+                              </m:oMath>
+                            </m:oMathPara>
+                          </a14:m>
+                          <a:endParaRPr lang="en-US" sz="1200" dirty="0"/>
+                        </a:p>
+                      </a:txBody>
+                      <a:tcPr/>
+                    </a:tc>
+                    <a:tc>
+                      <a:txBody>
+                        <a:bodyPr/>
+                        <a:lstStyle/>
+                        <a:p>
+                          <a:pPr algn="ctr"/>
+                          <a14:m>
+                            <m:oMath xmlns:m="http://schemas.openxmlformats.org/officeDocument/2006/math">
+                              <m:sSup>
+                                <m:sSupPr>
+                                  <m:ctrlPr>
+                                    <a:rPr lang="en-US" sz="1200" i="1" kern="1200">
+                                      <a:solidFill>
+                                        <a:schemeClr val="dk1"/>
+                                      </a:solidFill>
+                                      <a:latin typeface="Cambria Math" panose="02040503050406030204" pitchFamily="18" charset="0"/>
+                                      <a:ea typeface="+mn-ea"/>
+                                      <a:cs typeface="+mn-cs"/>
+                                    </a:rPr>
+                                  </m:ctrlPr>
+                                </m:sSupPr>
+                                <m:e>
+                                  <m:r>
+                                    <a:rPr lang="en-US" sz="1200" i="1" kern="1200">
+                                      <a:solidFill>
+                                        <a:schemeClr val="dk1"/>
+                                      </a:solidFill>
+                                      <a:latin typeface="Cambria Math" panose="02040503050406030204" pitchFamily="18" charset="0"/>
+                                      <a:ea typeface="+mn-ea"/>
+                                      <a:cs typeface="+mn-cs"/>
+                                    </a:rPr>
+                                    <m:t>𝐻</m:t>
+                                  </m:r>
+                                </m:e>
+                                <m:sup>
+                                  <m:d>
+                                    <m:dPr>
+                                      <m:ctrlPr>
+                                        <a:rPr lang="en-US" sz="1200" i="0" kern="1200">
+                                          <a:solidFill>
+                                            <a:schemeClr val="dk1"/>
+                                          </a:solidFill>
+                                          <a:latin typeface="Cambria Math" panose="02040503050406030204" pitchFamily="18" charset="0"/>
+                                          <a:ea typeface="+mn-ea"/>
+                                          <a:cs typeface="+mn-cs"/>
+                                        </a:rPr>
+                                      </m:ctrlPr>
+                                    </m:dPr>
+                                    <m:e>
+                                      <m:r>
+                                        <a:rPr lang="en-US" sz="1200" i="0" kern="1200">
+                                          <a:solidFill>
+                                            <a:schemeClr val="dk1"/>
+                                          </a:solidFill>
+                                          <a:latin typeface="Cambria Math" panose="02040503050406030204" pitchFamily="18" charset="0"/>
+                                          <a:ea typeface="+mn-ea"/>
+                                          <a:cs typeface="+mn-cs"/>
+                                        </a:rPr>
+                                        <m:t>0</m:t>
+                                      </m:r>
+                                    </m:e>
+                                  </m:d>
+                                </m:sup>
+                              </m:sSup>
+                            </m:oMath>
+                          </a14:m>
+                          <a:r>
+                            <a:rPr lang="en-US" sz="1200" dirty="0"/>
+                            <a:t>, </a:t>
+                          </a:r>
+                          <a14:m>
+                            <m:oMath xmlns:m="http://schemas.openxmlformats.org/officeDocument/2006/math">
+                              <m:sSub>
+                                <m:sSubPr>
+                                  <m:ctrlPr>
+                                    <a:rPr lang="en-US" sz="1200" i="1" kern="1200">
+                                      <a:solidFill>
+                                        <a:schemeClr val="dk1"/>
+                                      </a:solidFill>
+                                      <a:latin typeface="+mn-lt"/>
+                                      <a:ea typeface="+mn-ea"/>
+                                      <a:cs typeface="+mn-cs"/>
+                                    </a:rPr>
+                                  </m:ctrlPr>
+                                </m:sSubPr>
+                                <m:e>
+                                  <m:r>
+                                    <a:rPr lang="en-US" sz="1200" i="1" kern="1200">
+                                      <a:solidFill>
+                                        <a:schemeClr val="dk1"/>
+                                      </a:solidFill>
+                                      <a:latin typeface="+mn-lt"/>
+                                      <a:ea typeface="+mn-ea"/>
+                                      <a:cs typeface="+mn-cs"/>
+                                    </a:rPr>
+                                    <m:t>𝑅</m:t>
+                                  </m:r>
+                                </m:e>
+                                <m:sub>
+                                  <m:r>
+                                    <a:rPr lang="en-US" sz="1200" i="1" kern="1200">
+                                      <a:solidFill>
+                                        <a:schemeClr val="dk1"/>
+                                      </a:solidFill>
+                                      <a:latin typeface="+mn-lt"/>
+                                      <a:ea typeface="+mn-ea"/>
+                                      <a:cs typeface="+mn-cs"/>
+                                    </a:rPr>
+                                    <m:t>𝑍𝑍</m:t>
+                                  </m:r>
+                                </m:sub>
+                              </m:sSub>
+                              <m:d>
+                                <m:dPr>
+                                  <m:ctrlPr>
+                                    <a:rPr lang="en-US" sz="1200" i="0" kern="1200">
+                                      <a:solidFill>
+                                        <a:schemeClr val="dk1"/>
+                                      </a:solidFill>
+                                      <a:latin typeface="+mn-lt"/>
+                                      <a:ea typeface="+mn-ea"/>
+                                      <a:cs typeface="+mn-cs"/>
+                                    </a:rPr>
+                                  </m:ctrlPr>
+                                </m:dPr>
+                                <m:e>
+                                  <m:r>
+                                    <a:rPr lang="en-US" sz="1200" i="0" kern="1200">
+                                      <a:solidFill>
+                                        <a:schemeClr val="dk1"/>
+                                      </a:solidFill>
+                                      <a:latin typeface="+mn-lt"/>
+                                      <a:ea typeface="+mn-ea"/>
+                                      <a:cs typeface="+mn-cs"/>
+                                    </a:rPr>
+                                    <m:t>0.8</m:t>
+                                  </m:r>
+                                  <m:r>
+                                    <a:rPr lang="en-US" sz="1200" i="1" kern="1200">
+                                      <a:solidFill>
+                                        <a:schemeClr val="dk1"/>
+                                      </a:solidFill>
+                                      <a:latin typeface="+mn-lt"/>
+                                      <a:ea typeface="+mn-ea"/>
+                                      <a:cs typeface="+mn-cs"/>
+                                    </a:rPr>
+                                    <m:t>𝐷</m:t>
+                                  </m:r>
+                                  <m:r>
+                                    <a:rPr lang="en-US" sz="1200" i="1" kern="1200">
+                                      <a:solidFill>
+                                        <a:schemeClr val="dk1"/>
+                                      </a:solidFill>
+                                      <a:latin typeface="+mn-lt"/>
+                                      <a:ea typeface="+mn-ea"/>
+                                      <a:cs typeface="+mn-cs"/>
+                                    </a:rPr>
+                                    <m:t>𝜏</m:t>
+                                  </m:r>
+                                </m:e>
+                              </m:d>
+                            </m:oMath>
+                          </a14:m>
+                          <a:r>
+                            <a:rPr lang="en-US" sz="1200" dirty="0"/>
+                            <a:t>, </a:t>
+                          </a:r>
+                          <a14:m>
+                            <m:oMath xmlns:m="http://schemas.openxmlformats.org/officeDocument/2006/math">
+                              <m:sSup>
+                                <m:sSupPr>
+                                  <m:ctrlPr>
+                                    <a:rPr lang="en-US" sz="1200" i="1" kern="1200">
+                                      <a:solidFill>
+                                        <a:schemeClr val="dk1"/>
+                                      </a:solidFill>
+                                      <a:latin typeface="+mn-lt"/>
+                                      <a:ea typeface="+mn-ea"/>
+                                      <a:cs typeface="+mn-cs"/>
+                                    </a:rPr>
+                                  </m:ctrlPr>
+                                </m:sSupPr>
+                                <m:e>
+                                  <m:r>
+                                    <a:rPr lang="en-US" sz="1200" i="1" kern="1200">
+                                      <a:solidFill>
+                                        <a:schemeClr val="dk1"/>
+                                      </a:solidFill>
+                                      <a:latin typeface="+mn-lt"/>
+                                      <a:ea typeface="+mn-ea"/>
+                                      <a:cs typeface="+mn-cs"/>
+                                    </a:rPr>
+                                    <m:t>𝐻</m:t>
+                                  </m:r>
+                                </m:e>
+                                <m:sup>
+                                  <m:d>
+                                    <m:dPr>
+                                      <m:ctrlPr>
+                                        <a:rPr lang="en-US" sz="1200" i="0" kern="1200">
+                                          <a:solidFill>
+                                            <a:schemeClr val="dk1"/>
+                                          </a:solidFill>
+                                          <a:latin typeface="+mn-lt"/>
+                                          <a:ea typeface="+mn-ea"/>
+                                          <a:cs typeface="+mn-cs"/>
+                                        </a:rPr>
+                                      </m:ctrlPr>
+                                    </m:dPr>
+                                    <m:e>
+                                      <m:r>
+                                        <a:rPr lang="en-US" sz="1200" i="0" kern="1200">
+                                          <a:solidFill>
+                                            <a:schemeClr val="dk1"/>
+                                          </a:solidFill>
+                                          <a:latin typeface="+mn-lt"/>
+                                          <a:ea typeface="+mn-ea"/>
+                                          <a:cs typeface="+mn-cs"/>
+                                        </a:rPr>
+                                        <m:t>0</m:t>
+                                      </m:r>
+                                    </m:e>
+                                  </m:d>
+                                </m:sup>
+                              </m:sSup>
+                            </m:oMath>
+                          </a14:m>
+                          <a:r>
+                            <a:rPr lang="en-US" sz="1200" dirty="0"/>
+                            <a:t>, </a:t>
+                          </a:r>
+                          <a14:m>
+                            <m:oMath xmlns:m="http://schemas.openxmlformats.org/officeDocument/2006/math">
+                              <m:sSup>
+                                <m:sSupPr>
+                                  <m:ctrlPr>
+                                    <a:rPr lang="en-US" sz="1200" i="1" kern="1200">
+                                      <a:solidFill>
+                                        <a:schemeClr val="dk1"/>
+                                      </a:solidFill>
+                                      <a:latin typeface="+mn-lt"/>
+                                      <a:ea typeface="+mn-ea"/>
+                                      <a:cs typeface="+mn-cs"/>
+                                    </a:rPr>
+                                  </m:ctrlPr>
+                                </m:sSupPr>
+                                <m:e>
+                                  <m:r>
+                                    <a:rPr lang="en-US" sz="1200" i="1" kern="1200">
+                                      <a:solidFill>
+                                        <a:schemeClr val="dk1"/>
+                                      </a:solidFill>
+                                      <a:latin typeface="+mn-lt"/>
+                                      <a:ea typeface="+mn-ea"/>
+                                      <a:cs typeface="+mn-cs"/>
+                                    </a:rPr>
+                                    <m:t>𝐻</m:t>
+                                  </m:r>
+                                </m:e>
+                                <m:sup>
+                                  <m:d>
+                                    <m:dPr>
+                                      <m:ctrlPr>
+                                        <a:rPr lang="en-US" sz="1200" i="0" kern="1200">
+                                          <a:solidFill>
+                                            <a:schemeClr val="dk1"/>
+                                          </a:solidFill>
+                                          <a:latin typeface="+mn-lt"/>
+                                          <a:ea typeface="+mn-ea"/>
+                                          <a:cs typeface="+mn-cs"/>
+                                        </a:rPr>
+                                      </m:ctrlPr>
+                                    </m:dPr>
+                                    <m:e>
+                                      <m:r>
+                                        <a:rPr lang="en-US" sz="1200" i="0" kern="1200">
+                                          <a:solidFill>
+                                            <a:schemeClr val="dk1"/>
+                                          </a:solidFill>
+                                          <a:latin typeface="+mn-lt"/>
+                                          <a:ea typeface="+mn-ea"/>
+                                          <a:cs typeface="+mn-cs"/>
+                                        </a:rPr>
+                                        <m:t>2</m:t>
+                                      </m:r>
+                                    </m:e>
+                                  </m:d>
+                                </m:sup>
+                              </m:sSup>
+                            </m:oMath>
+                          </a14:m>
+                          <a:r>
+                            <a:rPr lang="en-US" sz="1200" dirty="0"/>
+                            <a:t>, </a:t>
+                          </a:r>
+                          <a14:m>
+                            <m:oMath xmlns:m="http://schemas.openxmlformats.org/officeDocument/2006/math">
+                              <m:sSub>
+                                <m:sSubPr>
+                                  <m:ctrlPr>
+                                    <a:rPr lang="en-US" sz="1200" i="1" kern="1200">
+                                      <a:solidFill>
+                                        <a:schemeClr val="dk1"/>
+                                      </a:solidFill>
+                                      <a:latin typeface="+mn-lt"/>
+                                      <a:ea typeface="+mn-ea"/>
+                                      <a:cs typeface="+mn-cs"/>
+                                    </a:rPr>
+                                  </m:ctrlPr>
+                                </m:sSubPr>
+                                <m:e>
+                                  <m:r>
+                                    <a:rPr lang="en-US" sz="1200" i="1" kern="1200">
+                                      <a:solidFill>
+                                        <a:schemeClr val="dk1"/>
+                                      </a:solidFill>
+                                      <a:latin typeface="+mn-lt"/>
+                                      <a:ea typeface="+mn-ea"/>
+                                      <a:cs typeface="+mn-cs"/>
+                                    </a:rPr>
+                                    <m:t>𝑅</m:t>
+                                  </m:r>
+                                </m:e>
+                                <m:sub>
+                                  <m:r>
+                                    <a:rPr lang="en-US" sz="1200" i="1" kern="1200">
+                                      <a:solidFill>
+                                        <a:schemeClr val="dk1"/>
+                                      </a:solidFill>
+                                      <a:latin typeface="+mn-lt"/>
+                                      <a:ea typeface="+mn-ea"/>
+                                      <a:cs typeface="+mn-cs"/>
+                                    </a:rPr>
+                                    <m:t>𝑍𝑍</m:t>
+                                  </m:r>
+                                </m:sub>
+                              </m:sSub>
+                              <m:d>
+                                <m:dPr>
+                                  <m:ctrlPr>
+                                    <a:rPr lang="en-US" sz="1200" i="0" kern="1200">
+                                      <a:solidFill>
+                                        <a:schemeClr val="dk1"/>
+                                      </a:solidFill>
+                                      <a:latin typeface="+mn-lt"/>
+                                      <a:ea typeface="+mn-ea"/>
+                                      <a:cs typeface="+mn-cs"/>
+                                    </a:rPr>
+                                  </m:ctrlPr>
+                                </m:dPr>
+                                <m:e>
+                                  <m:r>
+                                    <a:rPr lang="en-US" sz="1200" i="0" kern="1200">
+                                      <a:solidFill>
+                                        <a:schemeClr val="dk1"/>
+                                      </a:solidFill>
+                                      <a:latin typeface="+mn-lt"/>
+                                      <a:ea typeface="+mn-ea"/>
+                                      <a:cs typeface="+mn-cs"/>
+                                    </a:rPr>
+                                    <m:t>−0.8</m:t>
+                                  </m:r>
+                                  <m:r>
+                                    <a:rPr lang="en-US" sz="1200" i="1" kern="1200">
+                                      <a:solidFill>
+                                        <a:schemeClr val="dk1"/>
+                                      </a:solidFill>
+                                      <a:latin typeface="+mn-lt"/>
+                                      <a:ea typeface="+mn-ea"/>
+                                      <a:cs typeface="+mn-cs"/>
+                                    </a:rPr>
+                                    <m:t>𝐷</m:t>
+                                  </m:r>
+                                  <m:r>
+                                    <a:rPr lang="en-US" sz="1200" i="1" kern="1200">
+                                      <a:solidFill>
+                                        <a:schemeClr val="dk1"/>
+                                      </a:solidFill>
+                                      <a:latin typeface="+mn-lt"/>
+                                      <a:ea typeface="+mn-ea"/>
+                                      <a:cs typeface="+mn-cs"/>
+                                    </a:rPr>
+                                    <m:t>𝜏</m:t>
+                                  </m:r>
+                                </m:e>
+                              </m:d>
+                            </m:oMath>
+                          </a14:m>
+                          <a:r>
+                            <a:rPr lang="en-US" sz="1200" dirty="0"/>
+                            <a:t>, </a:t>
+                          </a:r>
+                          <a14:m>
+                            <m:oMath xmlns:m="http://schemas.openxmlformats.org/officeDocument/2006/math">
+                              <m:sSup>
+                                <m:sSupPr>
+                                  <m:ctrlPr>
+                                    <a:rPr lang="en-US" sz="1200" i="1" kern="1200">
+                                      <a:solidFill>
+                                        <a:schemeClr val="dk1"/>
+                                      </a:solidFill>
+                                      <a:latin typeface="+mn-lt"/>
+                                      <a:ea typeface="+mn-ea"/>
+                                      <a:cs typeface="+mn-cs"/>
+                                    </a:rPr>
+                                  </m:ctrlPr>
+                                </m:sSupPr>
+                                <m:e>
+                                  <m:r>
+                                    <a:rPr lang="en-US" sz="1200" i="1" kern="1200">
+                                      <a:solidFill>
+                                        <a:schemeClr val="dk1"/>
+                                      </a:solidFill>
+                                      <a:latin typeface="+mn-lt"/>
+                                      <a:ea typeface="+mn-ea"/>
+                                      <a:cs typeface="+mn-cs"/>
+                                    </a:rPr>
+                                    <m:t>𝐻</m:t>
+                                  </m:r>
+                                </m:e>
+                                <m:sup>
+                                  <m:d>
+                                    <m:dPr>
+                                      <m:ctrlPr>
+                                        <a:rPr lang="en-US" sz="1200" i="0" kern="1200">
+                                          <a:solidFill>
+                                            <a:schemeClr val="dk1"/>
+                                          </a:solidFill>
+                                          <a:latin typeface="+mn-lt"/>
+                                          <a:ea typeface="+mn-ea"/>
+                                          <a:cs typeface="+mn-cs"/>
+                                        </a:rPr>
+                                      </m:ctrlPr>
+                                    </m:dPr>
+                                    <m:e>
+                                      <m:r>
+                                        <a:rPr lang="en-US" sz="1200" i="0" kern="1200">
+                                          <a:solidFill>
+                                            <a:schemeClr val="dk1"/>
+                                          </a:solidFill>
+                                          <a:latin typeface="+mn-lt"/>
+                                          <a:ea typeface="+mn-ea"/>
+                                          <a:cs typeface="+mn-cs"/>
+                                        </a:rPr>
+                                        <m:t>2</m:t>
+                                      </m:r>
+                                    </m:e>
+                                  </m:d>
+                                </m:sup>
+                              </m:sSup>
+                            </m:oMath>
+                          </a14:m>
+                          <a:endParaRPr lang="en-US" sz="1200" dirty="0"/>
+                        </a:p>
+                      </a:txBody>
+                      <a:tcPr/>
+                    </a:tc>
+                    <a:extLst>
+                      <a:ext uri="{0D108BD9-81ED-4DB2-BD59-A6C34878D82A}">
+                        <a16:rowId xmlns:a16="http://schemas.microsoft.com/office/drawing/2014/main" val="2444161232"/>
+                      </a:ext>
+                    </a:extLst>
+                  </a:tr>
+                </a:tbl>
+              </a:graphicData>
+            </a:graphic>
+          </p:graphicFrame>
+        </mc:Choice>
+        <mc:Fallback>
+          <p:graphicFrame>
+            <p:nvGraphicFramePr>
+              <p:cNvPr id="16" name="Table 15">
+                <a:extLst>
+                  <a:ext uri="{FF2B5EF4-FFF2-40B4-BE49-F238E27FC236}">
+                    <a16:creationId xmlns:a16="http://schemas.microsoft.com/office/drawing/2014/main" id="{D97C2F76-C34F-1B53-B74C-F9EFF70CE874}"/>
+                  </a:ext>
+                </a:extLst>
+              </p:cNvPr>
+              <p:cNvGraphicFramePr>
+                <a:graphicFrameLocks noGrp="1"/>
+              </p:cNvGraphicFramePr>
+              <p:nvPr>
+                <p:extLst>
+                  <p:ext uri="{D42A27DB-BD31-4B8C-83A1-F6EECF244321}">
+                    <p14:modId xmlns:p14="http://schemas.microsoft.com/office/powerpoint/2010/main" val="1757075260"/>
+                  </p:ext>
+                </p:extLst>
+              </p:nvPr>
+            </p:nvGraphicFramePr>
+            <p:xfrm>
+              <a:off x="419947" y="4287157"/>
+              <a:ext cx="7691121" cy="2320609"/>
+            </p:xfrm>
+            <a:graphic>
+              <a:graphicData uri="http://schemas.openxmlformats.org/drawingml/2006/table">
+                <a:tbl>
+                  <a:tblPr firstRow="1" bandRow="1">
+                    <a:tableStyleId>{5C22544A-7EE6-4342-B048-85BDC9FD1C3A}</a:tableStyleId>
+                  </a:tblPr>
+                  <a:tblGrid>
+                    <a:gridCol w="1976120">
+                      <a:extLst>
+                        <a:ext uri="{9D8B030D-6E8A-4147-A177-3AD203B41FA5}">
+                          <a16:colId xmlns:a16="http://schemas.microsoft.com/office/drawing/2014/main" val="2110275228"/>
+                        </a:ext>
+                      </a:extLst>
+                    </a:gridCol>
+                    <a:gridCol w="1642533">
+                      <a:extLst>
+                        <a:ext uri="{9D8B030D-6E8A-4147-A177-3AD203B41FA5}">
+                          <a16:colId xmlns:a16="http://schemas.microsoft.com/office/drawing/2014/main" val="510094434"/>
+                        </a:ext>
+                      </a:extLst>
+                    </a:gridCol>
+                    <a:gridCol w="4072468">
+                      <a:extLst>
+                        <a:ext uri="{9D8B030D-6E8A-4147-A177-3AD203B41FA5}">
+                          <a16:colId xmlns:a16="http://schemas.microsoft.com/office/drawing/2014/main" val="660264833"/>
+                        </a:ext>
+                      </a:extLst>
+                    </a:gridCol>
+                  </a:tblGrid>
+                  <a:tr h="285496">
+                    <a:tc>
+                      <a:txBody>
+                        <a:bodyPr/>
+                        <a:lstStyle/>
+                        <a:p>
+                          <a:endParaRPr lang="en-US"/>
+                        </a:p>
+                      </a:txBody>
+                      <a:tcPr anchor="ctr">
+                        <a:blipFill>
+                          <a:blip r:embed="rId10"/>
+                          <a:stretch>
+                            <a:fillRect l="-308" t="-2128" r="-289846" b="-729787"/>
+                          </a:stretch>
+                        </a:blipFill>
+                      </a:tcPr>
+                    </a:tc>
+                    <a:tc>
+                      <a:txBody>
+                        <a:bodyPr/>
+                        <a:lstStyle/>
+                        <a:p>
+                          <a:r>
+                            <a:rPr lang="en-US" sz="1200"/>
+                            <a:t>Qubit</a:t>
+                          </a:r>
+                          <a:endParaRPr lang="en-US" sz="1200" dirty="0"/>
+                        </a:p>
+                      </a:txBody>
+                      <a:tcPr/>
+                    </a:tc>
+                    <a:tc>
+                      <a:txBody>
+                        <a:bodyPr/>
+                        <a:lstStyle/>
+                        <a:p>
+                          <a:endParaRPr lang="en-US"/>
+                        </a:p>
+                      </a:txBody>
+                      <a:tcPr>
+                        <a:blipFill>
+                          <a:blip r:embed="rId10"/>
+                          <a:stretch>
+                            <a:fillRect l="-88939" t="-2128" r="-598" b="-729787"/>
+                          </a:stretch>
+                        </a:blipFill>
+                      </a:tcPr>
+                    </a:tc>
+                    <a:extLst>
+                      <a:ext uri="{0D108BD9-81ED-4DB2-BD59-A6C34878D82A}">
+                        <a16:rowId xmlns:a16="http://schemas.microsoft.com/office/drawing/2014/main" val="944284243"/>
+                      </a:ext>
+                    </a:extLst>
+                  </a:tr>
+                  <a:tr h="274320">
+                    <a:tc>
+                      <a:txBody>
+                        <a:bodyPr/>
+                        <a:lstStyle/>
+                        <a:p>
+                          <a:endParaRPr lang="en-US"/>
+                        </a:p>
+                      </a:txBody>
+                      <a:tcPr>
+                        <a:blipFill>
+                          <a:blip r:embed="rId10"/>
+                          <a:stretch>
+                            <a:fillRect l="-308" t="-106667" r="-289846" b="-662222"/>
+                          </a:stretch>
+                        </a:blipFill>
+                      </a:tcPr>
+                    </a:tc>
+                    <a:tc>
+                      <a:txBody>
+                        <a:bodyPr/>
+                        <a:lstStyle/>
+                        <a:p>
+                          <a:endParaRPr lang="en-US"/>
+                        </a:p>
+                      </a:txBody>
+                      <a:tcPr>
+                        <a:blipFill>
+                          <a:blip r:embed="rId10"/>
+                          <a:stretch>
+                            <a:fillRect l="-121190" t="-106667" r="-250186" b="-662222"/>
+                          </a:stretch>
+                        </a:blipFill>
+                      </a:tcPr>
+                    </a:tc>
+                    <a:tc>
+                      <a:txBody>
+                        <a:bodyPr/>
+                        <a:lstStyle/>
+                        <a:p>
+                          <a:endParaRPr lang="en-US"/>
+                        </a:p>
+                      </a:txBody>
+                      <a:tcPr>
+                        <a:blipFill>
+                          <a:blip r:embed="rId10"/>
+                          <a:stretch>
+                            <a:fillRect l="-88939" t="-106667" r="-598" b="-662222"/>
+                          </a:stretch>
+                        </a:blipFill>
+                      </a:tcPr>
+                    </a:tc>
+                    <a:extLst>
+                      <a:ext uri="{0D108BD9-81ED-4DB2-BD59-A6C34878D82A}">
+                        <a16:rowId xmlns:a16="http://schemas.microsoft.com/office/drawing/2014/main" val="1794692388"/>
+                      </a:ext>
+                    </a:extLst>
+                  </a:tr>
+                  <a:tr h="274320">
+                    <a:tc>
+                      <a:txBody>
+                        <a:bodyPr/>
+                        <a:lstStyle/>
+                        <a:p>
+                          <a:endParaRPr lang="en-US"/>
+                        </a:p>
+                      </a:txBody>
+                      <a:tcPr>
+                        <a:blipFill>
+                          <a:blip r:embed="rId10"/>
+                          <a:stretch>
+                            <a:fillRect l="-308" t="-206667" r="-289846" b="-562222"/>
+                          </a:stretch>
+                        </a:blipFill>
+                      </a:tcPr>
+                    </a:tc>
+                    <a:tc>
+                      <a:txBody>
+                        <a:bodyPr/>
+                        <a:lstStyle/>
+                        <a:p>
+                          <a:endParaRPr lang="en-US"/>
+                        </a:p>
+                      </a:txBody>
+                      <a:tcPr>
+                        <a:blipFill>
+                          <a:blip r:embed="rId10"/>
+                          <a:stretch>
+                            <a:fillRect l="-121190" t="-206667" r="-250186" b="-562222"/>
+                          </a:stretch>
+                        </a:blipFill>
+                      </a:tcPr>
+                    </a:tc>
+                    <a:tc>
+                      <a:txBody>
+                        <a:bodyPr/>
+                        <a:lstStyle/>
+                        <a:p>
+                          <a:endParaRPr lang="en-US"/>
+                        </a:p>
+                      </a:txBody>
+                      <a:tcPr>
+                        <a:blipFill>
+                          <a:blip r:embed="rId10"/>
+                          <a:stretch>
+                            <a:fillRect l="-88939" t="-206667" r="-598" b="-562222"/>
+                          </a:stretch>
+                        </a:blipFill>
+                      </a:tcPr>
+                    </a:tc>
+                    <a:extLst>
+                      <a:ext uri="{0D108BD9-81ED-4DB2-BD59-A6C34878D82A}">
+                        <a16:rowId xmlns:a16="http://schemas.microsoft.com/office/drawing/2014/main" val="73067340"/>
+                      </a:ext>
+                    </a:extLst>
+                  </a:tr>
+                  <a:tr h="274320">
+                    <a:tc>
+                      <a:txBody>
+                        <a:bodyPr/>
+                        <a:lstStyle/>
+                        <a:p>
+                          <a:endParaRPr lang="en-US"/>
+                        </a:p>
+                      </a:txBody>
+                      <a:tcPr>
+                        <a:blipFill>
+                          <a:blip r:embed="rId10"/>
+                          <a:stretch>
+                            <a:fillRect l="-308" t="-306667" r="-289846" b="-462222"/>
+                          </a:stretch>
+                        </a:blipFill>
+                      </a:tcPr>
+                    </a:tc>
+                    <a:tc>
+                      <a:txBody>
+                        <a:bodyPr/>
+                        <a:lstStyle/>
+                        <a:p>
+                          <a:endParaRPr lang="en-US"/>
+                        </a:p>
+                      </a:txBody>
+                      <a:tcPr>
+                        <a:blipFill>
+                          <a:blip r:embed="rId10"/>
+                          <a:stretch>
+                            <a:fillRect l="-121190" t="-306667" r="-250186" b="-462222"/>
+                          </a:stretch>
+                        </a:blipFill>
+                      </a:tcPr>
+                    </a:tc>
+                    <a:tc>
+                      <a:txBody>
+                        <a:bodyPr/>
+                        <a:lstStyle/>
+                        <a:p>
+                          <a:endParaRPr lang="en-US"/>
+                        </a:p>
+                      </a:txBody>
+                      <a:tcPr>
+                        <a:blipFill>
+                          <a:blip r:embed="rId10"/>
+                          <a:stretch>
+                            <a:fillRect l="-88939" t="-306667" r="-598" b="-462222"/>
+                          </a:stretch>
+                        </a:blipFill>
+                      </a:tcPr>
+                    </a:tc>
+                    <a:extLst>
+                      <a:ext uri="{0D108BD9-81ED-4DB2-BD59-A6C34878D82A}">
+                        <a16:rowId xmlns:a16="http://schemas.microsoft.com/office/drawing/2014/main" val="1831271688"/>
+                      </a:ext>
+                    </a:extLst>
+                  </a:tr>
+                  <a:tr h="319596">
+                    <a:tc>
+                      <a:txBody>
+                        <a:bodyPr/>
+                        <a:lstStyle/>
+                        <a:p>
+                          <a:endParaRPr lang="en-US"/>
+                        </a:p>
+                      </a:txBody>
+                      <a:tcPr>
+                        <a:blipFill>
+                          <a:blip r:embed="rId10"/>
+                          <a:stretch>
+                            <a:fillRect l="-308" t="-351923" r="-289846" b="-300000"/>
+                          </a:stretch>
+                        </a:blipFill>
+                      </a:tcPr>
+                    </a:tc>
+                    <a:tc>
+                      <a:txBody>
+                        <a:bodyPr/>
+                        <a:lstStyle/>
+                        <a:p>
+                          <a:endParaRPr lang="en-US"/>
+                        </a:p>
+                      </a:txBody>
+                      <a:tcPr>
+                        <a:blipFill>
+                          <a:blip r:embed="rId10"/>
+                          <a:stretch>
+                            <a:fillRect l="-121190" t="-351923" r="-250186" b="-300000"/>
+                          </a:stretch>
+                        </a:blipFill>
+                      </a:tcPr>
+                    </a:tc>
+                    <a:tc>
+                      <a:txBody>
+                        <a:bodyPr/>
+                        <a:lstStyle/>
+                        <a:p>
+                          <a:endParaRPr lang="en-US"/>
+                        </a:p>
+                      </a:txBody>
+                      <a:tcPr>
+                        <a:blipFill>
+                          <a:blip r:embed="rId10"/>
+                          <a:stretch>
+                            <a:fillRect l="-88939" t="-351923" r="-598" b="-300000"/>
+                          </a:stretch>
+                        </a:blipFill>
+                      </a:tcPr>
+                    </a:tc>
+                    <a:extLst>
+                      <a:ext uri="{0D108BD9-81ED-4DB2-BD59-A6C34878D82A}">
+                        <a16:rowId xmlns:a16="http://schemas.microsoft.com/office/drawing/2014/main" val="1284039892"/>
+                      </a:ext>
+                    </a:extLst>
+                  </a:tr>
+                  <a:tr h="286703">
+                    <a:tc>
+                      <a:txBody>
+                        <a:bodyPr/>
+                        <a:lstStyle/>
+                        <a:p>
+                          <a:endParaRPr lang="en-US"/>
+                        </a:p>
+                      </a:txBody>
+                      <a:tcPr>
+                        <a:blipFill>
+                          <a:blip r:embed="rId10"/>
+                          <a:stretch>
+                            <a:fillRect l="-308" t="-489583" r="-289846" b="-225000"/>
+                          </a:stretch>
+                        </a:blipFill>
+                      </a:tcPr>
+                    </a:tc>
+                    <a:tc>
+                      <a:txBody>
+                        <a:bodyPr/>
+                        <a:lstStyle/>
+                        <a:p>
+                          <a:endParaRPr lang="en-US"/>
+                        </a:p>
+                      </a:txBody>
+                      <a:tcPr>
+                        <a:blipFill>
+                          <a:blip r:embed="rId10"/>
+                          <a:stretch>
+                            <a:fillRect l="-121190" t="-489583" r="-250186" b="-225000"/>
+                          </a:stretch>
+                        </a:blipFill>
+                      </a:tcPr>
+                    </a:tc>
+                    <a:tc>
+                      <a:txBody>
+                        <a:bodyPr/>
+                        <a:lstStyle/>
+                        <a:p>
+                          <a:endParaRPr lang="en-US"/>
+                        </a:p>
+                      </a:txBody>
+                      <a:tcPr>
+                        <a:blipFill>
+                          <a:blip r:embed="rId10"/>
+                          <a:stretch>
+                            <a:fillRect l="-88939" t="-489583" r="-598" b="-225000"/>
+                          </a:stretch>
+                        </a:blipFill>
+                      </a:tcPr>
+                    </a:tc>
+                    <a:extLst>
+                      <a:ext uri="{0D108BD9-81ED-4DB2-BD59-A6C34878D82A}">
+                        <a16:rowId xmlns:a16="http://schemas.microsoft.com/office/drawing/2014/main" val="1624636173"/>
+                      </a:ext>
+                    </a:extLst>
+                  </a:tr>
+                  <a:tr h="319151">
+                    <a:tc>
+                      <a:txBody>
+                        <a:bodyPr/>
+                        <a:lstStyle/>
+                        <a:p>
+                          <a:endParaRPr lang="en-US"/>
+                        </a:p>
+                      </a:txBody>
+                      <a:tcPr>
+                        <a:blipFill>
+                          <a:blip r:embed="rId10"/>
+                          <a:stretch>
+                            <a:fillRect l="-308" t="-544231" r="-289846" b="-107692"/>
+                          </a:stretch>
+                        </a:blipFill>
+                      </a:tcPr>
+                    </a:tc>
+                    <a:tc>
+                      <a:txBody>
+                        <a:bodyPr/>
+                        <a:lstStyle/>
+                        <a:p>
+                          <a:endParaRPr lang="en-US"/>
+                        </a:p>
+                      </a:txBody>
+                      <a:tcPr>
+                        <a:blipFill>
+                          <a:blip r:embed="rId10"/>
+                          <a:stretch>
+                            <a:fillRect l="-121190" t="-544231" r="-250186" b="-107692"/>
+                          </a:stretch>
+                        </a:blipFill>
+                      </a:tcPr>
+                    </a:tc>
+                    <a:tc>
+                      <a:txBody>
+                        <a:bodyPr/>
+                        <a:lstStyle/>
+                        <a:p>
+                          <a:endParaRPr lang="en-US"/>
+                        </a:p>
+                      </a:txBody>
+                      <a:tcPr>
+                        <a:blipFill>
+                          <a:blip r:embed="rId10"/>
+                          <a:stretch>
+                            <a:fillRect l="-88939" t="-544231" r="-598" b="-107692"/>
+                          </a:stretch>
+                        </a:blipFill>
+                      </a:tcPr>
+                    </a:tc>
+                    <a:extLst>
+                      <a:ext uri="{0D108BD9-81ED-4DB2-BD59-A6C34878D82A}">
+                        <a16:rowId xmlns:a16="http://schemas.microsoft.com/office/drawing/2014/main" val="2160563795"/>
+                      </a:ext>
+                    </a:extLst>
+                  </a:tr>
+                  <a:tr h="286703">
+                    <a:tc>
+                      <a:txBody>
+                        <a:bodyPr/>
+                        <a:lstStyle/>
+                        <a:p>
+                          <a:endParaRPr lang="en-US"/>
+                        </a:p>
+                      </a:txBody>
+                      <a:tcPr>
+                        <a:blipFill>
+                          <a:blip r:embed="rId10"/>
+                          <a:stretch>
+                            <a:fillRect l="-308" t="-712766" r="-289846" b="-19149"/>
+                          </a:stretch>
+                        </a:blipFill>
+                      </a:tcPr>
+                    </a:tc>
+                    <a:tc>
+                      <a:txBody>
+                        <a:bodyPr/>
+                        <a:lstStyle/>
+                        <a:p>
+                          <a:endParaRPr lang="en-US"/>
+                        </a:p>
+                      </a:txBody>
+                      <a:tcPr>
+                        <a:blipFill>
+                          <a:blip r:embed="rId10"/>
+                          <a:stretch>
+                            <a:fillRect l="-121190" t="-712766" r="-250186" b="-19149"/>
+                          </a:stretch>
+                        </a:blipFill>
+                      </a:tcPr>
+                    </a:tc>
+                    <a:tc>
+                      <a:txBody>
+                        <a:bodyPr/>
+                        <a:lstStyle/>
+                        <a:p>
+                          <a:endParaRPr lang="en-US"/>
+                        </a:p>
+                      </a:txBody>
+                      <a:tcPr>
+                        <a:blipFill>
+                          <a:blip r:embed="rId10"/>
+                          <a:stretch>
+                            <a:fillRect l="-88939" t="-712766" r="-598" b="-19149"/>
+                          </a:stretch>
+                        </a:blipFill>
+                      </a:tcPr>
+                    </a:tc>
+                    <a:extLst>
+                      <a:ext uri="{0D108BD9-81ED-4DB2-BD59-A6C34878D82A}">
+                        <a16:rowId xmlns:a16="http://schemas.microsoft.com/office/drawing/2014/main" val="2444161232"/>
+                      </a:ext>
+                    </a:extLst>
+                  </a:tr>
+                </a:tbl>
+              </a:graphicData>
+            </a:graphic>
+          </p:graphicFrame>
+        </mc:Fallback>
+      </mc:AlternateContent>
+      <p:sp>
+        <p:nvSpPr>
+          <p:cNvPr id="18" name="TextBox 17">
+            <a:extLst>
+              <a:ext uri="{FF2B5EF4-FFF2-40B4-BE49-F238E27FC236}">
+                <a16:creationId xmlns:a16="http://schemas.microsoft.com/office/drawing/2014/main" id="{D3ADEB57-C936-649B-EE77-269D098C6AD6}"/>
+              </a:ext>
+            </a:extLst>
+          </p:cNvPr>
+          <p:cNvSpPr txBox="1"/>
+          <p:nvPr/>
+        </p:nvSpPr>
+        <p:spPr>
+          <a:xfrm>
+            <a:off x="8649546" y="4426663"/>
+            <a:ext cx="2992121" cy="646331"/>
+          </a:xfrm>
+          <a:prstGeom prst="rect">
+            <a:avLst/>
+          </a:prstGeom>
+          <a:noFill/>
+        </p:spPr>
+        <p:txBody>
+          <a:bodyPr wrap="square" rtlCol="0">
+            <a:spAutoFit/>
+          </a:bodyPr>
+          <a:lstStyle/>
+          <a:p>
+            <a:r>
+              <a:rPr lang="en-US" sz="1200" dirty="0"/>
+              <a:t>Campo e </a:t>
+            </a:r>
+            <a:r>
+              <a:rPr lang="en-US" sz="1200" dirty="0" err="1"/>
+              <a:t>scambio</a:t>
+            </a:r>
+            <a:r>
+              <a:rPr lang="en-US" sz="1200" dirty="0"/>
+              <a:t> </a:t>
+            </a:r>
+            <a:r>
+              <a:rPr lang="en-US" sz="1200" dirty="0" err="1"/>
+              <a:t>commutano</a:t>
+            </a:r>
+            <a:r>
+              <a:rPr lang="en-US" sz="1200" dirty="0"/>
+              <a:t> in </a:t>
+            </a:r>
+            <a:r>
+              <a:rPr lang="en-US" sz="1200" dirty="0" err="1"/>
+              <a:t>entrambi</a:t>
+            </a:r>
+            <a:r>
+              <a:rPr lang="en-US" sz="1200" dirty="0"/>
+              <a:t> </a:t>
+            </a:r>
+            <a:r>
+              <a:rPr lang="en-US" sz="1200" dirty="0" err="1"/>
+              <a:t>i</a:t>
+            </a:r>
+            <a:r>
+              <a:rPr lang="en-US" sz="1200" dirty="0"/>
+              <a:t> </a:t>
+            </a:r>
+            <a:r>
+              <a:rPr lang="en-US" sz="1200" dirty="0" err="1"/>
+              <a:t>sistemi</a:t>
+            </a:r>
+            <a:r>
+              <a:rPr lang="en-US" sz="1200" dirty="0"/>
+              <a:t> - </a:t>
+            </a:r>
+            <a:r>
+              <a:rPr lang="en-US" sz="1200" dirty="0" err="1"/>
+              <a:t>l'ordine</a:t>
+            </a:r>
+            <a:r>
+              <a:rPr lang="en-US" sz="1200" dirty="0"/>
+              <a:t> </a:t>
+            </a:r>
+            <a:r>
+              <a:rPr lang="en-US" sz="1200" dirty="0" err="1"/>
+              <a:t>fra</a:t>
+            </a:r>
+            <a:r>
+              <a:rPr lang="en-US" sz="1200" dirty="0"/>
+              <a:t> loro è </a:t>
+            </a:r>
+            <a:r>
+              <a:rPr lang="en-US" sz="1200" dirty="0" err="1"/>
+              <a:t>arbitrario</a:t>
+            </a:r>
+            <a:r>
+              <a:rPr lang="en-US" sz="1200" dirty="0"/>
+              <a:t>, non </a:t>
+            </a:r>
+            <a:r>
+              <a:rPr lang="en-US" sz="1200" dirty="0" err="1"/>
+              <a:t>influisce</a:t>
+            </a:r>
+            <a:r>
+              <a:rPr lang="en-US" sz="1200" dirty="0"/>
+              <a:t> </a:t>
+            </a:r>
+            <a:r>
+              <a:rPr lang="en-US" sz="1200" dirty="0" err="1"/>
+              <a:t>sul</a:t>
+            </a:r>
+            <a:r>
+              <a:rPr lang="en-US" sz="1200" dirty="0"/>
+              <a:t> </a:t>
+            </a:r>
+            <a:r>
+              <a:rPr lang="en-US" sz="1200" dirty="0" err="1"/>
+              <a:t>risultato</a:t>
+            </a:r>
+            <a:r>
+              <a:rPr lang="en-US" sz="1200" dirty="0"/>
+              <a:t>.</a:t>
+            </a:r>
+          </a:p>
+        </p:txBody>
+      </p:sp>
     </p:spTree>
   </p:cSld>
   <p:clrMapOvr>
@@ -3031,20 +8330,265 @@
                             </p:stCondLst>
                             <p:childTnLst>
                               <p:par>
-                                <p:cTn id="5" presetID="10" presetClass="entr" presetSubtype="0" fill="hold" nodeType="clickEffect">
+                                <p:cTn id="5" presetID="10" presetClass="exit" presetSubtype="0" fill="hold" grpId="0" nodeType="clickEffect">
+                                  <p:stCondLst>
+                                    <p:cond delay="0"/>
+                                  </p:stCondLst>
+                                  <p:childTnLst>
+                                    <p:animEffect transition="out" filter="fade">
+                                      <p:cBhvr>
+                                        <p:cTn id="6" dur="500"/>
+                                        <p:tgtEl>
+                                          <p:spTgt spid="10"/>
+                                        </p:tgtEl>
+                                      </p:cBhvr>
+                                    </p:animEffect>
+                                    <p:set>
+                                      <p:cBhvr>
+                                        <p:cTn id="7" dur="1" fill="hold">
+                                          <p:stCondLst>
+                                            <p:cond delay="499"/>
+                                          </p:stCondLst>
+                                        </p:cTn>
+                                        <p:tgtEl>
+                                          <p:spTgt spid="10"/>
+                                        </p:tgtEl>
+                                        <p:attrNameLst>
+                                          <p:attrName>style.visibility</p:attrName>
+                                        </p:attrNameLst>
+                                      </p:cBhvr>
+                                      <p:to>
+                                        <p:strVal val="hidden"/>
+                                      </p:to>
+                                    </p:set>
+                                  </p:childTnLst>
+                                </p:cTn>
+                              </p:par>
+                              <p:par>
+                                <p:cTn id="8" presetID="10" presetClass="exit" presetSubtype="0" fill="hold" grpId="0" nodeType="withEffect">
+                                  <p:stCondLst>
+                                    <p:cond delay="0"/>
+                                  </p:stCondLst>
+                                  <p:childTnLst>
+                                    <p:animEffect transition="out" filter="fade">
+                                      <p:cBhvr>
+                                        <p:cTn id="9" dur="500"/>
+                                        <p:tgtEl>
+                                          <p:spTgt spid="6"/>
+                                        </p:tgtEl>
+                                      </p:cBhvr>
+                                    </p:animEffect>
+                                    <p:set>
+                                      <p:cBhvr>
+                                        <p:cTn id="10" dur="1" fill="hold">
+                                          <p:stCondLst>
+                                            <p:cond delay="499"/>
+                                          </p:stCondLst>
+                                        </p:cTn>
+                                        <p:tgtEl>
+                                          <p:spTgt spid="6"/>
+                                        </p:tgtEl>
+                                        <p:attrNameLst>
+                                          <p:attrName>style.visibility</p:attrName>
+                                        </p:attrNameLst>
+                                      </p:cBhvr>
+                                      <p:to>
+                                        <p:strVal val="hidden"/>
+                                      </p:to>
+                                    </p:set>
+                                  </p:childTnLst>
+                                </p:cTn>
+                              </p:par>
+                              <p:par>
+                                <p:cTn id="11" presetID="10" presetClass="exit" presetSubtype="0" fill="hold" nodeType="withEffect">
+                                  <p:stCondLst>
+                                    <p:cond delay="0"/>
+                                  </p:stCondLst>
+                                  <p:childTnLst>
+                                    <p:animEffect transition="out" filter="fade">
+                                      <p:cBhvr>
+                                        <p:cTn id="12" dur="500"/>
+                                        <p:tgtEl>
+                                          <p:spTgt spid="7"/>
+                                        </p:tgtEl>
+                                      </p:cBhvr>
+                                    </p:animEffect>
+                                    <p:set>
+                                      <p:cBhvr>
+                                        <p:cTn id="13" dur="1" fill="hold">
+                                          <p:stCondLst>
+                                            <p:cond delay="499"/>
+                                          </p:stCondLst>
+                                        </p:cTn>
+                                        <p:tgtEl>
+                                          <p:spTgt spid="7"/>
+                                        </p:tgtEl>
+                                        <p:attrNameLst>
+                                          <p:attrName>style.visibility</p:attrName>
+                                        </p:attrNameLst>
+                                      </p:cBhvr>
+                                      <p:to>
+                                        <p:strVal val="hidden"/>
+                                      </p:to>
+                                    </p:set>
+                                  </p:childTnLst>
+                                </p:cTn>
+                              </p:par>
+                              <p:par>
+                                <p:cTn id="14" presetID="10" presetClass="exit" presetSubtype="0" fill="hold" grpId="0" nodeType="withEffect">
+                                  <p:stCondLst>
+                                    <p:cond delay="0"/>
+                                  </p:stCondLst>
+                                  <p:childTnLst>
+                                    <p:animEffect transition="out" filter="fade">
+                                      <p:cBhvr>
+                                        <p:cTn id="15" dur="500"/>
+                                        <p:tgtEl>
+                                          <p:spTgt spid="25"/>
+                                        </p:tgtEl>
+                                      </p:cBhvr>
+                                    </p:animEffect>
+                                    <p:set>
+                                      <p:cBhvr>
+                                        <p:cTn id="16" dur="1" fill="hold">
+                                          <p:stCondLst>
+                                            <p:cond delay="499"/>
+                                          </p:stCondLst>
+                                        </p:cTn>
+                                        <p:tgtEl>
+                                          <p:spTgt spid="25"/>
+                                        </p:tgtEl>
+                                        <p:attrNameLst>
+                                          <p:attrName>style.visibility</p:attrName>
+                                        </p:attrNameLst>
+                                      </p:cBhvr>
+                                      <p:to>
+                                        <p:strVal val="hidden"/>
+                                      </p:to>
+                                    </p:set>
+                                  </p:childTnLst>
+                                </p:cTn>
+                              </p:par>
+                              <p:par>
+                                <p:cTn id="17" presetID="10" presetClass="exit" presetSubtype="0" fill="hold" grpId="0" nodeType="withEffect">
+                                  <p:stCondLst>
+                                    <p:cond delay="0"/>
+                                  </p:stCondLst>
+                                  <p:childTnLst>
+                                    <p:animEffect transition="out" filter="fade">
+                                      <p:cBhvr>
+                                        <p:cTn id="18" dur="500"/>
+                                        <p:tgtEl>
+                                          <p:spTgt spid="24"/>
+                                        </p:tgtEl>
+                                      </p:cBhvr>
+                                    </p:animEffect>
+                                    <p:set>
+                                      <p:cBhvr>
+                                        <p:cTn id="19" dur="1" fill="hold">
+                                          <p:stCondLst>
+                                            <p:cond delay="499"/>
+                                          </p:stCondLst>
+                                        </p:cTn>
+                                        <p:tgtEl>
+                                          <p:spTgt spid="24"/>
+                                        </p:tgtEl>
+                                        <p:attrNameLst>
+                                          <p:attrName>style.visibility</p:attrName>
+                                        </p:attrNameLst>
+                                      </p:cBhvr>
+                                      <p:to>
+                                        <p:strVal val="hidden"/>
+                                      </p:to>
+                                    </p:set>
+                                  </p:childTnLst>
+                                </p:cTn>
+                              </p:par>
+                              <p:par>
+                                <p:cTn id="20" presetID="10" presetClass="exit" presetSubtype="0" fill="hold" nodeType="withEffect">
+                                  <p:stCondLst>
+                                    <p:cond delay="0"/>
+                                  </p:stCondLst>
+                                  <p:childTnLst>
+                                    <p:animEffect transition="out" filter="fade">
+                                      <p:cBhvr>
+                                        <p:cTn id="21" dur="500"/>
+                                        <p:tgtEl>
+                                          <p:spTgt spid="17"/>
+                                        </p:tgtEl>
+                                      </p:cBhvr>
+                                    </p:animEffect>
+                                    <p:set>
+                                      <p:cBhvr>
+                                        <p:cTn id="22" dur="1" fill="hold">
+                                          <p:stCondLst>
+                                            <p:cond delay="499"/>
+                                          </p:stCondLst>
+                                        </p:cTn>
+                                        <p:tgtEl>
+                                          <p:spTgt spid="17"/>
+                                        </p:tgtEl>
+                                        <p:attrNameLst>
+                                          <p:attrName>style.visibility</p:attrName>
+                                        </p:attrNameLst>
+                                      </p:cBhvr>
+                                      <p:to>
+                                        <p:strVal val="hidden"/>
+                                      </p:to>
+                                    </p:set>
+                                  </p:childTnLst>
+                                </p:cTn>
+                              </p:par>
+                              <p:par>
+                                <p:cTn id="23" presetID="10" presetClass="exit" presetSubtype="0" fill="hold" grpId="0" nodeType="withEffect">
+                                  <p:stCondLst>
+                                    <p:cond delay="0"/>
+                                  </p:stCondLst>
+                                  <p:childTnLst>
+                                    <p:animEffect transition="out" filter="fade">
+                                      <p:cBhvr>
+                                        <p:cTn id="24" dur="500"/>
+                                        <p:tgtEl>
+                                          <p:spTgt spid="5"/>
+                                        </p:tgtEl>
+                                      </p:cBhvr>
+                                    </p:animEffect>
+                                    <p:set>
+                                      <p:cBhvr>
+                                        <p:cTn id="25" dur="1" fill="hold">
+                                          <p:stCondLst>
+                                            <p:cond delay="499"/>
+                                          </p:stCondLst>
+                                        </p:cTn>
+                                        <p:tgtEl>
+                                          <p:spTgt spid="5"/>
+                                        </p:tgtEl>
+                                        <p:attrNameLst>
+                                          <p:attrName>style.visibility</p:attrName>
+                                        </p:attrNameLst>
+                                      </p:cBhvr>
+                                      <p:to>
+                                        <p:strVal val="hidden"/>
+                                      </p:to>
+                                    </p:set>
+                                  </p:childTnLst>
+                                </p:cTn>
+                              </p:par>
+                              <p:par>
+                                <p:cTn id="26" presetID="10" presetClass="entr" presetSubtype="0" fill="hold" nodeType="withEffect">
                                   <p:stCondLst>
                                     <p:cond delay="0"/>
                                   </p:stCondLst>
                                   <p:childTnLst>
                                     <p:set>
                                       <p:cBhvr>
-                                        <p:cTn id="6" dur="1" fill="hold">
+                                        <p:cTn id="27" dur="1" fill="hold">
                                           <p:stCondLst>
                                             <p:cond delay="0"/>
                                           </p:stCondLst>
                                         </p:cTn>
                                         <p:tgtEl>
-                                          <p:spTgt spid="12"/>
+                                          <p:spTgt spid="16"/>
                                         </p:tgtEl>
                                         <p:attrNameLst>
                                           <p:attrName>style.visibility</p:attrName>
@@ -3056,9 +8600,9 @@
                                     </p:set>
                                     <p:animEffect transition="in" filter="fade">
                                       <p:cBhvr>
-                                        <p:cTn id="7" dur="500"/>
+                                        <p:cTn id="28" dur="500"/>
                                         <p:tgtEl>
-                                          <p:spTgt spid="12"/>
+                                          <p:spTgt spid="16"/>
                                         </p:tgtEl>
                                       </p:cBhvr>
                                     </p:animEffect>
@@ -3066,20 +8610,20 @@
                                 </p:cTn>
                               </p:par>
                               <p:par>
-                                <p:cTn id="8" presetID="10" presetClass="entr" presetSubtype="0" fill="hold" grpId="0" nodeType="withEffect">
+                                <p:cTn id="29" presetID="10" presetClass="entr" presetSubtype="0" fill="hold" grpId="0" nodeType="withEffect">
                                   <p:stCondLst>
                                     <p:cond delay="0"/>
                                   </p:stCondLst>
                                   <p:childTnLst>
                                     <p:set>
                                       <p:cBhvr>
-                                        <p:cTn id="9" dur="1" fill="hold">
+                                        <p:cTn id="30" dur="1" fill="hold">
                                           <p:stCondLst>
                                             <p:cond delay="0"/>
                                           </p:stCondLst>
                                         </p:cTn>
                                         <p:tgtEl>
-                                          <p:spTgt spid="13"/>
+                                          <p:spTgt spid="9"/>
                                         </p:tgtEl>
                                         <p:attrNameLst>
                                           <p:attrName>style.visibility</p:attrName>
@@ -3091,9 +8635,114 @@
                                     </p:set>
                                     <p:animEffect transition="in" filter="fade">
                                       <p:cBhvr>
-                                        <p:cTn id="10" dur="500"/>
+                                        <p:cTn id="31" dur="500"/>
                                         <p:tgtEl>
-                                          <p:spTgt spid="13"/>
+                                          <p:spTgt spid="9"/>
+                                        </p:tgtEl>
+                                      </p:cBhvr>
+                                    </p:animEffect>
+                                  </p:childTnLst>
+                                </p:cTn>
+                              </p:par>
+                              <p:par>
+                                <p:cTn id="32" presetID="10" presetClass="entr" presetSubtype="0" fill="hold" nodeType="withEffect">
+                                  <p:stCondLst>
+                                    <p:cond delay="0"/>
+                                  </p:stCondLst>
+                                  <p:childTnLst>
+                                    <p:set>
+                                      <p:cBhvr>
+                                        <p:cTn id="33" dur="1" fill="hold">
+                                          <p:stCondLst>
+                                            <p:cond delay="0"/>
+                                          </p:stCondLst>
+                                        </p:cTn>
+                                        <p:tgtEl>
+                                          <p:spTgt spid="14"/>
+                                        </p:tgtEl>
+                                        <p:attrNameLst>
+                                          <p:attrName>style.visibility</p:attrName>
+                                        </p:attrNameLst>
+                                      </p:cBhvr>
+                                      <p:to>
+                                        <p:strVal val="visible"/>
+                                      </p:to>
+                                    </p:set>
+                                    <p:animEffect transition="in" filter="fade">
+                                      <p:cBhvr>
+                                        <p:cTn id="34" dur="500"/>
+                                        <p:tgtEl>
+                                          <p:spTgt spid="14"/>
+                                        </p:tgtEl>
+                                      </p:cBhvr>
+                                    </p:animEffect>
+                                  </p:childTnLst>
+                                </p:cTn>
+                              </p:par>
+                              <p:par>
+                                <p:cTn id="35" presetID="10" presetClass="entr" presetSubtype="0" fill="hold" grpId="0" nodeType="withEffect">
+                                  <p:stCondLst>
+                                    <p:cond delay="0"/>
+                                  </p:stCondLst>
+                                  <p:childTnLst>
+                                    <p:set>
+                                      <p:cBhvr>
+                                        <p:cTn id="36" dur="1" fill="hold">
+                                          <p:stCondLst>
+                                            <p:cond delay="0"/>
+                                          </p:stCondLst>
+                                        </p:cTn>
+                                        <p:tgtEl>
+                                          <p:spTgt spid="18"/>
+                                        </p:tgtEl>
+                                        <p:attrNameLst>
+                                          <p:attrName>style.visibility</p:attrName>
+                                        </p:attrNameLst>
+                                      </p:cBhvr>
+                                      <p:to>
+                                        <p:strVal val="visible"/>
+                                      </p:to>
+                                    </p:set>
+                                    <p:animEffect transition="in" filter="fade">
+                                      <p:cBhvr>
+                                        <p:cTn id="37" dur="500"/>
+                                        <p:tgtEl>
+                                          <p:spTgt spid="18"/>
+                                        </p:tgtEl>
+                                      </p:cBhvr>
+                                    </p:animEffect>
+                                  </p:childTnLst>
+                                </p:cTn>
+                              </p:par>
+                              <p:par>
+                                <p:cTn id="38" presetID="10" presetClass="entr" presetSubtype="0" fill="hold" grpId="0" nodeType="withEffect">
+                                  <p:stCondLst>
+                                    <p:cond delay="0"/>
+                                  </p:stCondLst>
+                                  <p:childTnLst>
+                                    <p:set>
+                                      <p:cBhvr>
+                                        <p:cTn id="39" dur="1" fill="hold">
+                                          <p:stCondLst>
+                                            <p:cond delay="0"/>
+                                          </p:stCondLst>
+                                        </p:cTn>
+                                        <p:tgtEl>
+                                          <p:spTgt spid="15"/>
+                                        </p:tgtEl>
+                                        <p:attrNameLst>
+                                          <p:attrName>style.visibility</p:attrName>
+                                        </p:attrNameLst>
+                                      </p:cBhvr>
+                                      <p:to>
+                                        <p:strVal val="visible"/>
+                                      </p:to>
+                                    </p:set>
+                                    <p:animEffect transition="in" filter="fade">
+                                      <p:cBhvr>
+                                        <p:cTn id="40" dur="500"/>
+                                        <p:tgtEl>
+                                          <p:spTgt spid="15"/>
                                         </p:tgtEl>
                                       </p:cBhvr>
                                     </p:animEffect>
@@ -3128,7 +8777,14 @@
       </p:par>
     </p:tnLst>
     <p:bldLst>
-      <p:bldP spid="13" grpId="0" animBg="1"/>
+      <p:bldP spid="5" grpId="0" animBg="1"/>
+      <p:bldP spid="24" grpId="0" animBg="1"/>
+      <p:bldP spid="25" grpId="0" animBg="1"/>
+      <p:bldP spid="6" grpId="0"/>
+      <p:bldP spid="10" grpId="0"/>
+      <p:bldP spid="9" grpId="0" animBg="1"/>
+      <p:bldP spid="15" grpId="0"/>
+      <p:bldP spid="18" grpId="0"/>
     </p:bldLst>
   </p:timing>
 </p:sld>
